--- a/Storyboarding/NewLectures/05_Composition_REVISED.pptx
+++ b/Storyboarding/NewLectures/05_Composition_REVISED.pptx
@@ -856,7 +856,7 @@
           <a:lstStyle/>
           <a:p>
             <a:r>
-              <a:t>Diagonals imply movement. They read as something in the middle of falling, running, or being knocked over, because that is literally what they are. This is why the canted or Dutch angle works — you take a stable frame and rotate it, and every vertical in the shot becomes a diagonal at once. The whole frame gets nervous. For your action sequences, count your diagonals. If a chase is composed entirely of horizontals and verticals, it will feel slow no matter how fast you cut it.</a:t>
+              <a:t>Diagonals imply movement. They read as something in the middle of falling, running, or being knocked over, because that is literally what they are. This is why the canted or Dutch angle works. You take a stable frame and rotate it, and every vertical in the shot becomes a diagonal at once. The whole frame gets nervous. For your action sequences, count your diagonals. If a chase is composed entirely of horizontals and verticals, it will feel slow no matter how fast you cut it.</a:t>
             </a:r>
           </a:p>
         </p:txBody>
@@ -1066,7 +1066,7 @@
           <a:lstStyle/>
           <a:p>
             <a:r>
-              <a:t>Shape is the next level up from line. When you thumbnail, you are working almost entirely in shape — big masses, no detail. That is not laziness, it is the correct order of operations. If the shapes are wrong the detail cannot fix it, and if the shapes are right the detail is almost optional.</a:t>
+              <a:t>Shape is the next level up from line. When you thumbnail, you are working almost entirely in shape: big masses, no detail. That is not laziness, it is the correct order of operations. If the shapes are wrong the detail cannot fix it, and if the shapes are right the detail is almost optional.</a:t>
             </a:r>
           </a:p>
         </p:txBody>
@@ -1136,7 +1136,7 @@
           <a:lstStyle/>
           <a:p>
             <a:r>
-              <a:t>A triangle gives you stability and a focal point at the same time, which is why it is everywhere. For three characters it is almost automatic. Put the character who has power in this scene at the apex and the composition has already told the audience the relationship before anyone speaks. Then flip it — put the apex at the bottom and the whole thing feels precarious.</a:t>
+              <a:t>A triangle gives you stability and a focal point at the same time, which is why it is everywhere. For three characters it is almost automatic. Put the character who has power in this scene at the apex and the composition has already told the audience the relationship before anyone speaks. Then flip it: put the apex at the bottom and the whole thing feels precarious.</a:t>
             </a:r>
           </a:p>
         </p:txBody>
@@ -1206,7 +1206,7 @@
           <a:lstStyle/>
           <a:p>
             <a:r>
-              <a:t>Circles and arches enclose. A group staged in a circle reads as a unit, which is useful when you want a character excluded from that unit — you simply leave them outside the circle and the audience understands immediately. An arch over a character elevates them. This is old, it is in religious painting, and it still works because audiences have been trained on it for centuries.</a:t>
+              <a:t>Circles and arches enclose. A group staged in a circle reads as a unit, which is useful when you want a character excluded from that unit. You simply leave them outside the circle and the audience understands immediately. An arch over a character elevates them. This is old, it is in religious painting, and it still works because audiences have been trained on it for centuries.</a:t>
             </a:r>
           </a:p>
         </p:txBody>
@@ -1346,7 +1346,7 @@
           <a:lstStyle/>
           <a:p>
             <a:r>
-              <a:t>[ADD IMAGE: the still from Pixar's Presto — the magician pulling the rabbit from the hat.]</a:t>
+              <a:t>[ADD IMAGE: the still from Pixar's Presto: the magician pulling the rabbit from the hat.]</a:t>
             </a:r>
           </a:p>
           <a:p/>
@@ -1422,7 +1422,7 @@
           <a:lstStyle/>
           <a:p>
             <a:r>
-              <a:t>Half a second. Twelve frames. That is a normal hold for a cut in an action sequence. A poster designer gets as long as the viewer is willing to stand there. You get less time than it takes to read this sentence. Composition is not a refinement you add at the end — it is the only reason the shot communicates at all.</a:t>
+              <a:t>Half a second. Twelve frames. That is a normal hold for a cut in an action sequence. A poster designer gets as long as the viewer is willing to stand there. You get less time than it takes to read this sentence. Composition is not a refinement you add at the end. It is the only reason the shot communicates at all.</a:t>
             </a:r>
           </a:p>
         </p:txBody>
@@ -1492,7 +1492,7 @@
           <a:lstStyle/>
           <a:p>
             <a:r>
-              <a:t>This is a priority list and it is close to automatic in human vision. Highest contrast wins first. Then anything that moves. Then faces — we are relentless about faces. Then areas of fine detail. You can use this two ways. Put the thing that matters at the top of the list, or deliberately hide something by placing it low on the list. That second one is the magician's version, and it is how you plant a detail the audience only notices on the second viewing.</a:t>
+              <a:t>This is a priority list and it is close to automatic in human vision. Highest contrast wins first. Then anything that moves. Then faces. We are relentless about faces. Then areas of fine detail. You can use this two ways. Put the thing that matters at the top of the list, or deliberately hide something by placing it low on the list. That second one is the magician's version, and it is how you plant a detail the audience only notices on the second viewing.</a:t>
             </a:r>
           </a:p>
         </p:txBody>
@@ -1632,7 +1632,7 @@
           <a:lstStyle/>
           <a:p>
             <a:r>
-              <a:t>Squint until everything blurs into masses of light and dark. That blurred version is roughly what the audience gets in half a second. If your character disappears into the background when you squint, no amount of line work will save it. Shrink your panel to thumbnail size — same test, and it is why we thumbnail in the first place. This takes two seconds and it will catch more problems than any other habit I can give you.</a:t>
+              <a:t>Squint until everything blurs into masses of light and dark. That blurred version is roughly what the audience gets in half a second. If your character disappears into the background when you squint, no amount of line work will save it. Shrink your panel to thumbnail size: same test, and it is why we thumbnail in the first place. This takes two seconds and it will catch more problems than any other habit I can give you.</a:t>
             </a:r>
           </a:p>
         </p:txBody>
@@ -1912,7 +1912,7 @@
           <a:lstStyle/>
           <a:p>
             <a:r>
-              <a:t>Things further away are lighter and lower in contrast because there is air in the way. Painters have used this for centuries and it is the cheapest depth cue you own. Here is why I am emphasising it: it does not require you to be good at perspective. If your vanishing points are a mess but your value depth is right, the panel still reads as deep. For a lot of you that is an important escape hatch, and it is not a compromise — professionals rely on it too.</a:t>
+              <a:t>Things further away are lighter and lower in contrast because there is air in the way. Painters have used this for centuries and it is the cheapest depth cue you own. Here is why I am emphasising it: it does not require you to be good at perspective. If your vanishing points are a mess but your value depth is right, the panel still reads as deep. For a lot of you that is an important escape hatch, and it is not a compromise: professionals rely on it too.</a:t>
             </a:r>
           </a:p>
         </p:txBody>
@@ -1982,7 +1982,7 @@
           <a:lstStyle/>
           <a:p>
             <a:r>
-              <a:t>Contrast is the distance between your extremes, and it does two jobs at once. It sets mood — thrillers and horror run high contrast, gentle scenes run low. And it directs attention, which is the magician's use. The highest contrast area in your frame is where the audience is looking, whether or not you chose it. So choose it.</a:t>
+              <a:t>Contrast is the distance between your extremes, and it does two jobs at once. It sets mood: thrillers and horror run high contrast, gentle scenes run low. And it directs attention, which is the magician's use. The highest contrast area in your frame is where the audience is looking, whether or not you chose it. So choose it.</a:t>
             </a:r>
           </a:p>
         </p:txBody>
@@ -2052,7 +2052,7 @@
           <a:lstStyle/>
           <a:p>
             <a:r>
-              <a:t>Divide the frame into thirds horizontally and vertically and you get four intersection points. Subjects placed there tend to be more interesting than subjects dead centre. This is genuinely useful and also genuinely overrated — treat it as the answer when you do not have a better one, not as a rule you must obey. It is a floor, not a ceiling.</a:t>
+              <a:t>Divide the frame into thirds horizontally and vertically and you get four intersection points. Subjects placed there tend to be more interesting than subjects dead centre. This is genuinely useful and also genuinely overrated: treat it as the answer when you do not have a better one, not as a rule you must obey. It is a floor, not a ceiling.</a:t>
             </a:r>
           </a:p>
         </p:txBody>
@@ -2122,7 +2122,7 @@
           <a:lstStyle/>
           <a:p>
             <a:r>
-              <a:t>Here is the thing students find hardest to believe: the audience is almost completely under your control. Value contrast, movement, a face, a line pointing somewhere — these are not suggestions, they are instructions the eye follows automatically. The danger is not that the audience will refuse to look where you point. It is that if you have not pointed, they will look at whatever is brightest or busiest, which is often the thing that does not matter. An unplanned frame still directs attention. It just directs it somewhere useless.</a:t>
+              <a:t>Here is the thing students find hardest to believe: the audience is almost completely under your control. Value contrast, movement, a face, a line pointing somewhere: these are not suggestions, they are instructions the eye follows automatically. The danger is not that the audience will refuse to look where you point. It is that if you have not pointed, they will look at whatever is brightest or busiest, which is often the thing that does not matter. An unplanned frame still directs attention. It just directs it somewhere useless.</a:t>
             </a:r>
           </a:p>
         </p:txBody>
@@ -2332,7 +2332,7 @@
           <a:lstStyle/>
           <a:p>
             <a:r>
-              <a:t>Asymmetrical balance is when things are not mirrored but the frame still feels resolved — a large form on one side balanced by several small ones on the other. It carries more visual tension than symmetry, and it is what most shots use most of the time, because it feels observed rather than arranged.</a:t>
+              <a:t>Asymmetrical balance is when things are not mirrored but the frame still feels resolved: a large form on one side balanced by several small ones on the other. It carries more visual tension than symmetry, and it is what most shots use most of the time, because it feels observed rather than arranged.</a:t>
             </a:r>
           </a:p>
         </p:txBody>
@@ -2472,7 +2472,7 @@
           <a:lstStyle/>
           <a:p>
             <a:r>
-              <a:t>Positive space is the subject, negative space is everything around it. The mistake is treating negative space as leftover. Think about two characters at opposite edges of a wide frame with nothing between them. The empty middle is the entire content of the shot — it is the relationship. You did not draw it, and it is what the scene is about.</a:t>
+              <a:t>Positive space is the subject, negative space is everything around it. The mistake is treating negative space as leftover. Think about two characters at opposite edges of a wide frame with nothing between them. The empty middle is the entire content of the shot. It is the relationship. You did not draw it, and it is what the scene is about.</a:t>
             </a:r>
           </a:p>
         </p:txBody>
@@ -2542,7 +2542,7 @@
           <a:lstStyle/>
           <a:p>
             <a:r>
-              <a:t>Three specific, checkable rules, and they will improve your panels faster than anything else on this slide deck. Leave space in front of a look and in front of a movement. A character walking frame-right with all the space behind them feels like they are about to hit a wall. Give the eye somewhere to go. And when you want discomfort — a character trapped, cornered, about to be hit — take the room away on purpose. The audience feels it before they can name it.</a:t>
+              <a:t>Three specific, checkable rules, and they will improve your panels faster than anything else on this slide deck. Leave space in front of a look and in front of a movement. A character walking frame-right with all the space behind them feels like they are about to hit a wall. Give the eye somewhere to go. And when you want discomfort (a character trapped, cornered, about to be hit) take the room away on purpose. The audience feels it before they can name it.</a:t>
             </a:r>
           </a:p>
         </p:txBody>
@@ -2612,7 +2612,7 @@
           <a:lstStyle/>
           <a:p>
             <a:r>
-              <a:t>Framing the subject inside something else — a doorway, a window, a gap between foreground shapes. It does three things at once: it isolates the subject, it creates depth by giving you a foreground, and it can carry meaning. A character framed in a doorway is contained by it. And it is genuinely easy to draw. Two dark shapes at the edges of your panel will do it.</a:t>
+              <a:t>Framing the subject inside something else: a doorway, a window, a gap between foreground shapes. It does three things at once: it isolates the subject, it creates depth by giving you a foreground, and it can carry meaning. A character framed in a doorway is contained by it. And it is genuinely easy to draw. Two dark shapes at the edges of your panel will do it.</a:t>
             </a:r>
           </a:p>
         </p:txBody>
@@ -2682,7 +2682,7 @@
           <a:lstStyle/>
           <a:p>
             <a:r>
-              <a:t>Leading lines are the most direct tool on this list. The eye travels along a line and stops at whatever is at the end of it. The most useful ones are not the obvious roads and railway tracks — they are the ones built out of characters. An arm, a weapon, a look. Those are lines you can add to any shot without changing the environment at all.</a:t>
+              <a:t>Leading lines are the most direct tool on this list. The eye travels along a line and stops at whatever is at the end of it. The most useful ones are not the obvious roads and railway tracks. They are the ones built out of characters. An arm, a weapon, a look. Those are lines you can add to any shot without changing the environment at all.</a:t>
             </a:r>
           </a:p>
         </p:txBody>
@@ -2892,7 +2892,7 @@
           <a:lstStyle/>
           <a:p>
             <a:r>
-              <a:t>When composition works, nobody compliments it. They just follow the story. When it fails, everyone notices, though almost nobody can say why — they say it looks off, or cheap, or confusing. That is your diagnostic. When someone tells you a shot feels wrong, translate it into: my eye went to the wrong place, or my eye did not know where to go at all. Then it is a fixable problem instead of a vague complaint.</a:t>
+              <a:t>When composition works, nobody compliments it. They just follow the story. When it fails, everyone notices, though almost nobody can say why. They say it looks off, or cheap, or confusing. That is your diagnostic. When someone tells you a shot feels wrong, translate it into: my eye went to the wrong place, or my eye did not know where to go at all. Then it is a fixable problem instead of a vague complaint.</a:t>
             </a:r>
           </a:p>
         </p:txBody>
@@ -3172,7 +3172,7 @@
           <a:lstStyle/>
           <a:p>
             <a:r>
-              <a:t>Rhythm in the graphic design sense is repetition inside a single frame. A row of columns, a line of streetlamps, a crowd. Regular rhythm has even intervals and reads as ordered or mechanical. Flowing rhythm curves and reads as natural. Progressive rhythm changes as it repeats and creates a sense of direction — which means it is also a leading line.</a:t>
+              <a:t>Rhythm in the graphic design sense is repetition inside a single frame. A row of columns, a line of streetlamps, a crowd. Regular rhythm has even intervals and reads as ordered or mechanical. Flowing rhythm curves and reads as natural. Progressive rhythm changes as it repeats and creates a sense of direction, which means it is also a leading line.</a:t>
             </a:r>
           </a:p>
         </p:txBody>
@@ -3242,7 +3242,7 @@
           <a:lstStyle/>
           <a:p>
             <a:r>
-              <a:t>Here is the meaning that a graphic design course will never give you. In motion, rhythm is also temporal — the pattern of your cutting. Long, long, long, short. Short short short short. A held silence where the audience expects a cut. This is the musical sense of the word and it is doing the same job that beat and tempo do in music: creating expectation and then satisfying or denying it. You will feel this properly when you build your animatic. Right now, just know that when I say rhythm, I might mean either one.</a:t>
+              <a:t>Here is the meaning that a graphic design course will never give you. In motion, rhythm is also temporal: the pattern of your cutting. Long, long, long, short. Short short short short. A held silence where the audience expects a cut. This is the musical sense of the word and it is doing the same job that beat and tempo do in music: creating expectation and then satisfying or denying it. You will feel this properly when you build your animatic. Right now, just know that when I say rhythm, I might mean either one.</a:t>
             </a:r>
           </a:p>
         </p:txBody>
@@ -3312,7 +3312,7 @@
           <a:lstStyle/>
           <a:p>
             <a:r>
-              <a:t>The interesting work happens when you use both at once. A character running past a line of evenly spaced columns, cut on an even rhythm — the two reinforce each other and the sequence feels mechanical and relentless. Now cut against that even spacing, irregularly, and it feels like something is wrong. Neither drawing changed. The relationship between the rhythms changed. This is a tool almost no student uses and it is available to all of you.</a:t>
+              <a:t>The interesting work happens when you use both at once. A character running past a line of evenly spaced columns, cut on an even rhythm: the two reinforce each other and the sequence feels mechanical and relentless. Now cut against that even spacing, irregularly, and it feels like something is wrong. Neither drawing changed. The relationship between the rhythms changed. This is a tool almost no student uses and it is available to all of you.</a:t>
             </a:r>
           </a:p>
         </p:txBody>
@@ -3382,7 +3382,7 @@
           <a:lstStyle/>
           <a:p>
             <a:r>
-              <a:t>An animation instructor I heard years ago called this ballistics, and the word has stuck with me. Information has momentum. The audience does not reset at a cut — they carry what they just learned, and their eye is still physically pointed where the last shot left it. So the question is never just "does this frame work." It is "where is the audience arriving from, and where am I sending them next." That trajectory is the thing you are actually designing.</a:t>
+              <a:t>An animation instructor I heard years ago called this ballistics, and the word has stuck with me. Information has momentum. The audience does not reset at a cut. They carry what they just learned, and their eye is still physically pointed where the last shot left it. So the question is never just "does this frame work." It is "where is the audience arriving from, and where am I sending them next." That trajectory is the thing you are actually designing.</a:t>
             </a:r>
           </a:p>
         </p:txBody>
@@ -3522,7 +3522,7 @@
           <a:lstStyle/>
           <a:p>
             <a:r>
-              <a:t>At the moment of a cut the audience's eye is at a specific point on the screen. If you place the new subject at that same point, the cut feels seamless — they were already looking at it. If you place it on the opposite side, they have to hunt, and that hunt is felt as a small shock. Both are useful. Smooth for conversation, jolting for a scare. What you cannot do is choose randomly.</a:t>
+              <a:t>At the moment of a cut the audience's eye is at a specific point on the screen. If you place the new subject at that same point, the cut feels seamless. They were already looking at it. If you place it on the opposite side, they have to hunt, and that hunt is felt as a small shock. Both are useful. Smooth for conversation, jolting for a scare. What you cannot do is choose randomly.</a:t>
             </a:r>
           </a:p>
         </p:txBody>
@@ -3592,7 +3592,7 @@
           <a:lstStyle/>
           <a:p>
             <a:r>
-              <a:t>A graphic match is when the shape or composition of one shot rhymes with the next. The famous one is 2001 — an ape throws a bone into the air, and it cuts to a spacecraft with the same shape in the same position. Four million years, one cut, and it works because of composition alone. This is the point where you can no longer separate design from editing, which is exactly the argument of this section.</a:t>
+              <a:t>A graphic match is when the shape or composition of one shot rhymes with the next. The famous one is 2001: an ape throws a bone into the air, and it cuts to a spacecraft with the same shape in the same position. Four million years, one cut, and it works because of composition alone. This is the point where you can no longer separate design from editing, which is exactly the argument of this section.</a:t>
             </a:r>
           </a:p>
         </p:txBody>
@@ -3738,7 +3738,7 @@
           <a:p/>
           <a:p>
             <a:r>
-              <a:t>A motif is a visual element you repeat until it carries meaning. E.T. is the clean example. The bicycle is established as the ordinary world — kids, suburbs, the everyday. So when the bicycle lifts off the ground and crosses the moon, the image is doing far more than showing flight. It is the ordinary transformed, and you understand that instantly because the film taught you the vocabulary first. You can do this in a two-minute sequence. Establish something, then transform it. It costs you nothing except planning, and it is the difference between a sequence and a story.</a:t>
+              <a:t>A motif is a visual element you repeat until it carries meaning. E.T. is the clean example. The bicycle is established as the ordinary world: kids, suburbs, the everyday. So when the bicycle lifts off the ground and crosses the moon, the image is doing far more than showing flight. It is the ordinary transformed, and you understand that instantly because the film taught you the vocabulary first. You can do this in a two-minute sequence. Establish something, then transform it. It costs you nothing except planning, and it is the difference between a sequence and a story.</a:t>
             </a:r>
           </a:p>
         </p:txBody>
@@ -3808,7 +3808,7 @@
           <a:lstStyle/>
           <a:p>
             <a:r>
-              <a:t>The visual echo is the motif's most powerful form: use the same composition twice, and let what happened in between change what it means. Star Wars does it with the binary sunset — the same framing returns, and Luke is a different person standing in it. This costs you nothing but a decision made early. If you take one thing from this entire lecture into your final project, take this one. Plan your last shot to echo your first.</a:t>
+              <a:t>The visual echo is the motif's most powerful form: use the same composition twice, and let what happened in between change what it means. Star Wars does it with the binary sunset: the same framing returns, and Luke is a different person standing in it. This costs you nothing but a decision made early. If you take one thing from this entire lecture into your final project, take this one. Plan your last shot to echo your first.</a:t>
             </a:r>
           </a:p>
         </p:txBody>
@@ -3878,7 +3878,7 @@
           <a:lstStyle/>
           <a:p>
             <a:r>
-              <a:t>Six questions. Run them on every panel before you call it finished. None of them is about drawing ability. Every one of them is a decision you can make correctly on your very first attempt, and every one of them will improve your work more than another hour of rendering would. Print this. Put it next to your monitor. Then let us take a weak panel and fix it together using nothing but this list — no redrawing allowed.</a:t>
+              <a:t>Six questions. Run them on every panel before you call it finished. None of them is about drawing ability. Every one of them is a decision you can make correctly on your very first attempt, and every one of them will improve your work more than another hour of rendering would. Print this. Put it next to your monitor. Then let us take a weak panel and fix it together using nothing but this list: no redrawing allowed.</a:t>
             </a:r>
           </a:p>
         </p:txBody>
@@ -3948,7 +3948,7 @@
           <a:lstStyle/>
           <a:p>
             <a:r>
-              <a:t>This is the most important slide in the first section. Graphic design mostly solves a single static frame that a viewer can study for as long as they like. You are doing something different. Your frame appears, does its job, and is destroyed by a cut. Then another one arrives and has to relate to the one before it. So every principle here has two versions — the version inside one frame, and the version across a sequence. We will do the first half of the lecture on single frames, and then in the last section every rule expands.</a:t>
+              <a:t>This is the most important slide in the first section. Graphic design mostly solves a single static frame that a viewer can study for as long as they like. You are doing something different. Your frame appears, does its job, and is destroyed by a cut. Then another one arrives and has to relate to the one before it. So every principle here has two versions: the version inside one frame, and the version across a sequence. We will do the first half of the lecture on single frames, and then in the last section every rule expands.</a:t>
             </a:r>
           </a:p>
         </p:txBody>
@@ -15434,7 +15434,7 @@
                 </a:solidFill>
                 <a:latin typeface="Garamond"/>
               </a:rPr>
-              <a:t>Chaos  ·  Anxiety  ·  Damage — use sparingly</a:t>
+              <a:t>Chaos  ·  Anxiety  ·  Damage: use sparingly</a:t>
             </a:r>
           </a:p>
         </p:txBody>
@@ -15521,7 +15521,7 @@
           <a:p>
             <a:r>
               <a:rPr lang="en-US" dirty="0" b="0"/>
-              <a:t>An area defined by its outline — height and width</a:t>
+              <a:t>An area defined by its outline: height and width</a:t>
             </a:r>
           </a:p>
           <a:p>
@@ -17940,7 +17940,7 @@
           <a:p>
             <a:r>
               <a:rPr lang="en-US" dirty="0" b="0"/>
-              <a:t>You can fight all of this — but only on purpose</a:t>
+              <a:t>You can fight all of this, but only on purpose</a:t>
             </a:r>
           </a:p>
         </p:txBody>
@@ -18354,7 +18354,7 @@
           <a:p>
             <a:r>
               <a:rPr lang="en-US" dirty="0" b="0"/>
-              <a:t>If not, the pose has failed — regardless of drawing quality</a:t>
+              <a:t>If not, the pose has failed: regardless of drawing quality</a:t>
             </a:r>
           </a:p>
           <a:p>
@@ -19068,7 +19068,7 @@
           <a:p>
             <a:r>
               <a:rPr lang="en-US" dirty="0" b="0"/>
-              <a:t>If you do not send them somewhere, they choose — and they choose badly</a:t>
+              <a:t>If you do not send them somewhere, they choose, and they choose badly</a:t>
             </a:r>
           </a:p>
           <a:p>
@@ -21960,7 +21960,7 @@
           <a:p>
             <a:r>
               <a:rPr lang="en-US" dirty="0" b="0"/>
-              <a:t>Look, see, react — three panels, complete storytelling</a:t>
+              <a:t>Look, see, react: three panels, complete storytelling</a:t>
             </a:r>
           </a:p>
           <a:p>
@@ -22222,7 +22222,7 @@
           <a:p>
             <a:r>
               <a:rPr lang="en-US" sz="4400" dirty="0" b="0"/>
-              <a:t>Closure — Why Crude Boards Work</a:t>
+              <a:t>Closure: Why Crude Boards Work</a:t>
             </a:r>
           </a:p>
         </p:txBody>
@@ -22269,7 +22269,7 @@
           <a:p>
             <a:r>
               <a:rPr lang="en-US" dirty="0" b="0"/>
-              <a:t>Suggestion is faster than depiction — and often stronger</a:t>
+              <a:t>Suggestion is faster than depiction, and often stronger</a:t>
             </a:r>
           </a:p>
           <a:p>
@@ -22802,7 +22802,7 @@
           <a:p>
             <a:r>
               <a:rPr lang="en-US" dirty="0" b="0"/>
-              <a:t>Each principle now gets a second meaning — across time</a:t>
+              <a:t>Each principle now gets a second meaning: across time</a:t>
             </a:r>
           </a:p>
           <a:p>
@@ -23399,7 +23399,7 @@
                 </a:solidFill>
                 <a:latin typeface="Garamond"/>
               </a:rPr>
-              <a:t>SHOT A — wide</a:t>
+              <a:t>SHOT A: wide</a:t>
             </a:r>
           </a:p>
         </p:txBody>
@@ -23570,7 +23570,7 @@
                 </a:solidFill>
                 <a:latin typeface="Garamond"/>
               </a:rPr>
-              <a:t>SHOT B — close, high contrast</a:t>
+              <a:t>SHOT B: close, high contrast</a:t>
             </a:r>
           </a:p>
         </p:txBody>
@@ -24033,7 +24033,7 @@
                 </a:solidFill>
                 <a:latin typeface="Garamond"/>
               </a:rPr>
-              <a:t>SHOT B — matched position</a:t>
+              <a:t>SHOT B: matched position</a:t>
             </a:r>
           </a:p>
         </p:txBody>
@@ -24360,7 +24360,7 @@
           <a:p>
             <a:r>
               <a:rPr lang="en-US" dirty="0" b="0"/>
-              <a:t>You already respond to all of it — today you learn to use it on purpose</a:t>
+              <a:t>You already respond to all of it: today you learn to use it on purpose</a:t>
             </a:r>
           </a:p>
         </p:txBody>
@@ -24465,7 +24465,7 @@
           <a:p>
             <a:r>
               <a:rPr lang="en-US" dirty="0" b="0"/>
-              <a:t>Then you use it — and they feel it without knowing why</a:t>
+              <a:t>Then you use it, and they feel it without knowing why</a:t>
             </a:r>
           </a:p>
         </p:txBody>
@@ -24570,7 +24570,7 @@
           <a:p>
             <a:r>
               <a:rPr lang="en-US" dirty="0" b="0"/>
-              <a:t>The most satisfying tool you own — and it is free</a:t>
+              <a:t>The most satisfying tool you own, and it is free</a:t>
             </a:r>
           </a:p>
         </p:txBody>
@@ -24978,37 +24978,37 @@
           <a:p>
             <a:r>
               <a:rPr lang="en-US" dirty="0" b="0"/>
-              <a:t>LINE — the mark between two points</a:t>
+              <a:t>LINE: the mark between two points</a:t>
             </a:r>
           </a:p>
           <a:p>
             <a:r>
               <a:rPr lang="en-US" dirty="0" b="0"/>
-              <a:t>SHAPE — a self-contained area, geometric or organic</a:t>
+              <a:t>SHAPE: a self-contained area, geometric or organic</a:t>
             </a:r>
           </a:p>
           <a:p>
             <a:r>
               <a:rPr lang="en-US" dirty="0" b="0"/>
-              <a:t>DIRECTION — every line has one: horizontal, vertical, or oblique</a:t>
+              <a:t>DIRECTION. Every line has one: horizontal, vertical, or oblique</a:t>
             </a:r>
           </a:p>
           <a:p>
             <a:r>
               <a:rPr lang="en-US" dirty="0" b="0"/>
-              <a:t>SIZE — the area one shape occupies relative to another</a:t>
+              <a:t>SIZE: the area one shape occupies relative to another</a:t>
             </a:r>
           </a:p>
           <a:p>
             <a:r>
               <a:rPr lang="en-US" dirty="0" b="0"/>
-              <a:t>TEXTURE — the surface quality: rough, smooth, soft, hard</a:t>
+              <a:t>TEXTURE: the surface quality: rough, smooth, soft, hard</a:t>
             </a:r>
           </a:p>
           <a:p>
             <a:r>
               <a:rPr lang="en-US" dirty="0" b="0"/>
-              <a:t>VALUE — the lightness or darkness of a thing</a:t>
+              <a:t>VALUE: the lightness or darkness of a thing</a:t>
             </a:r>
           </a:p>
         </p:txBody>

--- a/Storyboarding/NewLectures/05_Composition_REVISED.pptx
+++ b/Storyboarding/NewLectures/05_Composition_REVISED.pptx
@@ -1276,7 +1276,7 @@
           <a:lstStyle/>
           <a:p>
             <a:r>
-              <a:t>This is one animation figured out long before anyone wrote it down, and your animation majors will recognise it immediately. Round shapes read as safe and appealing. Squares read as dependable and immovable. Angles read as threat. Look at almost any animated cast and the villain has sharper shapes than the hero. It applies to environments and props too, not just characters. A room built from angles is not a safe room, and you did not have to tell anyone that.</a:t>
+              <a:t>This is one animation figured out long before anyone wrote it down, and your animation majors will recognize it immediately. Round shapes read as safe and appealing. Squares read as dependable and immovable. Angles read as threat. Look at almost any animated cast and the villain has sharper shapes than the hero. It applies to environments and props too, not just characters. A room built from angles is not a safe room, and you did not have to tell anyone that.</a:t>
             </a:r>
           </a:p>
         </p:txBody>
@@ -1632,7 +1632,7 @@
           <a:lstStyle/>
           <a:p>
             <a:r>
-              <a:t>Squint until everything blurs into masses of light and dark. That blurred version is roughly what the audience gets in half a second. If your character disappears into the background when you squint, no amount of line work will save it. Shrink your panel to thumbnail size: same test, and it is why we thumbnail in the first place. This takes two seconds and it will catch more problems than any other habit I can give you.</a:t>
+              <a:t>Squint until everything blurs into masses of light and dark. That blurred version is roughly what the audience gets in half a second. If your character disappears into the background when you squint, no amount of line work will save it. Shrink your panel to thumbnail size: same test, and it is why we thumbnail in the first place. This takes two seconds and it will catch more problems than any other habit on this list.</a:t>
             </a:r>
           </a:p>
         </p:txBody>
@@ -1702,7 +1702,7 @@
           <a:lstStyle/>
           <a:p>
             <a:r>
-              <a:t>Figure and ground. Your subject is the figure; everything behind it is the ground. They have to be different in value or the eye cannot separate them. The most common student failure is a mid-grey character standing in front of a mid-grey background. Every line is drawn correctly and the panel is still unreadable. The good news is that this has nothing whatsoever to do with drawing ability. It is a decision, and you can make it correctly on the very first panel you ever draw.</a:t>
+              <a:t>Figure and ground. Your subject is the figure; everything behind it is the ground. They have to be different in value or the eye cannot separate them. The most common student failure is a mid-gray character standing in front of a mid-gray background. Every line is drawn correctly and the panel is still unreadable. The good news is that this has nothing whatsoever to do with drawing ability. It is a decision, and you can make it correctly on the very first panel you ever draw.</a:t>
             </a:r>
           </a:p>
         </p:txBody>
@@ -1842,7 +1842,7 @@
           <a:lstStyle/>
           <a:p>
             <a:r>
-              <a:t>The silhouette test. Fill the figure in solid black and see whether the action still reads. Animation has used this for a century, and it is a hiring criterion in games for character design. It is also completely independent of your skill level, which is why I keep coming back to it. A badly drawn figure with a strong silhouette communicates. A beautifully drawn figure with a weak one does not. In this class, the first one gets the better grade.</a:t>
+              <a:t>The silhouette test. Fill the figure in solid black and see whether the action still reads. Animation has used this for a century, and it is a hiring criterion in games for character design. It is also completely independent of your skill level, which is why it keeps coming back. A badly drawn figure with a strong silhouette communicates. A beautifully drawn figure with a weak one does not. In this class, the first one gets the better grade.</a:t>
             </a:r>
           </a:p>
         </p:txBody>
@@ -1912,7 +1912,7 @@
           <a:lstStyle/>
           <a:p>
             <a:r>
-              <a:t>Things further away are lighter and lower in contrast because there is air in the way. Painters have used this for centuries and it is the cheapest depth cue you own. Here is why I am emphasising it: it does not require you to be good at perspective. If your vanishing points are a mess but your value depth is right, the panel still reads as deep. For a lot of you that is an important escape hatch, and it is not a compromise: professionals rely on it too.</a:t>
+              <a:t>Things further away are lighter and lower in contrast because there is air in the way. Painters have used this for centuries and it is the cheapest depth cue you own. Here is why it matters: it does not require you to be good at perspective. If your vanishing points are a mess but your value depth is right, the panel still reads as deep. For a lot of you that is an important escape hatch, and it is not a compromise: professionals rely on it too.</a:t>
             </a:r>
           </a:p>
         </p:txBody>
@@ -2052,7 +2052,7 @@
           <a:lstStyle/>
           <a:p>
             <a:r>
-              <a:t>Divide the frame into thirds horizontally and vertically and you get four intersection points. Subjects placed there tend to be more interesting than subjects dead centre. This is genuinely useful and also genuinely overrated: treat it as the answer when you do not have a better one, not as a rule you must obey. It is a floor, not a ceiling.</a:t>
+              <a:t>Divide the frame into thirds horizontally and vertically and you get four intersection points. Subjects placed there tend to be more interesting than subjects dead center. This is useful, and it's also overrated: treat it as the answer when you do not have a better one, not as a rule you must obey. It is a floor, not a ceiling.</a:t>
             </a:r>
           </a:p>
         </p:txBody>
@@ -2192,7 +2192,7 @@
           <a:lstStyle/>
           <a:p>
             <a:r>
-              <a:t>Sometimes dead centre is exactly right. Symmetry reads as formal and controlled, which is why it shows up for thrones, altars, and villains. Kubrick built a career on it. There is also a practical reason. Mad Max: Fury Road centred nearly every shot on purpose, because at that cutting speed the audience needs to find the subject instantly and the centre is where the eye already is. Worth knowing when you are boarding fast action.</a:t>
+              <a:t>Sometimes dead center is exactly right. Symmetry reads as formal and controlled, which is why it shows up for thrones, altars, and villains. Kubrick built a career on it. There is also a practical reason. Mad Max: Fury Road centered nearly every shot on purpose, because at that cutting speed the audience needs to find the subject instantly and the center is where the eye already is. Worth knowing when you are boarding fast action.</a:t>
             </a:r>
           </a:p>
         </p:txBody>
@@ -2402,7 +2402,7 @@
           <a:lstStyle/>
           <a:p>
             <a:r>
-              <a:t>Every frame needs a hierarchy: one dominant element, some sub-dominant, and the rest subordinate. This is the vocabulary I will use in critique, so learn it now. When I say a panel does not read, what I usually mean is that two things are competing to be dominant and the eye cannot choose. One dominant per frame. If two things matter equally, you probably need two shots.</a:t>
+              <a:t>Every frame needs a hierarchy: one dominant element, some sub-dominant, and the rest subordinate. This is the vocabulary critique uses, so learn it now. When a panel does not read, it usually means two things are competing to be dominant and the eye cannot choose. One dominant per frame. If two things matter equally, you probably need two shots.</a:t>
             </a:r>
           </a:p>
         </p:txBody>
@@ -2612,7 +2612,7 @@
           <a:lstStyle/>
           <a:p>
             <a:r>
-              <a:t>Framing the subject inside something else: a doorway, a window, a gap between foreground shapes. It does three things at once: it isolates the subject, it creates depth by giving you a foreground, and it can carry meaning. A character framed in a doorway is contained by it. And it is genuinely easy to draw. Two dark shapes at the edges of your panel will do it.</a:t>
+              <a:t>Framing the subject inside something else: a doorway, a window, a gap between foreground shapes. It does three things at once: it isolates the subject, it creates depth by giving you a foreground, and it can carry meaning. A character framed in a doorway is contained by it. And it is easy to draw. Two dark shapes at the edges of your panel will do it.</a:t>
             </a:r>
           </a:p>
         </p:txBody>
@@ -2892,7 +2892,7 @@
           <a:lstStyle/>
           <a:p>
             <a:r>
-              <a:t>When composition works, nobody compliments it. They just follow the story. When it fails, everyone notices, though almost nobody can say why. They say it looks off, or cheap, or confusing. That is your diagnostic. When someone tells you a shot feels wrong, translate it into: my eye went to the wrong place, or my eye did not know where to go at all. Then it is a fixable problem instead of a vague complaint.</a:t>
+              <a:t>When composition works, nobody compliments it. They just follow the story. When it fails, everyone notices, though almost nobody can say why. They say it looks off, or cheap, or confusing. That is your diagnostic. When someone tells you a shot feels wrong, translate it into: the eye went to the wrong place, or the eye did not know where to go at all. Then it is a fixable problem instead of a vague complaint.</a:t>
             </a:r>
           </a:p>
         </p:txBody>
@@ -3242,7 +3242,7 @@
           <a:lstStyle/>
           <a:p>
             <a:r>
-              <a:t>Here is the meaning that a graphic design course will never give you. In motion, rhythm is also temporal: the pattern of your cutting. Long, long, long, short. Short short short short. A held silence where the audience expects a cut. This is the musical sense of the word and it is doing the same job that beat and tempo do in music: creating expectation and then satisfying or denying it. You will feel this properly when you build your animatic. Right now, just know that when I say rhythm, I might mean either one.</a:t>
+              <a:t>Here is the meaning that a graphic design course will never give you. In motion, rhythm is also temporal: the pattern of your cutting. Long, long, long, short. Short short short short. A held silence where the audience expects a cut. This is the musical sense of the word and it is doing the same job that beat and tempo do in music: creating expectation and then satisfying or denying it. You will feel this properly when you build your animatic. Right now, just know that the word can mean either one.</a:t>
             </a:r>
           </a:p>
         </p:txBody>
@@ -3382,7 +3382,7 @@
           <a:lstStyle/>
           <a:p>
             <a:r>
-              <a:t>An animation instructor I heard years ago called this ballistics, and the word has stuck with me. Information has momentum. The audience does not reset at a cut. They carry what they just learned, and their eye is still physically pointed where the last shot left it. So the question is never just "does this frame work." It is "where is the audience arriving from, and where am I sending them next." That trajectory is the thing you are actually designing.</a:t>
+              <a:t>This term comes from an animation instructor, borrowed because it names something real. Information has momentum. The audience does not reset at a cut. They carry what they just learned, and their eye is still physically pointed where the last shot left it. So the question is never just "does this frame work." It is "where is the audience arriving from, and where am I sending them next." That trajectory is the thing you are actually designing.</a:t>
             </a:r>
           </a:p>
         </p:txBody>
@@ -4018,7 +4018,7 @@
           <a:lstStyle/>
           <a:p>
             <a:r>
-              <a:t>Before we can talk about arranging things, we need names for the things. This is deliberately basic. If you have a design background, give me ten minutes and we will be past it. If you do not, this is the vocabulary that the rest of the semester assumes you have.</a:t>
+              <a:t>Before we can talk about arranging things, we need names for the things. This is deliberately basic. If you have a design background, this section moves fast, and we will be past it in a few minutes. If you do not, this is the vocabulary that the rest of the semester assumes you have.</a:t>
             </a:r>
           </a:p>
         </p:txBody>
@@ -4088,7 +4088,7 @@
           <a:lstStyle/>
           <a:p>
             <a:r>
-              <a:t>Six elements. Line, shape, direction, size, texture, value. Notice colour is not on this list. Colour matters enormously in a finished film and it will come up in the lighting session, but the overwhelming majority of storyboards are made in greyscale, so it is not one of the tools you will use here. Of these six, one is doing more work than the other five combined.</a:t>
+              <a:t>Six elements. Line, shape, direction, size, texture, value. Notice color is not on this list. Color matters enormously in a finished film and it will come up in the lighting session, but the overwhelming majority of storyboards are made in grayscale, so it is not one of the tools you will use here. Of these six, one is doing more work than the other five combined.</a:t>
             </a:r>
           </a:p>
         </p:txBody>
@@ -4158,7 +4158,7 @@
           <a:lstStyle/>
           <a:p>
             <a:r>
-              <a:t>Value is the difference between light and dark, and it is the single most powerful compositional tool you own. Here is why it matters more to you than to a graphic designer. Your panel might be on screen for twelve frames. The eye resolves value before it resolves detail, before it resolves colour, before it can read a face. If your values are working, a very rough drawing communicates instantly. If they are not, all the rendering in the world will not save the shot. We will come back to this with a whole section.</a:t>
+              <a:t>Value is the difference between light and dark, and it is the single most powerful compositional tool you own. Here is why it matters more to you than to a graphic designer. Your panel might be on screen for twelve frames. The eye resolves value before it resolves detail, before it resolves color, before it can read a face. If your values are working, a very rough drawing communicates instantly. If they are not, all the rendering in the world will not save the shot. We will come back to this with a whole section.</a:t>
             </a:r>
           </a:p>
         </p:txBody>
@@ -18237,7 +18237,7 @@
           <a:p>
             <a:r>
               <a:rPr lang="en-US" dirty="0" b="0"/>
-              <a:t>Black, mid-grey, white</a:t>
+              <a:t>Black, mid-gray, white</a:t>
             </a:r>
           </a:p>
           <a:p>
@@ -18360,7 +18360,7 @@
           <a:p>
             <a:r>
               <a:rPr lang="en-US" dirty="0" b="0"/>
-              <a:t>This is the standard I grade against</a:t>
+              <a:t>This is the standard this course grades against</a:t>
             </a:r>
           </a:p>
         </p:txBody>
@@ -18975,7 +18975,7 @@
                 </a:solidFill>
                 <a:latin typeface="Garamond"/>
               </a:rPr>
-              <a:t>Subject on an intersection, not dead centre</a:t>
+              <a:t>Subject on an intersection, not dead center</a:t>
             </a:r>
           </a:p>
         </p:txBody>
@@ -19132,7 +19132,7 @@
           <a:p>
             <a:r>
               <a:rPr lang="en-US" sz="4400" dirty="0" b="0"/>
-              <a:t>When to Centre</a:t>
+              <a:t>When to Center</a:t>
             </a:r>
           </a:p>
         </p:txBody>
@@ -19341,7 +19341,7 @@
                 </a:solidFill>
                 <a:latin typeface="Garamond"/>
               </a:rPr>
-              <a:t>Centred: formal, controlled</a:t>
+              <a:t>Centered: formal, controlled</a:t>
             </a:r>
           </a:p>
         </p:txBody>
@@ -19512,7 +19512,7 @@
                 </a:solidFill>
                 <a:latin typeface="Garamond"/>
               </a:rPr>
-              <a:t>Off-centre: observed, natural</a:t>
+              <a:t>Off-center: observed, natural</a:t>
             </a:r>
           </a:p>
         </p:txBody>
@@ -22071,7 +22071,7 @@
           <a:p>
             <a:r>
               <a:rPr lang="en-US" dirty="0" b="0"/>
-              <a:t>You are composing for a brain that is trying to organise</a:t>
+              <a:t>You are composing for a brain that is trying to organize</a:t>
             </a:r>
           </a:p>
         </p:txBody>
@@ -22170,7 +22170,7 @@
           <a:p>
             <a:r>
               <a:rPr lang="en-US" dirty="0" b="0"/>
-              <a:t>"It looks weird" usually means "I looked at the wrong thing"</a:t>
+              <a:t>"It looks weird" usually means "the eye went to the wrong place"</a:t>
             </a:r>
           </a:p>
         </p:txBody>

--- a/Storyboarding/NewLectures/05_Composition_REVISED.pptx
+++ b/Storyboarding/NewLectures/05_Composition_REVISED.pptx
@@ -5,61 +5,61 @@
     <p:sldMasterId id="2147483660" r:id="rId1"/>
   </p:sldMasterIdLst>
   <p:notesMasterIdLst>
-    <p:notesMasterId r:id="rId42"/>
+    <p:notesMasterId r:id="rId54"/>
   </p:notesMasterIdLst>
   <p:sldIdLst>
     <p:sldId id="256" r:id="rId2"/>
-    <p:sldId id="308" r:id="rId58"/>
-    <p:sldId id="309" r:id="rId59"/>
-    <p:sldId id="310" r:id="rId60"/>
-    <p:sldId id="311" r:id="rId61"/>
-    <p:sldId id="312" r:id="rId62"/>
-    <p:sldId id="313" r:id="rId63"/>
-    <p:sldId id="314" r:id="rId64"/>
-    <p:sldId id="315" r:id="rId65"/>
-    <p:sldId id="316" r:id="rId66"/>
-    <p:sldId id="317" r:id="rId67"/>
-    <p:sldId id="318" r:id="rId68"/>
-    <p:sldId id="319" r:id="rId69"/>
-    <p:sldId id="320" r:id="rId70"/>
-    <p:sldId id="321" r:id="rId71"/>
-    <p:sldId id="322" r:id="rId72"/>
-    <p:sldId id="323" r:id="rId73"/>
-    <p:sldId id="324" r:id="rId74"/>
-    <p:sldId id="325" r:id="rId75"/>
-    <p:sldId id="326" r:id="rId76"/>
-    <p:sldId id="327" r:id="rId77"/>
-    <p:sldId id="328" r:id="rId78"/>
-    <p:sldId id="329" r:id="rId79"/>
-    <p:sldId id="330" r:id="rId80"/>
-    <p:sldId id="331" r:id="rId81"/>
-    <p:sldId id="332" r:id="rId82"/>
-    <p:sldId id="333" r:id="rId83"/>
-    <p:sldId id="334" r:id="rId84"/>
-    <p:sldId id="335" r:id="rId85"/>
-    <p:sldId id="336" r:id="rId86"/>
-    <p:sldId id="337" r:id="rId87"/>
-    <p:sldId id="338" r:id="rId88"/>
-    <p:sldId id="339" r:id="rId89"/>
-    <p:sldId id="340" r:id="rId90"/>
-    <p:sldId id="341" r:id="rId91"/>
-    <p:sldId id="342" r:id="rId92"/>
-    <p:sldId id="343" r:id="rId93"/>
-    <p:sldId id="344" r:id="rId94"/>
-    <p:sldId id="345" r:id="rId95"/>
-    <p:sldId id="346" r:id="rId96"/>
-    <p:sldId id="347" r:id="rId97"/>
-    <p:sldId id="348" r:id="rId98"/>
-    <p:sldId id="349" r:id="rId99"/>
-    <p:sldId id="350" r:id="rId100"/>
-    <p:sldId id="351" r:id="rId101"/>
-    <p:sldId id="352" r:id="rId102"/>
-    <p:sldId id="353" r:id="rId103"/>
-    <p:sldId id="354" r:id="rId104"/>
-    <p:sldId id="355" r:id="rId105"/>
-    <p:sldId id="356" r:id="rId106"/>
-    <p:sldId id="357" r:id="rId107"/>
-    <p:sldId id="358" r:id="rId108"/>
+    <p:sldId id="308" r:id="rId3"/>
+    <p:sldId id="309" r:id="rId4"/>
+    <p:sldId id="310" r:id="rId5"/>
+    <p:sldId id="311" r:id="rId6"/>
+    <p:sldId id="312" r:id="rId7"/>
+    <p:sldId id="313" r:id="rId8"/>
+    <p:sldId id="314" r:id="rId9"/>
+    <p:sldId id="315" r:id="rId10"/>
+    <p:sldId id="316" r:id="rId11"/>
+    <p:sldId id="317" r:id="rId12"/>
+    <p:sldId id="318" r:id="rId13"/>
+    <p:sldId id="319" r:id="rId14"/>
+    <p:sldId id="320" r:id="rId15"/>
+    <p:sldId id="321" r:id="rId16"/>
+    <p:sldId id="322" r:id="rId17"/>
+    <p:sldId id="323" r:id="rId18"/>
+    <p:sldId id="324" r:id="rId19"/>
+    <p:sldId id="325" r:id="rId20"/>
+    <p:sldId id="326" r:id="rId21"/>
+    <p:sldId id="327" r:id="rId22"/>
+    <p:sldId id="328" r:id="rId23"/>
+    <p:sldId id="329" r:id="rId24"/>
+    <p:sldId id="330" r:id="rId25"/>
+    <p:sldId id="331" r:id="rId26"/>
+    <p:sldId id="332" r:id="rId27"/>
+    <p:sldId id="333" r:id="rId28"/>
+    <p:sldId id="334" r:id="rId29"/>
+    <p:sldId id="335" r:id="rId30"/>
+    <p:sldId id="336" r:id="rId31"/>
+    <p:sldId id="337" r:id="rId32"/>
+    <p:sldId id="338" r:id="rId33"/>
+    <p:sldId id="339" r:id="rId34"/>
+    <p:sldId id="340" r:id="rId35"/>
+    <p:sldId id="341" r:id="rId36"/>
+    <p:sldId id="342" r:id="rId37"/>
+    <p:sldId id="343" r:id="rId38"/>
+    <p:sldId id="344" r:id="rId39"/>
+    <p:sldId id="345" r:id="rId40"/>
+    <p:sldId id="346" r:id="rId41"/>
+    <p:sldId id="347" r:id="rId42"/>
+    <p:sldId id="348" r:id="rId43"/>
+    <p:sldId id="349" r:id="rId44"/>
+    <p:sldId id="350" r:id="rId45"/>
+    <p:sldId id="351" r:id="rId46"/>
+    <p:sldId id="352" r:id="rId47"/>
+    <p:sldId id="353" r:id="rId48"/>
+    <p:sldId id="354" r:id="rId49"/>
+    <p:sldId id="355" r:id="rId50"/>
+    <p:sldId id="356" r:id="rId51"/>
+    <p:sldId id="357" r:id="rId52"/>
+    <p:sldId id="358" r:id="rId53"/>
   </p:sldIdLst>
   <p:sldSz cx="12192000" cy="6858000"/>
   <p:notesSz cx="6858000" cy="9144000"/>
@@ -248,7 +248,7 @@
           <a:p>
             <a:fld id="{29EE8B73-20FE-4169-9595-E55E7D4C6C8A}" type="datetimeFigureOut">
               <a:rPr lang="en-US" smtClean="0"/>
-              <a:t>11/5/2018</a:t>
+              <a:t>8/23/2026</a:t>
             </a:fld>
             <a:endParaRPr lang="en-US"/>
           </a:p>
@@ -602,7 +602,7 @@
 </file>
 
 <file path=ppt/notesSlides/notesSlide10.xml><?xml version="1.0" encoding="utf-8"?>
-<p:notes xmlns:a="http://schemas.openxmlformats.org/drawingml/2006/main" xmlns:p="http://schemas.openxmlformats.org/presentationml/2006/main" xmlns:r="http://schemas.openxmlformats.org/officeDocument/2006/relationships">
+<p:notes xmlns:a="http://schemas.openxmlformats.org/drawingml/2006/main" xmlns:r="http://schemas.openxmlformats.org/officeDocument/2006/relationships" xmlns:p="http://schemas.openxmlformats.org/presentationml/2006/main">
   <p:cSld>
     <p:spTree>
       <p:nvGrpSpPr>
@@ -622,7 +622,7 @@
         <p:nvSpPr>
           <p:cNvPr id="2" name="Slide Image Placeholder 1"/>
           <p:cNvSpPr>
-            <a:spLocks noGrp="1"/>
+            <a:spLocks noGrp="1" noRot="1" noChangeAspect="1"/>
           </p:cNvSpPr>
           <p:nvPr>
             <p:ph type="sldImg" idx="2"/>
@@ -637,7 +637,7 @@
             <a:spLocks noGrp="1"/>
           </p:cNvSpPr>
           <p:nvPr>
-            <p:ph type="body" idx="3" sz="quarter"/>
+            <p:ph type="body" sz="quarter" idx="3"/>
           </p:nvPr>
         </p:nvSpPr>
         <p:spPr/>
@@ -658,7 +658,7 @@
             <a:spLocks noGrp="1"/>
           </p:cNvSpPr>
           <p:nvPr>
-            <p:ph type="sldNum" idx="5" sz="quarter"/>
+            <p:ph type="sldNum" sz="quarter" idx="5"/>
           </p:nvPr>
         </p:nvSpPr>
         <p:spPr/>
@@ -672,7 +672,7 @@
 </file>
 
 <file path=ppt/notesSlides/notesSlide11.xml><?xml version="1.0" encoding="utf-8"?>
-<p:notes xmlns:a="http://schemas.openxmlformats.org/drawingml/2006/main" xmlns:p="http://schemas.openxmlformats.org/presentationml/2006/main" xmlns:r="http://schemas.openxmlformats.org/officeDocument/2006/relationships">
+<p:notes xmlns:a="http://schemas.openxmlformats.org/drawingml/2006/main" xmlns:r="http://schemas.openxmlformats.org/officeDocument/2006/relationships" xmlns:p="http://schemas.openxmlformats.org/presentationml/2006/main">
   <p:cSld>
     <p:spTree>
       <p:nvGrpSpPr>
@@ -692,7 +692,7 @@
         <p:nvSpPr>
           <p:cNvPr id="2" name="Slide Image Placeholder 1"/>
           <p:cNvSpPr>
-            <a:spLocks noGrp="1"/>
+            <a:spLocks noGrp="1" noRot="1" noChangeAspect="1"/>
           </p:cNvSpPr>
           <p:nvPr>
             <p:ph type="sldImg" idx="2"/>
@@ -707,7 +707,7 @@
             <a:spLocks noGrp="1"/>
           </p:cNvSpPr>
           <p:nvPr>
-            <p:ph type="body" idx="3" sz="quarter"/>
+            <p:ph type="body" sz="quarter" idx="3"/>
           </p:nvPr>
         </p:nvSpPr>
         <p:spPr/>
@@ -728,7 +728,7 @@
             <a:spLocks noGrp="1"/>
           </p:cNvSpPr>
           <p:nvPr>
-            <p:ph type="sldNum" idx="5" sz="quarter"/>
+            <p:ph type="sldNum" sz="quarter" idx="5"/>
           </p:nvPr>
         </p:nvSpPr>
         <p:spPr/>
@@ -742,7 +742,7 @@
 </file>
 
 <file path=ppt/notesSlides/notesSlide12.xml><?xml version="1.0" encoding="utf-8"?>
-<p:notes xmlns:a="http://schemas.openxmlformats.org/drawingml/2006/main" xmlns:p="http://schemas.openxmlformats.org/presentationml/2006/main" xmlns:r="http://schemas.openxmlformats.org/officeDocument/2006/relationships">
+<p:notes xmlns:a="http://schemas.openxmlformats.org/drawingml/2006/main" xmlns:r="http://schemas.openxmlformats.org/officeDocument/2006/relationships" xmlns:p="http://schemas.openxmlformats.org/presentationml/2006/main">
   <p:cSld>
     <p:spTree>
       <p:nvGrpSpPr>
@@ -762,7 +762,7 @@
         <p:nvSpPr>
           <p:cNvPr id="2" name="Slide Image Placeholder 1"/>
           <p:cNvSpPr>
-            <a:spLocks noGrp="1"/>
+            <a:spLocks noGrp="1" noRot="1" noChangeAspect="1"/>
           </p:cNvSpPr>
           <p:nvPr>
             <p:ph type="sldImg" idx="2"/>
@@ -777,7 +777,7 @@
             <a:spLocks noGrp="1"/>
           </p:cNvSpPr>
           <p:nvPr>
-            <p:ph type="body" idx="3" sz="quarter"/>
+            <p:ph type="body" sz="quarter" idx="3"/>
           </p:nvPr>
         </p:nvSpPr>
         <p:spPr/>
@@ -798,7 +798,7 @@
             <a:spLocks noGrp="1"/>
           </p:cNvSpPr>
           <p:nvPr>
-            <p:ph type="sldNum" idx="5" sz="quarter"/>
+            <p:ph type="sldNum" sz="quarter" idx="5"/>
           </p:nvPr>
         </p:nvSpPr>
         <p:spPr/>
@@ -812,7 +812,7 @@
 </file>
 
 <file path=ppt/notesSlides/notesSlide13.xml><?xml version="1.0" encoding="utf-8"?>
-<p:notes xmlns:a="http://schemas.openxmlformats.org/drawingml/2006/main" xmlns:p="http://schemas.openxmlformats.org/presentationml/2006/main" xmlns:r="http://schemas.openxmlformats.org/officeDocument/2006/relationships">
+<p:notes xmlns:a="http://schemas.openxmlformats.org/drawingml/2006/main" xmlns:r="http://schemas.openxmlformats.org/officeDocument/2006/relationships" xmlns:p="http://schemas.openxmlformats.org/presentationml/2006/main">
   <p:cSld>
     <p:spTree>
       <p:nvGrpSpPr>
@@ -832,7 +832,7 @@
         <p:nvSpPr>
           <p:cNvPr id="2" name="Slide Image Placeholder 1"/>
           <p:cNvSpPr>
-            <a:spLocks noGrp="1"/>
+            <a:spLocks noGrp="1" noRot="1" noChangeAspect="1"/>
           </p:cNvSpPr>
           <p:nvPr>
             <p:ph type="sldImg" idx="2"/>
@@ -847,7 +847,7 @@
             <a:spLocks noGrp="1"/>
           </p:cNvSpPr>
           <p:nvPr>
-            <p:ph type="body" idx="3" sz="quarter"/>
+            <p:ph type="body" sz="quarter" idx="3"/>
           </p:nvPr>
         </p:nvSpPr>
         <p:spPr/>
@@ -868,7 +868,7 @@
             <a:spLocks noGrp="1"/>
           </p:cNvSpPr>
           <p:nvPr>
-            <p:ph type="sldNum" idx="5" sz="quarter"/>
+            <p:ph type="sldNum" sz="quarter" idx="5"/>
           </p:nvPr>
         </p:nvSpPr>
         <p:spPr/>
@@ -882,7 +882,7 @@
 </file>
 
 <file path=ppt/notesSlides/notesSlide14.xml><?xml version="1.0" encoding="utf-8"?>
-<p:notes xmlns:a="http://schemas.openxmlformats.org/drawingml/2006/main" xmlns:p="http://schemas.openxmlformats.org/presentationml/2006/main" xmlns:r="http://schemas.openxmlformats.org/officeDocument/2006/relationships">
+<p:notes xmlns:a="http://schemas.openxmlformats.org/drawingml/2006/main" xmlns:r="http://schemas.openxmlformats.org/officeDocument/2006/relationships" xmlns:p="http://schemas.openxmlformats.org/presentationml/2006/main">
   <p:cSld>
     <p:spTree>
       <p:nvGrpSpPr>
@@ -902,7 +902,7 @@
         <p:nvSpPr>
           <p:cNvPr id="2" name="Slide Image Placeholder 1"/>
           <p:cNvSpPr>
-            <a:spLocks noGrp="1"/>
+            <a:spLocks noGrp="1" noRot="1" noChangeAspect="1"/>
           </p:cNvSpPr>
           <p:nvPr>
             <p:ph type="sldImg" idx="2"/>
@@ -917,7 +917,7 @@
             <a:spLocks noGrp="1"/>
           </p:cNvSpPr>
           <p:nvPr>
-            <p:ph type="body" idx="3" sz="quarter"/>
+            <p:ph type="body" sz="quarter" idx="3"/>
           </p:nvPr>
         </p:nvSpPr>
         <p:spPr/>
@@ -938,7 +938,7 @@
             <a:spLocks noGrp="1"/>
           </p:cNvSpPr>
           <p:nvPr>
-            <p:ph type="sldNum" idx="5" sz="quarter"/>
+            <p:ph type="sldNum" sz="quarter" idx="5"/>
           </p:nvPr>
         </p:nvSpPr>
         <p:spPr/>
@@ -952,7 +952,7 @@
 </file>
 
 <file path=ppt/notesSlides/notesSlide15.xml><?xml version="1.0" encoding="utf-8"?>
-<p:notes xmlns:a="http://schemas.openxmlformats.org/drawingml/2006/main" xmlns:p="http://schemas.openxmlformats.org/presentationml/2006/main" xmlns:r="http://schemas.openxmlformats.org/officeDocument/2006/relationships">
+<p:notes xmlns:a="http://schemas.openxmlformats.org/drawingml/2006/main" xmlns:r="http://schemas.openxmlformats.org/officeDocument/2006/relationships" xmlns:p="http://schemas.openxmlformats.org/presentationml/2006/main">
   <p:cSld>
     <p:spTree>
       <p:nvGrpSpPr>
@@ -972,7 +972,7 @@
         <p:nvSpPr>
           <p:cNvPr id="2" name="Slide Image Placeholder 1"/>
           <p:cNvSpPr>
-            <a:spLocks noGrp="1"/>
+            <a:spLocks noGrp="1" noRot="1" noChangeAspect="1"/>
           </p:cNvSpPr>
           <p:nvPr>
             <p:ph type="sldImg" idx="2"/>
@@ -987,7 +987,7 @@
             <a:spLocks noGrp="1"/>
           </p:cNvSpPr>
           <p:nvPr>
-            <p:ph type="body" idx="3" sz="quarter"/>
+            <p:ph type="body" sz="quarter" idx="3"/>
           </p:nvPr>
         </p:nvSpPr>
         <p:spPr/>
@@ -1008,7 +1008,7 @@
             <a:spLocks noGrp="1"/>
           </p:cNvSpPr>
           <p:nvPr>
-            <p:ph type="sldNum" idx="5" sz="quarter"/>
+            <p:ph type="sldNum" sz="quarter" idx="5"/>
           </p:nvPr>
         </p:nvSpPr>
         <p:spPr/>
@@ -1022,7 +1022,7 @@
 </file>
 
 <file path=ppt/notesSlides/notesSlide16.xml><?xml version="1.0" encoding="utf-8"?>
-<p:notes xmlns:a="http://schemas.openxmlformats.org/drawingml/2006/main" xmlns:p="http://schemas.openxmlformats.org/presentationml/2006/main" xmlns:r="http://schemas.openxmlformats.org/officeDocument/2006/relationships">
+<p:notes xmlns:a="http://schemas.openxmlformats.org/drawingml/2006/main" xmlns:r="http://schemas.openxmlformats.org/officeDocument/2006/relationships" xmlns:p="http://schemas.openxmlformats.org/presentationml/2006/main">
   <p:cSld>
     <p:spTree>
       <p:nvGrpSpPr>
@@ -1042,7 +1042,7 @@
         <p:nvSpPr>
           <p:cNvPr id="2" name="Slide Image Placeholder 1"/>
           <p:cNvSpPr>
-            <a:spLocks noGrp="1"/>
+            <a:spLocks noGrp="1" noRot="1" noChangeAspect="1"/>
           </p:cNvSpPr>
           <p:nvPr>
             <p:ph type="sldImg" idx="2"/>
@@ -1057,7 +1057,7 @@
             <a:spLocks noGrp="1"/>
           </p:cNvSpPr>
           <p:nvPr>
-            <p:ph type="body" idx="3" sz="quarter"/>
+            <p:ph type="body" sz="quarter" idx="3"/>
           </p:nvPr>
         </p:nvSpPr>
         <p:spPr/>
@@ -1078,7 +1078,7 @@
             <a:spLocks noGrp="1"/>
           </p:cNvSpPr>
           <p:nvPr>
-            <p:ph type="sldNum" idx="5" sz="quarter"/>
+            <p:ph type="sldNum" sz="quarter" idx="5"/>
           </p:nvPr>
         </p:nvSpPr>
         <p:spPr/>
@@ -1092,7 +1092,7 @@
 </file>
 
 <file path=ppt/notesSlides/notesSlide17.xml><?xml version="1.0" encoding="utf-8"?>
-<p:notes xmlns:a="http://schemas.openxmlformats.org/drawingml/2006/main" xmlns:p="http://schemas.openxmlformats.org/presentationml/2006/main" xmlns:r="http://schemas.openxmlformats.org/officeDocument/2006/relationships">
+<p:notes xmlns:a="http://schemas.openxmlformats.org/drawingml/2006/main" xmlns:r="http://schemas.openxmlformats.org/officeDocument/2006/relationships" xmlns:p="http://schemas.openxmlformats.org/presentationml/2006/main">
   <p:cSld>
     <p:spTree>
       <p:nvGrpSpPr>
@@ -1112,7 +1112,7 @@
         <p:nvSpPr>
           <p:cNvPr id="2" name="Slide Image Placeholder 1"/>
           <p:cNvSpPr>
-            <a:spLocks noGrp="1"/>
+            <a:spLocks noGrp="1" noRot="1" noChangeAspect="1"/>
           </p:cNvSpPr>
           <p:nvPr>
             <p:ph type="sldImg" idx="2"/>
@@ -1127,7 +1127,7 @@
             <a:spLocks noGrp="1"/>
           </p:cNvSpPr>
           <p:nvPr>
-            <p:ph type="body" idx="3" sz="quarter"/>
+            <p:ph type="body" sz="quarter" idx="3"/>
           </p:nvPr>
         </p:nvSpPr>
         <p:spPr/>
@@ -1148,7 +1148,7 @@
             <a:spLocks noGrp="1"/>
           </p:cNvSpPr>
           <p:nvPr>
-            <p:ph type="sldNum" idx="5" sz="quarter"/>
+            <p:ph type="sldNum" sz="quarter" idx="5"/>
           </p:nvPr>
         </p:nvSpPr>
         <p:spPr/>
@@ -1162,7 +1162,7 @@
 </file>
 
 <file path=ppt/notesSlides/notesSlide18.xml><?xml version="1.0" encoding="utf-8"?>
-<p:notes xmlns:a="http://schemas.openxmlformats.org/drawingml/2006/main" xmlns:p="http://schemas.openxmlformats.org/presentationml/2006/main" xmlns:r="http://schemas.openxmlformats.org/officeDocument/2006/relationships">
+<p:notes xmlns:a="http://schemas.openxmlformats.org/drawingml/2006/main" xmlns:r="http://schemas.openxmlformats.org/officeDocument/2006/relationships" xmlns:p="http://schemas.openxmlformats.org/presentationml/2006/main">
   <p:cSld>
     <p:spTree>
       <p:nvGrpSpPr>
@@ -1182,7 +1182,7 @@
         <p:nvSpPr>
           <p:cNvPr id="2" name="Slide Image Placeholder 1"/>
           <p:cNvSpPr>
-            <a:spLocks noGrp="1"/>
+            <a:spLocks noGrp="1" noRot="1" noChangeAspect="1"/>
           </p:cNvSpPr>
           <p:nvPr>
             <p:ph type="sldImg" idx="2"/>
@@ -1197,7 +1197,7 @@
             <a:spLocks noGrp="1"/>
           </p:cNvSpPr>
           <p:nvPr>
-            <p:ph type="body" idx="3" sz="quarter"/>
+            <p:ph type="body" sz="quarter" idx="3"/>
           </p:nvPr>
         </p:nvSpPr>
         <p:spPr/>
@@ -1218,7 +1218,7 @@
             <a:spLocks noGrp="1"/>
           </p:cNvSpPr>
           <p:nvPr>
-            <p:ph type="sldNum" idx="5" sz="quarter"/>
+            <p:ph type="sldNum" sz="quarter" idx="5"/>
           </p:nvPr>
         </p:nvSpPr>
         <p:spPr/>
@@ -1232,7 +1232,7 @@
 </file>
 
 <file path=ppt/notesSlides/notesSlide19.xml><?xml version="1.0" encoding="utf-8"?>
-<p:notes xmlns:a="http://schemas.openxmlformats.org/drawingml/2006/main" xmlns:p="http://schemas.openxmlformats.org/presentationml/2006/main" xmlns:r="http://schemas.openxmlformats.org/officeDocument/2006/relationships">
+<p:notes xmlns:a="http://schemas.openxmlformats.org/drawingml/2006/main" xmlns:r="http://schemas.openxmlformats.org/officeDocument/2006/relationships" xmlns:p="http://schemas.openxmlformats.org/presentationml/2006/main">
   <p:cSld>
     <p:spTree>
       <p:nvGrpSpPr>
@@ -1252,7 +1252,7 @@
         <p:nvSpPr>
           <p:cNvPr id="2" name="Slide Image Placeholder 1"/>
           <p:cNvSpPr>
-            <a:spLocks noGrp="1"/>
+            <a:spLocks noGrp="1" noRot="1" noChangeAspect="1"/>
           </p:cNvSpPr>
           <p:nvPr>
             <p:ph type="sldImg" idx="2"/>
@@ -1267,7 +1267,7 @@
             <a:spLocks noGrp="1"/>
           </p:cNvSpPr>
           <p:nvPr>
-            <p:ph type="body" idx="3" sz="quarter"/>
+            <p:ph type="body" sz="quarter" idx="3"/>
           </p:nvPr>
         </p:nvSpPr>
         <p:spPr/>
@@ -1288,7 +1288,7 @@
             <a:spLocks noGrp="1"/>
           </p:cNvSpPr>
           <p:nvPr>
-            <p:ph type="sldNum" idx="5" sz="quarter"/>
+            <p:ph type="sldNum" sz="quarter" idx="5"/>
           </p:nvPr>
         </p:nvSpPr>
         <p:spPr/>
@@ -1302,7 +1302,7 @@
 </file>
 
 <file path=ppt/notesSlides/notesSlide2.xml><?xml version="1.0" encoding="utf-8"?>
-<p:notes xmlns:a="http://schemas.openxmlformats.org/drawingml/2006/main" xmlns:p="http://schemas.openxmlformats.org/presentationml/2006/main" xmlns:r="http://schemas.openxmlformats.org/officeDocument/2006/relationships">
+<p:notes xmlns:a="http://schemas.openxmlformats.org/drawingml/2006/main" xmlns:r="http://schemas.openxmlformats.org/officeDocument/2006/relationships" xmlns:p="http://schemas.openxmlformats.org/presentationml/2006/main">
   <p:cSld>
     <p:spTree>
       <p:nvGrpSpPr>
@@ -1322,7 +1322,7 @@
         <p:nvSpPr>
           <p:cNvPr id="2" name="Slide Image Placeholder 1"/>
           <p:cNvSpPr>
-            <a:spLocks noGrp="1"/>
+            <a:spLocks noGrp="1" noRot="1" noChangeAspect="1"/>
           </p:cNvSpPr>
           <p:nvPr>
             <p:ph type="sldImg" idx="2"/>
@@ -1337,7 +1337,7 @@
             <a:spLocks noGrp="1"/>
           </p:cNvSpPr>
           <p:nvPr>
-            <p:ph type="body" idx="3" sz="quarter"/>
+            <p:ph type="body" sz="quarter" idx="3"/>
           </p:nvPr>
         </p:nvSpPr>
         <p:spPr/>
@@ -1349,7 +1349,9 @@
               <a:t>[ADD IMAGE: the still from Pixar's Presto: the magician pulling the rabbit from the hat.]</a:t>
             </a:r>
           </a:p>
-          <a:p/>
+          <a:p>
+            <a:endParaRPr/>
+          </a:p>
           <a:p>
             <a:r>
               <a:t>This is exactly what you are doing. When an audience watches a sequence you have boarded, they are not supposed to be thinking about the frame, the cut, or the staging. They are supposed to be inside the story. A magician does not succeed by moving faster than your eye. They succeed by making sure your eye is somewhere else at the important moment. You have exactly the same job and exactly the same tools.</a:t>
@@ -1364,7 +1366,7 @@
             <a:spLocks noGrp="1"/>
           </p:cNvSpPr>
           <p:nvPr>
-            <p:ph type="sldNum" idx="5" sz="quarter"/>
+            <p:ph type="sldNum" sz="quarter" idx="5"/>
           </p:nvPr>
         </p:nvSpPr>
         <p:spPr/>
@@ -1378,7 +1380,7 @@
 </file>
 
 <file path=ppt/notesSlides/notesSlide20.xml><?xml version="1.0" encoding="utf-8"?>
-<p:notes xmlns:a="http://schemas.openxmlformats.org/drawingml/2006/main" xmlns:p="http://schemas.openxmlformats.org/presentationml/2006/main" xmlns:r="http://schemas.openxmlformats.org/officeDocument/2006/relationships">
+<p:notes xmlns:a="http://schemas.openxmlformats.org/drawingml/2006/main" xmlns:r="http://schemas.openxmlformats.org/officeDocument/2006/relationships" xmlns:p="http://schemas.openxmlformats.org/presentationml/2006/main">
   <p:cSld>
     <p:spTree>
       <p:nvGrpSpPr>
@@ -1398,7 +1400,7 @@
         <p:nvSpPr>
           <p:cNvPr id="2" name="Slide Image Placeholder 1"/>
           <p:cNvSpPr>
-            <a:spLocks noGrp="1"/>
+            <a:spLocks noGrp="1" noRot="1" noChangeAspect="1"/>
           </p:cNvSpPr>
           <p:nvPr>
             <p:ph type="sldImg" idx="2"/>
@@ -1413,7 +1415,7 @@
             <a:spLocks noGrp="1"/>
           </p:cNvSpPr>
           <p:nvPr>
-            <p:ph type="body" idx="3" sz="quarter"/>
+            <p:ph type="body" sz="quarter" idx="3"/>
           </p:nvPr>
         </p:nvSpPr>
         <p:spPr/>
@@ -1434,7 +1436,7 @@
             <a:spLocks noGrp="1"/>
           </p:cNvSpPr>
           <p:nvPr>
-            <p:ph type="sldNum" idx="5" sz="quarter"/>
+            <p:ph type="sldNum" sz="quarter" idx="5"/>
           </p:nvPr>
         </p:nvSpPr>
         <p:spPr/>
@@ -1448,7 +1450,7 @@
 </file>
 
 <file path=ppt/notesSlides/notesSlide21.xml><?xml version="1.0" encoding="utf-8"?>
-<p:notes xmlns:a="http://schemas.openxmlformats.org/drawingml/2006/main" xmlns:p="http://schemas.openxmlformats.org/presentationml/2006/main" xmlns:r="http://schemas.openxmlformats.org/officeDocument/2006/relationships">
+<p:notes xmlns:a="http://schemas.openxmlformats.org/drawingml/2006/main" xmlns:r="http://schemas.openxmlformats.org/officeDocument/2006/relationships" xmlns:p="http://schemas.openxmlformats.org/presentationml/2006/main">
   <p:cSld>
     <p:spTree>
       <p:nvGrpSpPr>
@@ -1468,7 +1470,7 @@
         <p:nvSpPr>
           <p:cNvPr id="2" name="Slide Image Placeholder 1"/>
           <p:cNvSpPr>
-            <a:spLocks noGrp="1"/>
+            <a:spLocks noGrp="1" noRot="1" noChangeAspect="1"/>
           </p:cNvSpPr>
           <p:nvPr>
             <p:ph type="sldImg" idx="2"/>
@@ -1483,7 +1485,7 @@
             <a:spLocks noGrp="1"/>
           </p:cNvSpPr>
           <p:nvPr>
-            <p:ph type="body" idx="3" sz="quarter"/>
+            <p:ph type="body" sz="quarter" idx="3"/>
           </p:nvPr>
         </p:nvSpPr>
         <p:spPr/>
@@ -1504,7 +1506,7 @@
             <a:spLocks noGrp="1"/>
           </p:cNvSpPr>
           <p:nvPr>
-            <p:ph type="sldNum" idx="5" sz="quarter"/>
+            <p:ph type="sldNum" sz="quarter" idx="5"/>
           </p:nvPr>
         </p:nvSpPr>
         <p:spPr/>
@@ -1518,7 +1520,7 @@
 </file>
 
 <file path=ppt/notesSlides/notesSlide22.xml><?xml version="1.0" encoding="utf-8"?>
-<p:notes xmlns:a="http://schemas.openxmlformats.org/drawingml/2006/main" xmlns:p="http://schemas.openxmlformats.org/presentationml/2006/main" xmlns:r="http://schemas.openxmlformats.org/officeDocument/2006/relationships">
+<p:notes xmlns:a="http://schemas.openxmlformats.org/drawingml/2006/main" xmlns:r="http://schemas.openxmlformats.org/officeDocument/2006/relationships" xmlns:p="http://schemas.openxmlformats.org/presentationml/2006/main">
   <p:cSld>
     <p:spTree>
       <p:nvGrpSpPr>
@@ -1538,7 +1540,7 @@
         <p:nvSpPr>
           <p:cNvPr id="2" name="Slide Image Placeholder 1"/>
           <p:cNvSpPr>
-            <a:spLocks noGrp="1"/>
+            <a:spLocks noGrp="1" noRot="1" noChangeAspect="1"/>
           </p:cNvSpPr>
           <p:nvPr>
             <p:ph type="sldImg" idx="2"/>
@@ -1553,7 +1555,7 @@
             <a:spLocks noGrp="1"/>
           </p:cNvSpPr>
           <p:nvPr>
-            <p:ph type="body" idx="3" sz="quarter"/>
+            <p:ph type="body" sz="quarter" idx="3"/>
           </p:nvPr>
         </p:nvSpPr>
         <p:spPr/>
@@ -1574,7 +1576,7 @@
             <a:spLocks noGrp="1"/>
           </p:cNvSpPr>
           <p:nvPr>
-            <p:ph type="sldNum" idx="5" sz="quarter"/>
+            <p:ph type="sldNum" sz="quarter" idx="5"/>
           </p:nvPr>
         </p:nvSpPr>
         <p:spPr/>
@@ -1588,7 +1590,7 @@
 </file>
 
 <file path=ppt/notesSlides/notesSlide23.xml><?xml version="1.0" encoding="utf-8"?>
-<p:notes xmlns:a="http://schemas.openxmlformats.org/drawingml/2006/main" xmlns:p="http://schemas.openxmlformats.org/presentationml/2006/main" xmlns:r="http://schemas.openxmlformats.org/officeDocument/2006/relationships">
+<p:notes xmlns:a="http://schemas.openxmlformats.org/drawingml/2006/main" xmlns:r="http://schemas.openxmlformats.org/officeDocument/2006/relationships" xmlns:p="http://schemas.openxmlformats.org/presentationml/2006/main">
   <p:cSld>
     <p:spTree>
       <p:nvGrpSpPr>
@@ -1608,7 +1610,7 @@
         <p:nvSpPr>
           <p:cNvPr id="2" name="Slide Image Placeholder 1"/>
           <p:cNvSpPr>
-            <a:spLocks noGrp="1"/>
+            <a:spLocks noGrp="1" noRot="1" noChangeAspect="1"/>
           </p:cNvSpPr>
           <p:nvPr>
             <p:ph type="sldImg" idx="2"/>
@@ -1623,7 +1625,7 @@
             <a:spLocks noGrp="1"/>
           </p:cNvSpPr>
           <p:nvPr>
-            <p:ph type="body" idx="3" sz="quarter"/>
+            <p:ph type="body" sz="quarter" idx="3"/>
           </p:nvPr>
         </p:nvSpPr>
         <p:spPr/>
@@ -1644,7 +1646,7 @@
             <a:spLocks noGrp="1"/>
           </p:cNvSpPr>
           <p:nvPr>
-            <p:ph type="sldNum" idx="5" sz="quarter"/>
+            <p:ph type="sldNum" sz="quarter" idx="5"/>
           </p:nvPr>
         </p:nvSpPr>
         <p:spPr/>
@@ -1658,7 +1660,7 @@
 </file>
 
 <file path=ppt/notesSlides/notesSlide24.xml><?xml version="1.0" encoding="utf-8"?>
-<p:notes xmlns:a="http://schemas.openxmlformats.org/drawingml/2006/main" xmlns:p="http://schemas.openxmlformats.org/presentationml/2006/main" xmlns:r="http://schemas.openxmlformats.org/officeDocument/2006/relationships">
+<p:notes xmlns:a="http://schemas.openxmlformats.org/drawingml/2006/main" xmlns:r="http://schemas.openxmlformats.org/officeDocument/2006/relationships" xmlns:p="http://schemas.openxmlformats.org/presentationml/2006/main">
   <p:cSld>
     <p:spTree>
       <p:nvGrpSpPr>
@@ -1678,7 +1680,7 @@
         <p:nvSpPr>
           <p:cNvPr id="2" name="Slide Image Placeholder 1"/>
           <p:cNvSpPr>
-            <a:spLocks noGrp="1"/>
+            <a:spLocks noGrp="1" noRot="1" noChangeAspect="1"/>
           </p:cNvSpPr>
           <p:nvPr>
             <p:ph type="sldImg" idx="2"/>
@@ -1693,7 +1695,7 @@
             <a:spLocks noGrp="1"/>
           </p:cNvSpPr>
           <p:nvPr>
-            <p:ph type="body" idx="3" sz="quarter"/>
+            <p:ph type="body" sz="quarter" idx="3"/>
           </p:nvPr>
         </p:nvSpPr>
         <p:spPr/>
@@ -1714,7 +1716,7 @@
             <a:spLocks noGrp="1"/>
           </p:cNvSpPr>
           <p:nvPr>
-            <p:ph type="sldNum" idx="5" sz="quarter"/>
+            <p:ph type="sldNum" sz="quarter" idx="5"/>
           </p:nvPr>
         </p:nvSpPr>
         <p:spPr/>
@@ -1728,7 +1730,7 @@
 </file>
 
 <file path=ppt/notesSlides/notesSlide25.xml><?xml version="1.0" encoding="utf-8"?>
-<p:notes xmlns:a="http://schemas.openxmlformats.org/drawingml/2006/main" xmlns:p="http://schemas.openxmlformats.org/presentationml/2006/main" xmlns:r="http://schemas.openxmlformats.org/officeDocument/2006/relationships">
+<p:notes xmlns:a="http://schemas.openxmlformats.org/drawingml/2006/main" xmlns:r="http://schemas.openxmlformats.org/officeDocument/2006/relationships" xmlns:p="http://schemas.openxmlformats.org/presentationml/2006/main">
   <p:cSld>
     <p:spTree>
       <p:nvGrpSpPr>
@@ -1748,7 +1750,7 @@
         <p:nvSpPr>
           <p:cNvPr id="2" name="Slide Image Placeholder 1"/>
           <p:cNvSpPr>
-            <a:spLocks noGrp="1"/>
+            <a:spLocks noGrp="1" noRot="1" noChangeAspect="1"/>
           </p:cNvSpPr>
           <p:nvPr>
             <p:ph type="sldImg" idx="2"/>
@@ -1763,7 +1765,7 @@
             <a:spLocks noGrp="1"/>
           </p:cNvSpPr>
           <p:nvPr>
-            <p:ph type="body" idx="3" sz="quarter"/>
+            <p:ph type="body" sz="quarter" idx="3"/>
           </p:nvPr>
         </p:nvSpPr>
         <p:spPr/>
@@ -1784,7 +1786,7 @@
             <a:spLocks noGrp="1"/>
           </p:cNvSpPr>
           <p:nvPr>
-            <p:ph type="sldNum" idx="5" sz="quarter"/>
+            <p:ph type="sldNum" sz="quarter" idx="5"/>
           </p:nvPr>
         </p:nvSpPr>
         <p:spPr/>
@@ -1798,7 +1800,7 @@
 </file>
 
 <file path=ppt/notesSlides/notesSlide26.xml><?xml version="1.0" encoding="utf-8"?>
-<p:notes xmlns:a="http://schemas.openxmlformats.org/drawingml/2006/main" xmlns:p="http://schemas.openxmlformats.org/presentationml/2006/main" xmlns:r="http://schemas.openxmlformats.org/officeDocument/2006/relationships">
+<p:notes xmlns:a="http://schemas.openxmlformats.org/drawingml/2006/main" xmlns:r="http://schemas.openxmlformats.org/officeDocument/2006/relationships" xmlns:p="http://schemas.openxmlformats.org/presentationml/2006/main">
   <p:cSld>
     <p:spTree>
       <p:nvGrpSpPr>
@@ -1818,7 +1820,7 @@
         <p:nvSpPr>
           <p:cNvPr id="2" name="Slide Image Placeholder 1"/>
           <p:cNvSpPr>
-            <a:spLocks noGrp="1"/>
+            <a:spLocks noGrp="1" noRot="1" noChangeAspect="1"/>
           </p:cNvSpPr>
           <p:nvPr>
             <p:ph type="sldImg" idx="2"/>
@@ -1833,7 +1835,7 @@
             <a:spLocks noGrp="1"/>
           </p:cNvSpPr>
           <p:nvPr>
-            <p:ph type="body" idx="3" sz="quarter"/>
+            <p:ph type="body" sz="quarter" idx="3"/>
           </p:nvPr>
         </p:nvSpPr>
         <p:spPr/>
@@ -1854,7 +1856,7 @@
             <a:spLocks noGrp="1"/>
           </p:cNvSpPr>
           <p:nvPr>
-            <p:ph type="sldNum" idx="5" sz="quarter"/>
+            <p:ph type="sldNum" sz="quarter" idx="5"/>
           </p:nvPr>
         </p:nvSpPr>
         <p:spPr/>
@@ -1868,7 +1870,7 @@
 </file>
 
 <file path=ppt/notesSlides/notesSlide27.xml><?xml version="1.0" encoding="utf-8"?>
-<p:notes xmlns:a="http://schemas.openxmlformats.org/drawingml/2006/main" xmlns:p="http://schemas.openxmlformats.org/presentationml/2006/main" xmlns:r="http://schemas.openxmlformats.org/officeDocument/2006/relationships">
+<p:notes xmlns:a="http://schemas.openxmlformats.org/drawingml/2006/main" xmlns:r="http://schemas.openxmlformats.org/officeDocument/2006/relationships" xmlns:p="http://schemas.openxmlformats.org/presentationml/2006/main">
   <p:cSld>
     <p:spTree>
       <p:nvGrpSpPr>
@@ -1888,7 +1890,7 @@
         <p:nvSpPr>
           <p:cNvPr id="2" name="Slide Image Placeholder 1"/>
           <p:cNvSpPr>
-            <a:spLocks noGrp="1"/>
+            <a:spLocks noGrp="1" noRot="1" noChangeAspect="1"/>
           </p:cNvSpPr>
           <p:nvPr>
             <p:ph type="sldImg" idx="2"/>
@@ -1903,7 +1905,7 @@
             <a:spLocks noGrp="1"/>
           </p:cNvSpPr>
           <p:nvPr>
-            <p:ph type="body" idx="3" sz="quarter"/>
+            <p:ph type="body" sz="quarter" idx="3"/>
           </p:nvPr>
         </p:nvSpPr>
         <p:spPr/>
@@ -1924,7 +1926,7 @@
             <a:spLocks noGrp="1"/>
           </p:cNvSpPr>
           <p:nvPr>
-            <p:ph type="sldNum" idx="5" sz="quarter"/>
+            <p:ph type="sldNum" sz="quarter" idx="5"/>
           </p:nvPr>
         </p:nvSpPr>
         <p:spPr/>
@@ -1938,7 +1940,7 @@
 </file>
 
 <file path=ppt/notesSlides/notesSlide28.xml><?xml version="1.0" encoding="utf-8"?>
-<p:notes xmlns:a="http://schemas.openxmlformats.org/drawingml/2006/main" xmlns:p="http://schemas.openxmlformats.org/presentationml/2006/main" xmlns:r="http://schemas.openxmlformats.org/officeDocument/2006/relationships">
+<p:notes xmlns:a="http://schemas.openxmlformats.org/drawingml/2006/main" xmlns:r="http://schemas.openxmlformats.org/officeDocument/2006/relationships" xmlns:p="http://schemas.openxmlformats.org/presentationml/2006/main">
   <p:cSld>
     <p:spTree>
       <p:nvGrpSpPr>
@@ -1958,7 +1960,7 @@
         <p:nvSpPr>
           <p:cNvPr id="2" name="Slide Image Placeholder 1"/>
           <p:cNvSpPr>
-            <a:spLocks noGrp="1"/>
+            <a:spLocks noGrp="1" noRot="1" noChangeAspect="1"/>
           </p:cNvSpPr>
           <p:nvPr>
             <p:ph type="sldImg" idx="2"/>
@@ -1973,7 +1975,7 @@
             <a:spLocks noGrp="1"/>
           </p:cNvSpPr>
           <p:nvPr>
-            <p:ph type="body" idx="3" sz="quarter"/>
+            <p:ph type="body" sz="quarter" idx="3"/>
           </p:nvPr>
         </p:nvSpPr>
         <p:spPr/>
@@ -1994,7 +1996,7 @@
             <a:spLocks noGrp="1"/>
           </p:cNvSpPr>
           <p:nvPr>
-            <p:ph type="sldNum" idx="5" sz="quarter"/>
+            <p:ph type="sldNum" sz="quarter" idx="5"/>
           </p:nvPr>
         </p:nvSpPr>
         <p:spPr/>
@@ -2008,7 +2010,7 @@
 </file>
 
 <file path=ppt/notesSlides/notesSlide29.xml><?xml version="1.0" encoding="utf-8"?>
-<p:notes xmlns:a="http://schemas.openxmlformats.org/drawingml/2006/main" xmlns:p="http://schemas.openxmlformats.org/presentationml/2006/main" xmlns:r="http://schemas.openxmlformats.org/officeDocument/2006/relationships">
+<p:notes xmlns:a="http://schemas.openxmlformats.org/drawingml/2006/main" xmlns:r="http://schemas.openxmlformats.org/officeDocument/2006/relationships" xmlns:p="http://schemas.openxmlformats.org/presentationml/2006/main">
   <p:cSld>
     <p:spTree>
       <p:nvGrpSpPr>
@@ -2028,7 +2030,7 @@
         <p:nvSpPr>
           <p:cNvPr id="2" name="Slide Image Placeholder 1"/>
           <p:cNvSpPr>
-            <a:spLocks noGrp="1"/>
+            <a:spLocks noGrp="1" noRot="1" noChangeAspect="1"/>
           </p:cNvSpPr>
           <p:nvPr>
             <p:ph type="sldImg" idx="2"/>
@@ -2043,7 +2045,7 @@
             <a:spLocks noGrp="1"/>
           </p:cNvSpPr>
           <p:nvPr>
-            <p:ph type="body" idx="3" sz="quarter"/>
+            <p:ph type="body" sz="quarter" idx="3"/>
           </p:nvPr>
         </p:nvSpPr>
         <p:spPr/>
@@ -2064,7 +2066,7 @@
             <a:spLocks noGrp="1"/>
           </p:cNvSpPr>
           <p:nvPr>
-            <p:ph type="sldNum" idx="5" sz="quarter"/>
+            <p:ph type="sldNum" sz="quarter" idx="5"/>
           </p:nvPr>
         </p:nvSpPr>
         <p:spPr/>
@@ -2078,7 +2080,7 @@
 </file>
 
 <file path=ppt/notesSlides/notesSlide3.xml><?xml version="1.0" encoding="utf-8"?>
-<p:notes xmlns:a="http://schemas.openxmlformats.org/drawingml/2006/main" xmlns:p="http://schemas.openxmlformats.org/presentationml/2006/main" xmlns:r="http://schemas.openxmlformats.org/officeDocument/2006/relationships">
+<p:notes xmlns:a="http://schemas.openxmlformats.org/drawingml/2006/main" xmlns:r="http://schemas.openxmlformats.org/officeDocument/2006/relationships" xmlns:p="http://schemas.openxmlformats.org/presentationml/2006/main">
   <p:cSld>
     <p:spTree>
       <p:nvGrpSpPr>
@@ -2098,7 +2100,7 @@
         <p:nvSpPr>
           <p:cNvPr id="2" name="Slide Image Placeholder 1"/>
           <p:cNvSpPr>
-            <a:spLocks noGrp="1"/>
+            <a:spLocks noGrp="1" noRot="1" noChangeAspect="1"/>
           </p:cNvSpPr>
           <p:nvPr>
             <p:ph type="sldImg" idx="2"/>
@@ -2113,7 +2115,7 @@
             <a:spLocks noGrp="1"/>
           </p:cNvSpPr>
           <p:nvPr>
-            <p:ph type="body" idx="3" sz="quarter"/>
+            <p:ph type="body" sz="quarter" idx="3"/>
           </p:nvPr>
         </p:nvSpPr>
         <p:spPr/>
@@ -2134,7 +2136,7 @@
             <a:spLocks noGrp="1"/>
           </p:cNvSpPr>
           <p:nvPr>
-            <p:ph type="sldNum" idx="5" sz="quarter"/>
+            <p:ph type="sldNum" sz="quarter" idx="5"/>
           </p:nvPr>
         </p:nvSpPr>
         <p:spPr/>
@@ -2148,7 +2150,7 @@
 </file>
 
 <file path=ppt/notesSlides/notesSlide30.xml><?xml version="1.0" encoding="utf-8"?>
-<p:notes xmlns:a="http://schemas.openxmlformats.org/drawingml/2006/main" xmlns:p="http://schemas.openxmlformats.org/presentationml/2006/main" xmlns:r="http://schemas.openxmlformats.org/officeDocument/2006/relationships">
+<p:notes xmlns:a="http://schemas.openxmlformats.org/drawingml/2006/main" xmlns:r="http://schemas.openxmlformats.org/officeDocument/2006/relationships" xmlns:p="http://schemas.openxmlformats.org/presentationml/2006/main">
   <p:cSld>
     <p:spTree>
       <p:nvGrpSpPr>
@@ -2168,7 +2170,7 @@
         <p:nvSpPr>
           <p:cNvPr id="2" name="Slide Image Placeholder 1"/>
           <p:cNvSpPr>
-            <a:spLocks noGrp="1"/>
+            <a:spLocks noGrp="1" noRot="1" noChangeAspect="1"/>
           </p:cNvSpPr>
           <p:nvPr>
             <p:ph type="sldImg" idx="2"/>
@@ -2183,7 +2185,7 @@
             <a:spLocks noGrp="1"/>
           </p:cNvSpPr>
           <p:nvPr>
-            <p:ph type="body" idx="3" sz="quarter"/>
+            <p:ph type="body" sz="quarter" idx="3"/>
           </p:nvPr>
         </p:nvSpPr>
         <p:spPr/>
@@ -2204,7 +2206,7 @@
             <a:spLocks noGrp="1"/>
           </p:cNvSpPr>
           <p:nvPr>
-            <p:ph type="sldNum" idx="5" sz="quarter"/>
+            <p:ph type="sldNum" sz="quarter" idx="5"/>
           </p:nvPr>
         </p:nvSpPr>
         <p:spPr/>
@@ -2218,7 +2220,7 @@
 </file>
 
 <file path=ppt/notesSlides/notesSlide31.xml><?xml version="1.0" encoding="utf-8"?>
-<p:notes xmlns:a="http://schemas.openxmlformats.org/drawingml/2006/main" xmlns:p="http://schemas.openxmlformats.org/presentationml/2006/main" xmlns:r="http://schemas.openxmlformats.org/officeDocument/2006/relationships">
+<p:notes xmlns:a="http://schemas.openxmlformats.org/drawingml/2006/main" xmlns:r="http://schemas.openxmlformats.org/officeDocument/2006/relationships" xmlns:p="http://schemas.openxmlformats.org/presentationml/2006/main">
   <p:cSld>
     <p:spTree>
       <p:nvGrpSpPr>
@@ -2238,7 +2240,7 @@
         <p:nvSpPr>
           <p:cNvPr id="2" name="Slide Image Placeholder 1"/>
           <p:cNvSpPr>
-            <a:spLocks noGrp="1"/>
+            <a:spLocks noGrp="1" noRot="1" noChangeAspect="1"/>
           </p:cNvSpPr>
           <p:nvPr>
             <p:ph type="sldImg" idx="2"/>
@@ -2253,7 +2255,7 @@
             <a:spLocks noGrp="1"/>
           </p:cNvSpPr>
           <p:nvPr>
-            <p:ph type="body" idx="3" sz="quarter"/>
+            <p:ph type="body" sz="quarter" idx="3"/>
           </p:nvPr>
         </p:nvSpPr>
         <p:spPr/>
@@ -2274,7 +2276,7 @@
             <a:spLocks noGrp="1"/>
           </p:cNvSpPr>
           <p:nvPr>
-            <p:ph type="sldNum" idx="5" sz="quarter"/>
+            <p:ph type="sldNum" sz="quarter" idx="5"/>
           </p:nvPr>
         </p:nvSpPr>
         <p:spPr/>
@@ -2288,7 +2290,7 @@
 </file>
 
 <file path=ppt/notesSlides/notesSlide32.xml><?xml version="1.0" encoding="utf-8"?>
-<p:notes xmlns:a="http://schemas.openxmlformats.org/drawingml/2006/main" xmlns:p="http://schemas.openxmlformats.org/presentationml/2006/main" xmlns:r="http://schemas.openxmlformats.org/officeDocument/2006/relationships">
+<p:notes xmlns:a="http://schemas.openxmlformats.org/drawingml/2006/main" xmlns:r="http://schemas.openxmlformats.org/officeDocument/2006/relationships" xmlns:p="http://schemas.openxmlformats.org/presentationml/2006/main">
   <p:cSld>
     <p:spTree>
       <p:nvGrpSpPr>
@@ -2308,7 +2310,7 @@
         <p:nvSpPr>
           <p:cNvPr id="2" name="Slide Image Placeholder 1"/>
           <p:cNvSpPr>
-            <a:spLocks noGrp="1"/>
+            <a:spLocks noGrp="1" noRot="1" noChangeAspect="1"/>
           </p:cNvSpPr>
           <p:nvPr>
             <p:ph type="sldImg" idx="2"/>
@@ -2323,7 +2325,7 @@
             <a:spLocks noGrp="1"/>
           </p:cNvSpPr>
           <p:nvPr>
-            <p:ph type="body" idx="3" sz="quarter"/>
+            <p:ph type="body" sz="quarter" idx="3"/>
           </p:nvPr>
         </p:nvSpPr>
         <p:spPr/>
@@ -2344,7 +2346,7 @@
             <a:spLocks noGrp="1"/>
           </p:cNvSpPr>
           <p:nvPr>
-            <p:ph type="sldNum" idx="5" sz="quarter"/>
+            <p:ph type="sldNum" sz="quarter" idx="5"/>
           </p:nvPr>
         </p:nvSpPr>
         <p:spPr/>
@@ -2358,7 +2360,7 @@
 </file>
 
 <file path=ppt/notesSlides/notesSlide33.xml><?xml version="1.0" encoding="utf-8"?>
-<p:notes xmlns:a="http://schemas.openxmlformats.org/drawingml/2006/main" xmlns:p="http://schemas.openxmlformats.org/presentationml/2006/main" xmlns:r="http://schemas.openxmlformats.org/officeDocument/2006/relationships">
+<p:notes xmlns:a="http://schemas.openxmlformats.org/drawingml/2006/main" xmlns:r="http://schemas.openxmlformats.org/officeDocument/2006/relationships" xmlns:p="http://schemas.openxmlformats.org/presentationml/2006/main">
   <p:cSld>
     <p:spTree>
       <p:nvGrpSpPr>
@@ -2378,7 +2380,7 @@
         <p:nvSpPr>
           <p:cNvPr id="2" name="Slide Image Placeholder 1"/>
           <p:cNvSpPr>
-            <a:spLocks noGrp="1"/>
+            <a:spLocks noGrp="1" noRot="1" noChangeAspect="1"/>
           </p:cNvSpPr>
           <p:nvPr>
             <p:ph type="sldImg" idx="2"/>
@@ -2393,7 +2395,7 @@
             <a:spLocks noGrp="1"/>
           </p:cNvSpPr>
           <p:nvPr>
-            <p:ph type="body" idx="3" sz="quarter"/>
+            <p:ph type="body" sz="quarter" idx="3"/>
           </p:nvPr>
         </p:nvSpPr>
         <p:spPr/>
@@ -2414,7 +2416,7 @@
             <a:spLocks noGrp="1"/>
           </p:cNvSpPr>
           <p:nvPr>
-            <p:ph type="sldNum" idx="5" sz="quarter"/>
+            <p:ph type="sldNum" sz="quarter" idx="5"/>
           </p:nvPr>
         </p:nvSpPr>
         <p:spPr/>
@@ -2428,7 +2430,7 @@
 </file>
 
 <file path=ppt/notesSlides/notesSlide34.xml><?xml version="1.0" encoding="utf-8"?>
-<p:notes xmlns:a="http://schemas.openxmlformats.org/drawingml/2006/main" xmlns:p="http://schemas.openxmlformats.org/presentationml/2006/main" xmlns:r="http://schemas.openxmlformats.org/officeDocument/2006/relationships">
+<p:notes xmlns:a="http://schemas.openxmlformats.org/drawingml/2006/main" xmlns:r="http://schemas.openxmlformats.org/officeDocument/2006/relationships" xmlns:p="http://schemas.openxmlformats.org/presentationml/2006/main">
   <p:cSld>
     <p:spTree>
       <p:nvGrpSpPr>
@@ -2448,7 +2450,7 @@
         <p:nvSpPr>
           <p:cNvPr id="2" name="Slide Image Placeholder 1"/>
           <p:cNvSpPr>
-            <a:spLocks noGrp="1"/>
+            <a:spLocks noGrp="1" noRot="1" noChangeAspect="1"/>
           </p:cNvSpPr>
           <p:nvPr>
             <p:ph type="sldImg" idx="2"/>
@@ -2463,7 +2465,7 @@
             <a:spLocks noGrp="1"/>
           </p:cNvSpPr>
           <p:nvPr>
-            <p:ph type="body" idx="3" sz="quarter"/>
+            <p:ph type="body" sz="quarter" idx="3"/>
           </p:nvPr>
         </p:nvSpPr>
         <p:spPr/>
@@ -2484,7 +2486,7 @@
             <a:spLocks noGrp="1"/>
           </p:cNvSpPr>
           <p:nvPr>
-            <p:ph type="sldNum" idx="5" sz="quarter"/>
+            <p:ph type="sldNum" sz="quarter" idx="5"/>
           </p:nvPr>
         </p:nvSpPr>
         <p:spPr/>
@@ -2498,7 +2500,7 @@
 </file>
 
 <file path=ppt/notesSlides/notesSlide35.xml><?xml version="1.0" encoding="utf-8"?>
-<p:notes xmlns:a="http://schemas.openxmlformats.org/drawingml/2006/main" xmlns:p="http://schemas.openxmlformats.org/presentationml/2006/main" xmlns:r="http://schemas.openxmlformats.org/officeDocument/2006/relationships">
+<p:notes xmlns:a="http://schemas.openxmlformats.org/drawingml/2006/main" xmlns:r="http://schemas.openxmlformats.org/officeDocument/2006/relationships" xmlns:p="http://schemas.openxmlformats.org/presentationml/2006/main">
   <p:cSld>
     <p:spTree>
       <p:nvGrpSpPr>
@@ -2518,7 +2520,7 @@
         <p:nvSpPr>
           <p:cNvPr id="2" name="Slide Image Placeholder 1"/>
           <p:cNvSpPr>
-            <a:spLocks noGrp="1"/>
+            <a:spLocks noGrp="1" noRot="1" noChangeAspect="1"/>
           </p:cNvSpPr>
           <p:nvPr>
             <p:ph type="sldImg" idx="2"/>
@@ -2533,7 +2535,7 @@
             <a:spLocks noGrp="1"/>
           </p:cNvSpPr>
           <p:nvPr>
-            <p:ph type="body" idx="3" sz="quarter"/>
+            <p:ph type="body" sz="quarter" idx="3"/>
           </p:nvPr>
         </p:nvSpPr>
         <p:spPr/>
@@ -2554,7 +2556,7 @@
             <a:spLocks noGrp="1"/>
           </p:cNvSpPr>
           <p:nvPr>
-            <p:ph type="sldNum" idx="5" sz="quarter"/>
+            <p:ph type="sldNum" sz="quarter" idx="5"/>
           </p:nvPr>
         </p:nvSpPr>
         <p:spPr/>
@@ -2568,7 +2570,7 @@
 </file>
 
 <file path=ppt/notesSlides/notesSlide36.xml><?xml version="1.0" encoding="utf-8"?>
-<p:notes xmlns:a="http://schemas.openxmlformats.org/drawingml/2006/main" xmlns:p="http://schemas.openxmlformats.org/presentationml/2006/main" xmlns:r="http://schemas.openxmlformats.org/officeDocument/2006/relationships">
+<p:notes xmlns:a="http://schemas.openxmlformats.org/drawingml/2006/main" xmlns:r="http://schemas.openxmlformats.org/officeDocument/2006/relationships" xmlns:p="http://schemas.openxmlformats.org/presentationml/2006/main">
   <p:cSld>
     <p:spTree>
       <p:nvGrpSpPr>
@@ -2588,7 +2590,7 @@
         <p:nvSpPr>
           <p:cNvPr id="2" name="Slide Image Placeholder 1"/>
           <p:cNvSpPr>
-            <a:spLocks noGrp="1"/>
+            <a:spLocks noGrp="1" noRot="1" noChangeAspect="1"/>
           </p:cNvSpPr>
           <p:nvPr>
             <p:ph type="sldImg" idx="2"/>
@@ -2603,7 +2605,7 @@
             <a:spLocks noGrp="1"/>
           </p:cNvSpPr>
           <p:nvPr>
-            <p:ph type="body" idx="3" sz="quarter"/>
+            <p:ph type="body" sz="quarter" idx="3"/>
           </p:nvPr>
         </p:nvSpPr>
         <p:spPr/>
@@ -2624,7 +2626,7 @@
             <a:spLocks noGrp="1"/>
           </p:cNvSpPr>
           <p:nvPr>
-            <p:ph type="sldNum" idx="5" sz="quarter"/>
+            <p:ph type="sldNum" sz="quarter" idx="5"/>
           </p:nvPr>
         </p:nvSpPr>
         <p:spPr/>
@@ -2638,7 +2640,7 @@
 </file>
 
 <file path=ppt/notesSlides/notesSlide37.xml><?xml version="1.0" encoding="utf-8"?>
-<p:notes xmlns:a="http://schemas.openxmlformats.org/drawingml/2006/main" xmlns:p="http://schemas.openxmlformats.org/presentationml/2006/main" xmlns:r="http://schemas.openxmlformats.org/officeDocument/2006/relationships">
+<p:notes xmlns:a="http://schemas.openxmlformats.org/drawingml/2006/main" xmlns:r="http://schemas.openxmlformats.org/officeDocument/2006/relationships" xmlns:p="http://schemas.openxmlformats.org/presentationml/2006/main">
   <p:cSld>
     <p:spTree>
       <p:nvGrpSpPr>
@@ -2658,7 +2660,7 @@
         <p:nvSpPr>
           <p:cNvPr id="2" name="Slide Image Placeholder 1"/>
           <p:cNvSpPr>
-            <a:spLocks noGrp="1"/>
+            <a:spLocks noGrp="1" noRot="1" noChangeAspect="1"/>
           </p:cNvSpPr>
           <p:nvPr>
             <p:ph type="sldImg" idx="2"/>
@@ -2673,7 +2675,7 @@
             <a:spLocks noGrp="1"/>
           </p:cNvSpPr>
           <p:nvPr>
-            <p:ph type="body" idx="3" sz="quarter"/>
+            <p:ph type="body" sz="quarter" idx="3"/>
           </p:nvPr>
         </p:nvSpPr>
         <p:spPr/>
@@ -2694,7 +2696,7 @@
             <a:spLocks noGrp="1"/>
           </p:cNvSpPr>
           <p:nvPr>
-            <p:ph type="sldNum" idx="5" sz="quarter"/>
+            <p:ph type="sldNum" sz="quarter" idx="5"/>
           </p:nvPr>
         </p:nvSpPr>
         <p:spPr/>
@@ -2708,7 +2710,7 @@
 </file>
 
 <file path=ppt/notesSlides/notesSlide38.xml><?xml version="1.0" encoding="utf-8"?>
-<p:notes xmlns:a="http://schemas.openxmlformats.org/drawingml/2006/main" xmlns:p="http://schemas.openxmlformats.org/presentationml/2006/main" xmlns:r="http://schemas.openxmlformats.org/officeDocument/2006/relationships">
+<p:notes xmlns:a="http://schemas.openxmlformats.org/drawingml/2006/main" xmlns:r="http://schemas.openxmlformats.org/officeDocument/2006/relationships" xmlns:p="http://schemas.openxmlformats.org/presentationml/2006/main">
   <p:cSld>
     <p:spTree>
       <p:nvGrpSpPr>
@@ -2728,7 +2730,7 @@
         <p:nvSpPr>
           <p:cNvPr id="2" name="Slide Image Placeholder 1"/>
           <p:cNvSpPr>
-            <a:spLocks noGrp="1"/>
+            <a:spLocks noGrp="1" noRot="1" noChangeAspect="1"/>
           </p:cNvSpPr>
           <p:nvPr>
             <p:ph type="sldImg" idx="2"/>
@@ -2743,7 +2745,7 @@
             <a:spLocks noGrp="1"/>
           </p:cNvSpPr>
           <p:nvPr>
-            <p:ph type="body" idx="3" sz="quarter"/>
+            <p:ph type="body" sz="quarter" idx="3"/>
           </p:nvPr>
         </p:nvSpPr>
         <p:spPr/>
@@ -2764,7 +2766,7 @@
             <a:spLocks noGrp="1"/>
           </p:cNvSpPr>
           <p:nvPr>
-            <p:ph type="sldNum" idx="5" sz="quarter"/>
+            <p:ph type="sldNum" sz="quarter" idx="5"/>
           </p:nvPr>
         </p:nvSpPr>
         <p:spPr/>
@@ -2778,7 +2780,7 @@
 </file>
 
 <file path=ppt/notesSlides/notesSlide39.xml><?xml version="1.0" encoding="utf-8"?>
-<p:notes xmlns:a="http://schemas.openxmlformats.org/drawingml/2006/main" xmlns:p="http://schemas.openxmlformats.org/presentationml/2006/main" xmlns:r="http://schemas.openxmlformats.org/officeDocument/2006/relationships">
+<p:notes xmlns:a="http://schemas.openxmlformats.org/drawingml/2006/main" xmlns:r="http://schemas.openxmlformats.org/officeDocument/2006/relationships" xmlns:p="http://schemas.openxmlformats.org/presentationml/2006/main">
   <p:cSld>
     <p:spTree>
       <p:nvGrpSpPr>
@@ -2798,7 +2800,7 @@
         <p:nvSpPr>
           <p:cNvPr id="2" name="Slide Image Placeholder 1"/>
           <p:cNvSpPr>
-            <a:spLocks noGrp="1"/>
+            <a:spLocks noGrp="1" noRot="1" noChangeAspect="1"/>
           </p:cNvSpPr>
           <p:nvPr>
             <p:ph type="sldImg" idx="2"/>
@@ -2813,7 +2815,7 @@
             <a:spLocks noGrp="1"/>
           </p:cNvSpPr>
           <p:nvPr>
-            <p:ph type="body" idx="3" sz="quarter"/>
+            <p:ph type="body" sz="quarter" idx="3"/>
           </p:nvPr>
         </p:nvSpPr>
         <p:spPr/>
@@ -2834,7 +2836,7 @@
             <a:spLocks noGrp="1"/>
           </p:cNvSpPr>
           <p:nvPr>
-            <p:ph type="sldNum" idx="5" sz="quarter"/>
+            <p:ph type="sldNum" sz="quarter" idx="5"/>
           </p:nvPr>
         </p:nvSpPr>
         <p:spPr/>
@@ -2848,7 +2850,7 @@
 </file>
 
 <file path=ppt/notesSlides/notesSlide4.xml><?xml version="1.0" encoding="utf-8"?>
-<p:notes xmlns:a="http://schemas.openxmlformats.org/drawingml/2006/main" xmlns:p="http://schemas.openxmlformats.org/presentationml/2006/main" xmlns:r="http://schemas.openxmlformats.org/officeDocument/2006/relationships">
+<p:notes xmlns:a="http://schemas.openxmlformats.org/drawingml/2006/main" xmlns:r="http://schemas.openxmlformats.org/officeDocument/2006/relationships" xmlns:p="http://schemas.openxmlformats.org/presentationml/2006/main">
   <p:cSld>
     <p:spTree>
       <p:nvGrpSpPr>
@@ -2868,7 +2870,7 @@
         <p:nvSpPr>
           <p:cNvPr id="2" name="Slide Image Placeholder 1"/>
           <p:cNvSpPr>
-            <a:spLocks noGrp="1"/>
+            <a:spLocks noGrp="1" noRot="1" noChangeAspect="1"/>
           </p:cNvSpPr>
           <p:nvPr>
             <p:ph type="sldImg" idx="2"/>
@@ -2883,7 +2885,7 @@
             <a:spLocks noGrp="1"/>
           </p:cNvSpPr>
           <p:nvPr>
-            <p:ph type="body" idx="3" sz="quarter"/>
+            <p:ph type="body" sz="quarter" idx="3"/>
           </p:nvPr>
         </p:nvSpPr>
         <p:spPr/>
@@ -2904,7 +2906,7 @@
             <a:spLocks noGrp="1"/>
           </p:cNvSpPr>
           <p:nvPr>
-            <p:ph type="sldNum" idx="5" sz="quarter"/>
+            <p:ph type="sldNum" sz="quarter" idx="5"/>
           </p:nvPr>
         </p:nvSpPr>
         <p:spPr/>
@@ -2918,7 +2920,7 @@
 </file>
 
 <file path=ppt/notesSlides/notesSlide40.xml><?xml version="1.0" encoding="utf-8"?>
-<p:notes xmlns:a="http://schemas.openxmlformats.org/drawingml/2006/main" xmlns:p="http://schemas.openxmlformats.org/presentationml/2006/main" xmlns:r="http://schemas.openxmlformats.org/officeDocument/2006/relationships">
+<p:notes xmlns:a="http://schemas.openxmlformats.org/drawingml/2006/main" xmlns:r="http://schemas.openxmlformats.org/officeDocument/2006/relationships" xmlns:p="http://schemas.openxmlformats.org/presentationml/2006/main">
   <p:cSld>
     <p:spTree>
       <p:nvGrpSpPr>
@@ -2938,7 +2940,7 @@
         <p:nvSpPr>
           <p:cNvPr id="2" name="Slide Image Placeholder 1"/>
           <p:cNvSpPr>
-            <a:spLocks noGrp="1"/>
+            <a:spLocks noGrp="1" noRot="1" noChangeAspect="1"/>
           </p:cNvSpPr>
           <p:nvPr>
             <p:ph type="sldImg" idx="2"/>
@@ -2953,7 +2955,7 @@
             <a:spLocks noGrp="1"/>
           </p:cNvSpPr>
           <p:nvPr>
-            <p:ph type="body" idx="3" sz="quarter"/>
+            <p:ph type="body" sz="quarter" idx="3"/>
           </p:nvPr>
         </p:nvSpPr>
         <p:spPr/>
@@ -2974,7 +2976,7 @@
             <a:spLocks noGrp="1"/>
           </p:cNvSpPr>
           <p:nvPr>
-            <p:ph type="sldNum" idx="5" sz="quarter"/>
+            <p:ph type="sldNum" sz="quarter" idx="5"/>
           </p:nvPr>
         </p:nvSpPr>
         <p:spPr/>
@@ -2988,7 +2990,7 @@
 </file>
 
 <file path=ppt/notesSlides/notesSlide41.xml><?xml version="1.0" encoding="utf-8"?>
-<p:notes xmlns:a="http://schemas.openxmlformats.org/drawingml/2006/main" xmlns:p="http://schemas.openxmlformats.org/presentationml/2006/main" xmlns:r="http://schemas.openxmlformats.org/officeDocument/2006/relationships">
+<p:notes xmlns:a="http://schemas.openxmlformats.org/drawingml/2006/main" xmlns:r="http://schemas.openxmlformats.org/officeDocument/2006/relationships" xmlns:p="http://schemas.openxmlformats.org/presentationml/2006/main">
   <p:cSld>
     <p:spTree>
       <p:nvGrpSpPr>
@@ -3008,7 +3010,7 @@
         <p:nvSpPr>
           <p:cNvPr id="2" name="Slide Image Placeholder 1"/>
           <p:cNvSpPr>
-            <a:spLocks noGrp="1"/>
+            <a:spLocks noGrp="1" noRot="1" noChangeAspect="1"/>
           </p:cNvSpPr>
           <p:nvPr>
             <p:ph type="sldImg" idx="2"/>
@@ -3023,7 +3025,7 @@
             <a:spLocks noGrp="1"/>
           </p:cNvSpPr>
           <p:nvPr>
-            <p:ph type="body" idx="3" sz="quarter"/>
+            <p:ph type="body" sz="quarter" idx="3"/>
           </p:nvPr>
         </p:nvSpPr>
         <p:spPr/>
@@ -3044,7 +3046,7 @@
             <a:spLocks noGrp="1"/>
           </p:cNvSpPr>
           <p:nvPr>
-            <p:ph type="sldNum" idx="5" sz="quarter"/>
+            <p:ph type="sldNum" sz="quarter" idx="5"/>
           </p:nvPr>
         </p:nvSpPr>
         <p:spPr/>
@@ -3058,7 +3060,7 @@
 </file>
 
 <file path=ppt/notesSlides/notesSlide42.xml><?xml version="1.0" encoding="utf-8"?>
-<p:notes xmlns:a="http://schemas.openxmlformats.org/drawingml/2006/main" xmlns:p="http://schemas.openxmlformats.org/presentationml/2006/main" xmlns:r="http://schemas.openxmlformats.org/officeDocument/2006/relationships">
+<p:notes xmlns:a="http://schemas.openxmlformats.org/drawingml/2006/main" xmlns:r="http://schemas.openxmlformats.org/officeDocument/2006/relationships" xmlns:p="http://schemas.openxmlformats.org/presentationml/2006/main">
   <p:cSld>
     <p:spTree>
       <p:nvGrpSpPr>
@@ -3078,7 +3080,7 @@
         <p:nvSpPr>
           <p:cNvPr id="2" name="Slide Image Placeholder 1"/>
           <p:cNvSpPr>
-            <a:spLocks noGrp="1"/>
+            <a:spLocks noGrp="1" noRot="1" noChangeAspect="1"/>
           </p:cNvSpPr>
           <p:nvPr>
             <p:ph type="sldImg" idx="2"/>
@@ -3093,7 +3095,7 @@
             <a:spLocks noGrp="1"/>
           </p:cNvSpPr>
           <p:nvPr>
-            <p:ph type="body" idx="3" sz="quarter"/>
+            <p:ph type="body" sz="quarter" idx="3"/>
           </p:nvPr>
         </p:nvSpPr>
         <p:spPr/>
@@ -3114,7 +3116,7 @@
             <a:spLocks noGrp="1"/>
           </p:cNvSpPr>
           <p:nvPr>
-            <p:ph type="sldNum" idx="5" sz="quarter"/>
+            <p:ph type="sldNum" sz="quarter" idx="5"/>
           </p:nvPr>
         </p:nvSpPr>
         <p:spPr/>
@@ -3128,7 +3130,7 @@
 </file>
 
 <file path=ppt/notesSlides/notesSlide43.xml><?xml version="1.0" encoding="utf-8"?>
-<p:notes xmlns:a="http://schemas.openxmlformats.org/drawingml/2006/main" xmlns:p="http://schemas.openxmlformats.org/presentationml/2006/main" xmlns:r="http://schemas.openxmlformats.org/officeDocument/2006/relationships">
+<p:notes xmlns:a="http://schemas.openxmlformats.org/drawingml/2006/main" xmlns:r="http://schemas.openxmlformats.org/officeDocument/2006/relationships" xmlns:p="http://schemas.openxmlformats.org/presentationml/2006/main">
   <p:cSld>
     <p:spTree>
       <p:nvGrpSpPr>
@@ -3148,7 +3150,7 @@
         <p:nvSpPr>
           <p:cNvPr id="2" name="Slide Image Placeholder 1"/>
           <p:cNvSpPr>
-            <a:spLocks noGrp="1"/>
+            <a:spLocks noGrp="1" noRot="1" noChangeAspect="1"/>
           </p:cNvSpPr>
           <p:nvPr>
             <p:ph type="sldImg" idx="2"/>
@@ -3163,7 +3165,7 @@
             <a:spLocks noGrp="1"/>
           </p:cNvSpPr>
           <p:nvPr>
-            <p:ph type="body" idx="3" sz="quarter"/>
+            <p:ph type="body" sz="quarter" idx="3"/>
           </p:nvPr>
         </p:nvSpPr>
         <p:spPr/>
@@ -3184,7 +3186,7 @@
             <a:spLocks noGrp="1"/>
           </p:cNvSpPr>
           <p:nvPr>
-            <p:ph type="sldNum" idx="5" sz="quarter"/>
+            <p:ph type="sldNum" sz="quarter" idx="5"/>
           </p:nvPr>
         </p:nvSpPr>
         <p:spPr/>
@@ -3198,7 +3200,7 @@
 </file>
 
 <file path=ppt/notesSlides/notesSlide44.xml><?xml version="1.0" encoding="utf-8"?>
-<p:notes xmlns:a="http://schemas.openxmlformats.org/drawingml/2006/main" xmlns:p="http://schemas.openxmlformats.org/presentationml/2006/main" xmlns:r="http://schemas.openxmlformats.org/officeDocument/2006/relationships">
+<p:notes xmlns:a="http://schemas.openxmlformats.org/drawingml/2006/main" xmlns:r="http://schemas.openxmlformats.org/officeDocument/2006/relationships" xmlns:p="http://schemas.openxmlformats.org/presentationml/2006/main">
   <p:cSld>
     <p:spTree>
       <p:nvGrpSpPr>
@@ -3218,7 +3220,7 @@
         <p:nvSpPr>
           <p:cNvPr id="2" name="Slide Image Placeholder 1"/>
           <p:cNvSpPr>
-            <a:spLocks noGrp="1"/>
+            <a:spLocks noGrp="1" noRot="1" noChangeAspect="1"/>
           </p:cNvSpPr>
           <p:nvPr>
             <p:ph type="sldImg" idx="2"/>
@@ -3233,7 +3235,7 @@
             <a:spLocks noGrp="1"/>
           </p:cNvSpPr>
           <p:nvPr>
-            <p:ph type="body" idx="3" sz="quarter"/>
+            <p:ph type="body" sz="quarter" idx="3"/>
           </p:nvPr>
         </p:nvSpPr>
         <p:spPr/>
@@ -3254,7 +3256,7 @@
             <a:spLocks noGrp="1"/>
           </p:cNvSpPr>
           <p:nvPr>
-            <p:ph type="sldNum" idx="5" sz="quarter"/>
+            <p:ph type="sldNum" sz="quarter" idx="5"/>
           </p:nvPr>
         </p:nvSpPr>
         <p:spPr/>
@@ -3268,7 +3270,7 @@
 </file>
 
 <file path=ppt/notesSlides/notesSlide45.xml><?xml version="1.0" encoding="utf-8"?>
-<p:notes xmlns:a="http://schemas.openxmlformats.org/drawingml/2006/main" xmlns:p="http://schemas.openxmlformats.org/presentationml/2006/main" xmlns:r="http://schemas.openxmlformats.org/officeDocument/2006/relationships">
+<p:notes xmlns:a="http://schemas.openxmlformats.org/drawingml/2006/main" xmlns:r="http://schemas.openxmlformats.org/officeDocument/2006/relationships" xmlns:p="http://schemas.openxmlformats.org/presentationml/2006/main">
   <p:cSld>
     <p:spTree>
       <p:nvGrpSpPr>
@@ -3288,7 +3290,7 @@
         <p:nvSpPr>
           <p:cNvPr id="2" name="Slide Image Placeholder 1"/>
           <p:cNvSpPr>
-            <a:spLocks noGrp="1"/>
+            <a:spLocks noGrp="1" noRot="1" noChangeAspect="1"/>
           </p:cNvSpPr>
           <p:nvPr>
             <p:ph type="sldImg" idx="2"/>
@@ -3303,7 +3305,7 @@
             <a:spLocks noGrp="1"/>
           </p:cNvSpPr>
           <p:nvPr>
-            <p:ph type="body" idx="3" sz="quarter"/>
+            <p:ph type="body" sz="quarter" idx="3"/>
           </p:nvPr>
         </p:nvSpPr>
         <p:spPr/>
@@ -3324,7 +3326,7 @@
             <a:spLocks noGrp="1"/>
           </p:cNvSpPr>
           <p:nvPr>
-            <p:ph type="sldNum" idx="5" sz="quarter"/>
+            <p:ph type="sldNum" sz="quarter" idx="5"/>
           </p:nvPr>
         </p:nvSpPr>
         <p:spPr/>
@@ -3338,7 +3340,7 @@
 </file>
 
 <file path=ppt/notesSlides/notesSlide46.xml><?xml version="1.0" encoding="utf-8"?>
-<p:notes xmlns:a="http://schemas.openxmlformats.org/drawingml/2006/main" xmlns:p="http://schemas.openxmlformats.org/presentationml/2006/main" xmlns:r="http://schemas.openxmlformats.org/officeDocument/2006/relationships">
+<p:notes xmlns:a="http://schemas.openxmlformats.org/drawingml/2006/main" xmlns:r="http://schemas.openxmlformats.org/officeDocument/2006/relationships" xmlns:p="http://schemas.openxmlformats.org/presentationml/2006/main">
   <p:cSld>
     <p:spTree>
       <p:nvGrpSpPr>
@@ -3358,7 +3360,7 @@
         <p:nvSpPr>
           <p:cNvPr id="2" name="Slide Image Placeholder 1"/>
           <p:cNvSpPr>
-            <a:spLocks noGrp="1"/>
+            <a:spLocks noGrp="1" noRot="1" noChangeAspect="1"/>
           </p:cNvSpPr>
           <p:nvPr>
             <p:ph type="sldImg" idx="2"/>
@@ -3373,7 +3375,7 @@
             <a:spLocks noGrp="1"/>
           </p:cNvSpPr>
           <p:nvPr>
-            <p:ph type="body" idx="3" sz="quarter"/>
+            <p:ph type="body" sz="quarter" idx="3"/>
           </p:nvPr>
         </p:nvSpPr>
         <p:spPr/>
@@ -3394,7 +3396,7 @@
             <a:spLocks noGrp="1"/>
           </p:cNvSpPr>
           <p:nvPr>
-            <p:ph type="sldNum" idx="5" sz="quarter"/>
+            <p:ph type="sldNum" sz="quarter" idx="5"/>
           </p:nvPr>
         </p:nvSpPr>
         <p:spPr/>
@@ -3408,7 +3410,7 @@
 </file>
 
 <file path=ppt/notesSlides/notesSlide47.xml><?xml version="1.0" encoding="utf-8"?>
-<p:notes xmlns:a="http://schemas.openxmlformats.org/drawingml/2006/main" xmlns:p="http://schemas.openxmlformats.org/presentationml/2006/main" xmlns:r="http://schemas.openxmlformats.org/officeDocument/2006/relationships">
+<p:notes xmlns:a="http://schemas.openxmlformats.org/drawingml/2006/main" xmlns:r="http://schemas.openxmlformats.org/officeDocument/2006/relationships" xmlns:p="http://schemas.openxmlformats.org/presentationml/2006/main">
   <p:cSld>
     <p:spTree>
       <p:nvGrpSpPr>
@@ -3428,7 +3430,7 @@
         <p:nvSpPr>
           <p:cNvPr id="2" name="Slide Image Placeholder 1"/>
           <p:cNvSpPr>
-            <a:spLocks noGrp="1"/>
+            <a:spLocks noGrp="1" noRot="1" noChangeAspect="1"/>
           </p:cNvSpPr>
           <p:nvPr>
             <p:ph type="sldImg" idx="2"/>
@@ -3443,7 +3445,7 @@
             <a:spLocks noGrp="1"/>
           </p:cNvSpPr>
           <p:nvPr>
-            <p:ph type="body" idx="3" sz="quarter"/>
+            <p:ph type="body" sz="quarter" idx="3"/>
           </p:nvPr>
         </p:nvSpPr>
         <p:spPr/>
@@ -3464,7 +3466,7 @@
             <a:spLocks noGrp="1"/>
           </p:cNvSpPr>
           <p:nvPr>
-            <p:ph type="sldNum" idx="5" sz="quarter"/>
+            <p:ph type="sldNum" sz="quarter" idx="5"/>
           </p:nvPr>
         </p:nvSpPr>
         <p:spPr/>
@@ -3478,7 +3480,7 @@
 </file>
 
 <file path=ppt/notesSlides/notesSlide48.xml><?xml version="1.0" encoding="utf-8"?>
-<p:notes xmlns:a="http://schemas.openxmlformats.org/drawingml/2006/main" xmlns:p="http://schemas.openxmlformats.org/presentationml/2006/main" xmlns:r="http://schemas.openxmlformats.org/officeDocument/2006/relationships">
+<p:notes xmlns:a="http://schemas.openxmlformats.org/drawingml/2006/main" xmlns:r="http://schemas.openxmlformats.org/officeDocument/2006/relationships" xmlns:p="http://schemas.openxmlformats.org/presentationml/2006/main">
   <p:cSld>
     <p:spTree>
       <p:nvGrpSpPr>
@@ -3498,7 +3500,7 @@
         <p:nvSpPr>
           <p:cNvPr id="2" name="Slide Image Placeholder 1"/>
           <p:cNvSpPr>
-            <a:spLocks noGrp="1"/>
+            <a:spLocks noGrp="1" noRot="1" noChangeAspect="1"/>
           </p:cNvSpPr>
           <p:nvPr>
             <p:ph type="sldImg" idx="2"/>
@@ -3513,7 +3515,7 @@
             <a:spLocks noGrp="1"/>
           </p:cNvSpPr>
           <p:nvPr>
-            <p:ph type="body" idx="3" sz="quarter"/>
+            <p:ph type="body" sz="quarter" idx="3"/>
           </p:nvPr>
         </p:nvSpPr>
         <p:spPr/>
@@ -3534,7 +3536,7 @@
             <a:spLocks noGrp="1"/>
           </p:cNvSpPr>
           <p:nvPr>
-            <p:ph type="sldNum" idx="5" sz="quarter"/>
+            <p:ph type="sldNum" sz="quarter" idx="5"/>
           </p:nvPr>
         </p:nvSpPr>
         <p:spPr/>
@@ -3548,7 +3550,7 @@
 </file>
 
 <file path=ppt/notesSlides/notesSlide49.xml><?xml version="1.0" encoding="utf-8"?>
-<p:notes xmlns:a="http://schemas.openxmlformats.org/drawingml/2006/main" xmlns:p="http://schemas.openxmlformats.org/presentationml/2006/main" xmlns:r="http://schemas.openxmlformats.org/officeDocument/2006/relationships">
+<p:notes xmlns:a="http://schemas.openxmlformats.org/drawingml/2006/main" xmlns:r="http://schemas.openxmlformats.org/officeDocument/2006/relationships" xmlns:p="http://schemas.openxmlformats.org/presentationml/2006/main">
   <p:cSld>
     <p:spTree>
       <p:nvGrpSpPr>
@@ -3568,7 +3570,7 @@
         <p:nvSpPr>
           <p:cNvPr id="2" name="Slide Image Placeholder 1"/>
           <p:cNvSpPr>
-            <a:spLocks noGrp="1"/>
+            <a:spLocks noGrp="1" noRot="1" noChangeAspect="1"/>
           </p:cNvSpPr>
           <p:nvPr>
             <p:ph type="sldImg" idx="2"/>
@@ -3583,7 +3585,7 @@
             <a:spLocks noGrp="1"/>
           </p:cNvSpPr>
           <p:nvPr>
-            <p:ph type="body" idx="3" sz="quarter"/>
+            <p:ph type="body" sz="quarter" idx="3"/>
           </p:nvPr>
         </p:nvSpPr>
         <p:spPr/>
@@ -3604,7 +3606,7 @@
             <a:spLocks noGrp="1"/>
           </p:cNvSpPr>
           <p:nvPr>
-            <p:ph type="sldNum" idx="5" sz="quarter"/>
+            <p:ph type="sldNum" sz="quarter" idx="5"/>
           </p:nvPr>
         </p:nvSpPr>
         <p:spPr/>
@@ -3618,7 +3620,7 @@
 </file>
 
 <file path=ppt/notesSlides/notesSlide5.xml><?xml version="1.0" encoding="utf-8"?>
-<p:notes xmlns:a="http://schemas.openxmlformats.org/drawingml/2006/main" xmlns:p="http://schemas.openxmlformats.org/presentationml/2006/main" xmlns:r="http://schemas.openxmlformats.org/officeDocument/2006/relationships">
+<p:notes xmlns:a="http://schemas.openxmlformats.org/drawingml/2006/main" xmlns:r="http://schemas.openxmlformats.org/officeDocument/2006/relationships" xmlns:p="http://schemas.openxmlformats.org/presentationml/2006/main">
   <p:cSld>
     <p:spTree>
       <p:nvGrpSpPr>
@@ -3638,7 +3640,7 @@
         <p:nvSpPr>
           <p:cNvPr id="2" name="Slide Image Placeholder 1"/>
           <p:cNvSpPr>
-            <a:spLocks noGrp="1"/>
+            <a:spLocks noGrp="1" noRot="1" noChangeAspect="1"/>
           </p:cNvSpPr>
           <p:nvPr>
             <p:ph type="sldImg" idx="2"/>
@@ -3653,7 +3655,7 @@
             <a:spLocks noGrp="1"/>
           </p:cNvSpPr>
           <p:nvPr>
-            <p:ph type="body" idx="3" sz="quarter"/>
+            <p:ph type="body" sz="quarter" idx="3"/>
           </p:nvPr>
         </p:nvSpPr>
         <p:spPr/>
@@ -3674,7 +3676,7 @@
             <a:spLocks noGrp="1"/>
           </p:cNvSpPr>
           <p:nvPr>
-            <p:ph type="sldNum" idx="5" sz="quarter"/>
+            <p:ph type="sldNum" sz="quarter" idx="5"/>
           </p:nvPr>
         </p:nvSpPr>
         <p:spPr/>
@@ -3688,7 +3690,7 @@
 </file>
 
 <file path=ppt/notesSlides/notesSlide50.xml><?xml version="1.0" encoding="utf-8"?>
-<p:notes xmlns:a="http://schemas.openxmlformats.org/drawingml/2006/main" xmlns:p="http://schemas.openxmlformats.org/presentationml/2006/main" xmlns:r="http://schemas.openxmlformats.org/officeDocument/2006/relationships">
+<p:notes xmlns:a="http://schemas.openxmlformats.org/drawingml/2006/main" xmlns:r="http://schemas.openxmlformats.org/officeDocument/2006/relationships" xmlns:p="http://schemas.openxmlformats.org/presentationml/2006/main">
   <p:cSld>
     <p:spTree>
       <p:nvGrpSpPr>
@@ -3708,7 +3710,7 @@
         <p:nvSpPr>
           <p:cNvPr id="2" name="Slide Image Placeholder 1"/>
           <p:cNvSpPr>
-            <a:spLocks noGrp="1"/>
+            <a:spLocks noGrp="1" noRot="1" noChangeAspect="1"/>
           </p:cNvSpPr>
           <p:nvPr>
             <p:ph type="sldImg" idx="2"/>
@@ -3723,7 +3725,7 @@
             <a:spLocks noGrp="1"/>
           </p:cNvSpPr>
           <p:nvPr>
-            <p:ph type="body" idx="3" sz="quarter"/>
+            <p:ph type="body" sz="quarter" idx="3"/>
           </p:nvPr>
         </p:nvSpPr>
         <p:spPr/>
@@ -3735,7 +3737,9 @@
               <a:t>[ADD IMAGE: the E.T. bicycle-across-the-moon frame.]</a:t>
             </a:r>
           </a:p>
-          <a:p/>
+          <a:p>
+            <a:endParaRPr/>
+          </a:p>
           <a:p>
             <a:r>
               <a:t>A motif is a visual element you repeat until it carries meaning. E.T. is the clean example. The bicycle is established as the ordinary world: kids, suburbs, the everyday. So when the bicycle lifts off the ground and crosses the moon, the image is doing far more than showing flight. It is the ordinary transformed, and you understand that instantly because the film taught you the vocabulary first. You can do this in a two-minute sequence. Establish something, then transform it. It costs you nothing except planning, and it is the difference between a sequence and a story.</a:t>
@@ -3750,7 +3754,7 @@
             <a:spLocks noGrp="1"/>
           </p:cNvSpPr>
           <p:nvPr>
-            <p:ph type="sldNum" idx="5" sz="quarter"/>
+            <p:ph type="sldNum" sz="quarter" idx="5"/>
           </p:nvPr>
         </p:nvSpPr>
         <p:spPr/>
@@ -3764,7 +3768,7 @@
 </file>
 
 <file path=ppt/notesSlides/notesSlide51.xml><?xml version="1.0" encoding="utf-8"?>
-<p:notes xmlns:a="http://schemas.openxmlformats.org/drawingml/2006/main" xmlns:p="http://schemas.openxmlformats.org/presentationml/2006/main" xmlns:r="http://schemas.openxmlformats.org/officeDocument/2006/relationships">
+<p:notes xmlns:a="http://schemas.openxmlformats.org/drawingml/2006/main" xmlns:r="http://schemas.openxmlformats.org/officeDocument/2006/relationships" xmlns:p="http://schemas.openxmlformats.org/presentationml/2006/main">
   <p:cSld>
     <p:spTree>
       <p:nvGrpSpPr>
@@ -3784,7 +3788,7 @@
         <p:nvSpPr>
           <p:cNvPr id="2" name="Slide Image Placeholder 1"/>
           <p:cNvSpPr>
-            <a:spLocks noGrp="1"/>
+            <a:spLocks noGrp="1" noRot="1" noChangeAspect="1"/>
           </p:cNvSpPr>
           <p:nvPr>
             <p:ph type="sldImg" idx="2"/>
@@ -3799,7 +3803,7 @@
             <a:spLocks noGrp="1"/>
           </p:cNvSpPr>
           <p:nvPr>
-            <p:ph type="body" idx="3" sz="quarter"/>
+            <p:ph type="body" sz="quarter" idx="3"/>
           </p:nvPr>
         </p:nvSpPr>
         <p:spPr/>
@@ -3820,7 +3824,7 @@
             <a:spLocks noGrp="1"/>
           </p:cNvSpPr>
           <p:nvPr>
-            <p:ph type="sldNum" idx="5" sz="quarter"/>
+            <p:ph type="sldNum" sz="quarter" idx="5"/>
           </p:nvPr>
         </p:nvSpPr>
         <p:spPr/>
@@ -3834,7 +3838,7 @@
 </file>
 
 <file path=ppt/notesSlides/notesSlide52.xml><?xml version="1.0" encoding="utf-8"?>
-<p:notes xmlns:a="http://schemas.openxmlformats.org/drawingml/2006/main" xmlns:p="http://schemas.openxmlformats.org/presentationml/2006/main" xmlns:r="http://schemas.openxmlformats.org/officeDocument/2006/relationships">
+<p:notes xmlns:a="http://schemas.openxmlformats.org/drawingml/2006/main" xmlns:r="http://schemas.openxmlformats.org/officeDocument/2006/relationships" xmlns:p="http://schemas.openxmlformats.org/presentationml/2006/main">
   <p:cSld>
     <p:spTree>
       <p:nvGrpSpPr>
@@ -3854,7 +3858,7 @@
         <p:nvSpPr>
           <p:cNvPr id="2" name="Slide Image Placeholder 1"/>
           <p:cNvSpPr>
-            <a:spLocks noGrp="1"/>
+            <a:spLocks noGrp="1" noRot="1" noChangeAspect="1"/>
           </p:cNvSpPr>
           <p:nvPr>
             <p:ph type="sldImg" idx="2"/>
@@ -3869,7 +3873,7 @@
             <a:spLocks noGrp="1"/>
           </p:cNvSpPr>
           <p:nvPr>
-            <p:ph type="body" idx="3" sz="quarter"/>
+            <p:ph type="body" sz="quarter" idx="3"/>
           </p:nvPr>
         </p:nvSpPr>
         <p:spPr/>
@@ -3890,7 +3894,7 @@
             <a:spLocks noGrp="1"/>
           </p:cNvSpPr>
           <p:nvPr>
-            <p:ph type="sldNum" idx="5" sz="quarter"/>
+            <p:ph type="sldNum" sz="quarter" idx="5"/>
           </p:nvPr>
         </p:nvSpPr>
         <p:spPr/>
@@ -3904,7 +3908,7 @@
 </file>
 
 <file path=ppt/notesSlides/notesSlide6.xml><?xml version="1.0" encoding="utf-8"?>
-<p:notes xmlns:a="http://schemas.openxmlformats.org/drawingml/2006/main" xmlns:p="http://schemas.openxmlformats.org/presentationml/2006/main" xmlns:r="http://schemas.openxmlformats.org/officeDocument/2006/relationships">
+<p:notes xmlns:a="http://schemas.openxmlformats.org/drawingml/2006/main" xmlns:r="http://schemas.openxmlformats.org/officeDocument/2006/relationships" xmlns:p="http://schemas.openxmlformats.org/presentationml/2006/main">
   <p:cSld>
     <p:spTree>
       <p:nvGrpSpPr>
@@ -3924,7 +3928,7 @@
         <p:nvSpPr>
           <p:cNvPr id="2" name="Slide Image Placeholder 1"/>
           <p:cNvSpPr>
-            <a:spLocks noGrp="1"/>
+            <a:spLocks noGrp="1" noRot="1" noChangeAspect="1"/>
           </p:cNvSpPr>
           <p:nvPr>
             <p:ph type="sldImg" idx="2"/>
@@ -3939,7 +3943,7 @@
             <a:spLocks noGrp="1"/>
           </p:cNvSpPr>
           <p:nvPr>
-            <p:ph type="body" idx="3" sz="quarter"/>
+            <p:ph type="body" sz="quarter" idx="3"/>
           </p:nvPr>
         </p:nvSpPr>
         <p:spPr/>
@@ -3960,7 +3964,7 @@
             <a:spLocks noGrp="1"/>
           </p:cNvSpPr>
           <p:nvPr>
-            <p:ph type="sldNum" idx="5" sz="quarter"/>
+            <p:ph type="sldNum" sz="quarter" idx="5"/>
           </p:nvPr>
         </p:nvSpPr>
         <p:spPr/>
@@ -3974,7 +3978,7 @@
 </file>
 
 <file path=ppt/notesSlides/notesSlide7.xml><?xml version="1.0" encoding="utf-8"?>
-<p:notes xmlns:a="http://schemas.openxmlformats.org/drawingml/2006/main" xmlns:p="http://schemas.openxmlformats.org/presentationml/2006/main" xmlns:r="http://schemas.openxmlformats.org/officeDocument/2006/relationships">
+<p:notes xmlns:a="http://schemas.openxmlformats.org/drawingml/2006/main" xmlns:r="http://schemas.openxmlformats.org/officeDocument/2006/relationships" xmlns:p="http://schemas.openxmlformats.org/presentationml/2006/main">
   <p:cSld>
     <p:spTree>
       <p:nvGrpSpPr>
@@ -3994,7 +3998,7 @@
         <p:nvSpPr>
           <p:cNvPr id="2" name="Slide Image Placeholder 1"/>
           <p:cNvSpPr>
-            <a:spLocks noGrp="1"/>
+            <a:spLocks noGrp="1" noRot="1" noChangeAspect="1"/>
           </p:cNvSpPr>
           <p:nvPr>
             <p:ph type="sldImg" idx="2"/>
@@ -4009,7 +4013,7 @@
             <a:spLocks noGrp="1"/>
           </p:cNvSpPr>
           <p:nvPr>
-            <p:ph type="body" idx="3" sz="quarter"/>
+            <p:ph type="body" sz="quarter" idx="3"/>
           </p:nvPr>
         </p:nvSpPr>
         <p:spPr/>
@@ -4030,7 +4034,7 @@
             <a:spLocks noGrp="1"/>
           </p:cNvSpPr>
           <p:nvPr>
-            <p:ph type="sldNum" idx="5" sz="quarter"/>
+            <p:ph type="sldNum" sz="quarter" idx="5"/>
           </p:nvPr>
         </p:nvSpPr>
         <p:spPr/>
@@ -4044,7 +4048,7 @@
 </file>
 
 <file path=ppt/notesSlides/notesSlide8.xml><?xml version="1.0" encoding="utf-8"?>
-<p:notes xmlns:a="http://schemas.openxmlformats.org/drawingml/2006/main" xmlns:p="http://schemas.openxmlformats.org/presentationml/2006/main" xmlns:r="http://schemas.openxmlformats.org/officeDocument/2006/relationships">
+<p:notes xmlns:a="http://schemas.openxmlformats.org/drawingml/2006/main" xmlns:r="http://schemas.openxmlformats.org/officeDocument/2006/relationships" xmlns:p="http://schemas.openxmlformats.org/presentationml/2006/main">
   <p:cSld>
     <p:spTree>
       <p:nvGrpSpPr>
@@ -4064,7 +4068,7 @@
         <p:nvSpPr>
           <p:cNvPr id="2" name="Slide Image Placeholder 1"/>
           <p:cNvSpPr>
-            <a:spLocks noGrp="1"/>
+            <a:spLocks noGrp="1" noRot="1" noChangeAspect="1"/>
           </p:cNvSpPr>
           <p:nvPr>
             <p:ph type="sldImg" idx="2"/>
@@ -4079,7 +4083,7 @@
             <a:spLocks noGrp="1"/>
           </p:cNvSpPr>
           <p:nvPr>
-            <p:ph type="body" idx="3" sz="quarter"/>
+            <p:ph type="body" sz="quarter" idx="3"/>
           </p:nvPr>
         </p:nvSpPr>
         <p:spPr/>
@@ -4100,7 +4104,7 @@
             <a:spLocks noGrp="1"/>
           </p:cNvSpPr>
           <p:nvPr>
-            <p:ph type="sldNum" idx="5" sz="quarter"/>
+            <p:ph type="sldNum" sz="quarter" idx="5"/>
           </p:nvPr>
         </p:nvSpPr>
         <p:spPr/>
@@ -4114,7 +4118,7 @@
 </file>
 
 <file path=ppt/notesSlides/notesSlide9.xml><?xml version="1.0" encoding="utf-8"?>
-<p:notes xmlns:a="http://schemas.openxmlformats.org/drawingml/2006/main" xmlns:p="http://schemas.openxmlformats.org/presentationml/2006/main" xmlns:r="http://schemas.openxmlformats.org/officeDocument/2006/relationships">
+<p:notes xmlns:a="http://schemas.openxmlformats.org/drawingml/2006/main" xmlns:r="http://schemas.openxmlformats.org/officeDocument/2006/relationships" xmlns:p="http://schemas.openxmlformats.org/presentationml/2006/main">
   <p:cSld>
     <p:spTree>
       <p:nvGrpSpPr>
@@ -4134,7 +4138,7 @@
         <p:nvSpPr>
           <p:cNvPr id="2" name="Slide Image Placeholder 1"/>
           <p:cNvSpPr>
-            <a:spLocks noGrp="1"/>
+            <a:spLocks noGrp="1" noRot="1" noChangeAspect="1"/>
           </p:cNvSpPr>
           <p:nvPr>
             <p:ph type="sldImg" idx="2"/>
@@ -4149,7 +4153,7 @@
             <a:spLocks noGrp="1"/>
           </p:cNvSpPr>
           <p:nvPr>
-            <p:ph type="body" idx="3" sz="quarter"/>
+            <p:ph type="body" sz="quarter" idx="3"/>
           </p:nvPr>
         </p:nvSpPr>
         <p:spPr/>
@@ -4170,7 +4174,7 @@
             <a:spLocks noGrp="1"/>
           </p:cNvSpPr>
           <p:nvPr>
-            <p:ph type="sldNum" idx="5" sz="quarter"/>
+            <p:ph type="sldNum" sz="quarter" idx="5"/>
           </p:nvPr>
         </p:nvSpPr>
         <p:spPr/>
@@ -4407,7 +4411,7 @@
           <a:p>
             <a:fld id="{592E33A7-84C6-449C-AE67-6E7B8B6855DE}" type="datetimeFigureOut">
               <a:rPr lang="en-US" smtClean="0"/>
-              <a:t>11/5/2018</a:t>
+              <a:t>8/23/2026</a:t>
             </a:fld>
             <a:endParaRPr lang="en-US"/>
           </a:p>
@@ -4738,7 +4742,7 @@
           <a:p>
             <a:fld id="{592E33A7-84C6-449C-AE67-6E7B8B6855DE}" type="datetimeFigureOut">
               <a:rPr lang="en-US" smtClean="0"/>
-              <a:t>11/5/2018</a:t>
+              <a:t>8/23/2026</a:t>
             </a:fld>
             <a:endParaRPr lang="en-US"/>
           </a:p>
@@ -4986,7 +4990,7 @@
           <a:p>
             <a:fld id="{592E33A7-84C6-449C-AE67-6E7B8B6855DE}" type="datetimeFigureOut">
               <a:rPr lang="en-US" smtClean="0"/>
-              <a:t>11/5/2018</a:t>
+              <a:t>8/23/2026</a:t>
             </a:fld>
             <a:endParaRPr lang="en-US"/>
           </a:p>
@@ -5332,7 +5336,7 @@
           <a:p>
             <a:fld id="{592E33A7-84C6-449C-AE67-6E7B8B6855DE}" type="datetimeFigureOut">
               <a:rPr lang="en-US" smtClean="0"/>
-              <a:t>11/5/2018</a:t>
+              <a:t>8/23/2026</a:t>
             </a:fld>
             <a:endParaRPr lang="en-US"/>
           </a:p>
@@ -5686,7 +5690,7 @@
           <a:p>
             <a:fld id="{592E33A7-84C6-449C-AE67-6E7B8B6855DE}" type="datetimeFigureOut">
               <a:rPr lang="en-US" smtClean="0"/>
-              <a:t>11/5/2018</a:t>
+              <a:t>8/23/2026</a:t>
             </a:fld>
             <a:endParaRPr lang="en-US"/>
           </a:p>
@@ -6060,7 +6064,7 @@
           <a:p>
             <a:fld id="{592E33A7-84C6-449C-AE67-6E7B8B6855DE}" type="datetimeFigureOut">
               <a:rPr lang="en-US" smtClean="0"/>
-              <a:t>11/5/2018</a:t>
+              <a:t>8/23/2026</a:t>
             </a:fld>
             <a:endParaRPr lang="en-US"/>
           </a:p>
@@ -6537,7 +6541,7 @@
           <a:p>
             <a:fld id="{592E33A7-84C6-449C-AE67-6E7B8B6855DE}" type="datetimeFigureOut">
               <a:rPr lang="en-US" smtClean="0"/>
-              <a:t>11/5/2018</a:t>
+              <a:t>8/23/2026</a:t>
             </a:fld>
             <a:endParaRPr lang="en-US"/>
           </a:p>
@@ -6749,7 +6753,7 @@
           <a:p>
             <a:fld id="{592E33A7-84C6-449C-AE67-6E7B8B6855DE}" type="datetimeFigureOut">
               <a:rPr lang="en-US" smtClean="0"/>
-              <a:t>11/5/2018</a:t>
+              <a:t>8/23/2026</a:t>
             </a:fld>
             <a:endParaRPr lang="en-US"/>
           </a:p>
@@ -6967,7 +6971,7 @@
           <a:p>
             <a:fld id="{592E33A7-84C6-449C-AE67-6E7B8B6855DE}" type="datetimeFigureOut">
               <a:rPr lang="en-US" smtClean="0"/>
-              <a:t>11/5/2018</a:t>
+              <a:t>8/23/2026</a:t>
             </a:fld>
             <a:endParaRPr lang="en-US"/>
           </a:p>
@@ -7213,7 +7217,7 @@
           <a:p>
             <a:fld id="{592E33A7-84C6-449C-AE67-6E7B8B6855DE}" type="datetimeFigureOut">
               <a:rPr lang="en-US" smtClean="0"/>
-              <a:t>11/5/2018</a:t>
+              <a:t>8/23/2026</a:t>
             </a:fld>
             <a:endParaRPr lang="en-US"/>
           </a:p>
@@ -7461,7 +7465,7 @@
           <a:p>
             <a:fld id="{592E33A7-84C6-449C-AE67-6E7B8B6855DE}" type="datetimeFigureOut">
               <a:rPr lang="en-US" smtClean="0"/>
-              <a:t>11/5/2018</a:t>
+              <a:t>8/23/2026</a:t>
             </a:fld>
             <a:endParaRPr lang="en-US"/>
           </a:p>
@@ -7773,7 +7777,7 @@
           <a:p>
             <a:fld id="{592E33A7-84C6-449C-AE67-6E7B8B6855DE}" type="datetimeFigureOut">
               <a:rPr lang="en-US" smtClean="0"/>
-              <a:t>11/5/2018</a:t>
+              <a:t>8/23/2026</a:t>
             </a:fld>
             <a:endParaRPr lang="en-US"/>
           </a:p>
@@ -8155,7 +8159,7 @@
           <a:p>
             <a:fld id="{592E33A7-84C6-449C-AE67-6E7B8B6855DE}" type="datetimeFigureOut">
               <a:rPr lang="en-US" smtClean="0"/>
-              <a:t>11/5/2018</a:t>
+              <a:t>8/23/2026</a:t>
             </a:fld>
             <a:endParaRPr lang="en-US"/>
           </a:p>
@@ -8311,7 +8315,7 @@
           <a:p>
             <a:fld id="{592E33A7-84C6-449C-AE67-6E7B8B6855DE}" type="datetimeFigureOut">
               <a:rPr lang="en-US" smtClean="0"/>
-              <a:t>11/5/2018</a:t>
+              <a:t>8/23/2026</a:t>
             </a:fld>
             <a:endParaRPr lang="en-US"/>
           </a:p>
@@ -8444,7 +8448,7 @@
           <a:p>
             <a:fld id="{592E33A7-84C6-449C-AE67-6E7B8B6855DE}" type="datetimeFigureOut">
               <a:rPr lang="en-US" smtClean="0"/>
-              <a:t>11/5/2018</a:t>
+              <a:t>8/23/2026</a:t>
             </a:fld>
             <a:endParaRPr lang="en-US"/>
           </a:p>
@@ -8699,7 +8703,7 @@
           <a:p>
             <a:fld id="{592E33A7-84C6-449C-AE67-6E7B8B6855DE}" type="datetimeFigureOut">
               <a:rPr lang="en-US" smtClean="0"/>
-              <a:t>11/5/2018</a:t>
+              <a:t>8/23/2026</a:t>
             </a:fld>
             <a:endParaRPr lang="en-US"/>
           </a:p>
@@ -9020,7 +9024,7 @@
           <a:p>
             <a:fld id="{592E33A7-84C6-449C-AE67-6E7B8B6855DE}" type="datetimeFigureOut">
               <a:rPr lang="en-US" smtClean="0"/>
-              <a:t>11/5/2018</a:t>
+              <a:t>8/23/2026</a:t>
             </a:fld>
             <a:endParaRPr lang="en-US"/>
           </a:p>
@@ -9264,7 +9268,7 @@
           <a:p>
             <a:fld id="{592E33A7-84C6-449C-AE67-6E7B8B6855DE}" type="datetimeFigureOut">
               <a:rPr lang="en-US" smtClean="0"/>
-              <a:t>11/5/2018</a:t>
+              <a:t>8/23/2026</a:t>
             </a:fld>
             <a:endParaRPr lang="en-US"/>
           </a:p>
@@ -9828,7 +9832,7 @@
           <a:lstStyle/>
           <a:p>
             <a:r>
-              <a:rPr lang="en-US" sz="4400" dirty="0" b="0"/>
+              <a:rPr lang="en-US" sz="4400" b="0" dirty="0"/>
               <a:t>Composition</a:t>
             </a:r>
           </a:p>
@@ -9905,7 +9909,7 @@
           <a:lstStyle/>
           <a:p>
             <a:r>
-              <a:rPr lang="en-US" sz="4400" dirty="0" b="0"/>
+              <a:rPr lang="en-US" sz="4400" b="0" dirty="0"/>
               <a:t>Line</a:t>
             </a:r>
           </a:p>
@@ -9940,25 +9944,25 @@
           <a:lstStyle/>
           <a:p>
             <a:r>
-              <a:rPr lang="en-US" dirty="0" b="0"/>
+              <a:rPr lang="en-US" b="0" dirty="0"/>
               <a:t>The connection between two points</a:t>
             </a:r>
           </a:p>
           <a:p>
             <a:r>
-              <a:rPr lang="en-US" dirty="0" b="0"/>
+              <a:rPr lang="en-US" b="0" dirty="0"/>
               <a:t>Lines exist even when nothing is drawn as a line</a:t>
             </a:r>
           </a:p>
           <a:p>
             <a:r>
-              <a:rPr lang="en-US" dirty="0" b="0"/>
+              <a:rPr lang="en-US" b="0" dirty="0"/>
               <a:t>An arm, a road, a shadow edge, a row of windows, a gaze</a:t>
             </a:r>
           </a:p>
           <a:p>
             <a:r>
-              <a:rPr lang="en-US" dirty="0" b="0"/>
+              <a:rPr lang="en-US" b="0" dirty="0"/>
               <a:t>Every line has a direction, and every direction has a feeling</a:t>
             </a:r>
           </a:p>
@@ -10010,46 +10014,8 @@
           <a:lstStyle/>
           <a:p>
             <a:r>
-              <a:rPr lang="en-US" sz="4400" dirty="0" b="0"/>
+              <a:rPr lang="en-US" sz="4400" b="0" dirty="0"/>
               <a:t>Horizontal Lines</a:t>
-            </a:r>
-          </a:p>
-        </p:txBody>
-      </p:sp>
-      <p:sp>
-        <p:nvSpPr>
-          <p:cNvPr id="3" name="Content Placeholder 2">
-            <a:extLst>
-              <a:ext uri="{FF2B5EF4-FFF2-40B4-BE49-F238E27FC236}">
-                <a16:creationId xmlns:a16="http://schemas.microsoft.com/office/drawing/2014/main" id="{706AF733-5CB5-442A-A615-D199899672DB}"/>
-              </a:ext>
-            </a:extLst>
-          </p:cNvPr>
-          <p:cNvSpPr>
-            <a:spLocks noGrp="1"/>
-          </p:cNvSpPr>
-          <p:nvPr>
-            <p:ph idx="1"/>
-          </p:nvPr>
-        </p:nvSpPr>
-        <p:spPr>
-          <a:xfrm>
-            <a:off x="1298448" y="5989320"/>
-            <a:ext cx="9601200" cy="548640"/>
-          </a:xfrm>
-        </p:spPr>
-        <p:txBody>
-          <a:bodyPr>
-            <a:normAutofit/>
-          </a:bodyPr>
-          <a:lstStyle/>
-          <a:p>
-            <a:pPr>
-              <a:defRPr sz="1600" i="1"/>
-            </a:pPr>
-            <a:r>
-              <a:rPr lang="en-US" dirty="0" b="0"/>
-              <a:t/>
             </a:r>
           </a:p>
         </p:txBody>
@@ -10097,6 +10063,7 @@
           <a:lstStyle/>
           <a:p>
             <a:pPr algn="ctr"/>
+            <a:endParaRPr/>
           </a:p>
         </p:txBody>
       </p:sp>
@@ -10222,7 +10189,7 @@
           <a:noFill/>
         </p:spPr>
         <p:txBody>
-          <a:bodyPr wrap="square" anchor="ctr" lIns="0" rIns="0" tIns="0" bIns="0">
+          <a:bodyPr wrap="square" lIns="0" tIns="0" rIns="0" bIns="0" anchor="ctr">
             <a:spAutoFit/>
           </a:bodyPr>
           <a:lstStyle/>
@@ -10286,7 +10253,7 @@
           <a:lstStyle/>
           <a:p>
             <a:r>
-              <a:rPr lang="en-US" sz="4400" dirty="0" b="0"/>
+              <a:rPr lang="en-US" sz="4400" b="0" dirty="0"/>
               <a:t>Vertical Lines</a:t>
             </a:r>
           </a:p>
@@ -10323,10 +10290,7 @@
             <a:pPr>
               <a:defRPr sz="1600" i="1"/>
             </a:pPr>
-            <a:r>
-              <a:rPr lang="en-US" dirty="0" b="0"/>
-              <a:t/>
-            </a:r>
+            <a:endParaRPr/>
           </a:p>
         </p:txBody>
       </p:sp>
@@ -10373,6 +10337,7 @@
           <a:lstStyle/>
           <a:p>
             <a:pPr algn="ctr"/>
+            <a:endParaRPr/>
           </a:p>
         </p:txBody>
       </p:sp>
@@ -10638,7 +10603,7 @@
           <a:noFill/>
         </p:spPr>
         <p:txBody>
-          <a:bodyPr wrap="square" anchor="ctr" lIns="0" rIns="0" tIns="0" bIns="0">
+          <a:bodyPr wrap="square" lIns="0" tIns="0" rIns="0" bIns="0" anchor="ctr">
             <a:spAutoFit/>
           </a:bodyPr>
           <a:lstStyle/>
@@ -10702,46 +10667,8 @@
           <a:lstStyle/>
           <a:p>
             <a:r>
-              <a:rPr lang="en-US" sz="4400" dirty="0" b="0"/>
+              <a:rPr lang="en-US" sz="4400" b="0" dirty="0"/>
               <a:t>Diagonal Lines</a:t>
-            </a:r>
-          </a:p>
-        </p:txBody>
-      </p:sp>
-      <p:sp>
-        <p:nvSpPr>
-          <p:cNvPr id="3" name="Content Placeholder 2">
-            <a:extLst>
-              <a:ext uri="{FF2B5EF4-FFF2-40B4-BE49-F238E27FC236}">
-                <a16:creationId xmlns:a16="http://schemas.microsoft.com/office/drawing/2014/main" id="{706AF733-5CB5-442A-A615-D199899672DB}"/>
-              </a:ext>
-            </a:extLst>
-          </p:cNvPr>
-          <p:cNvSpPr>
-            <a:spLocks noGrp="1"/>
-          </p:cNvSpPr>
-          <p:nvPr>
-            <p:ph idx="1"/>
-          </p:nvPr>
-        </p:nvSpPr>
-        <p:spPr>
-          <a:xfrm>
-            <a:off x="1298448" y="5989320"/>
-            <a:ext cx="9601200" cy="548640"/>
-          </a:xfrm>
-        </p:spPr>
-        <p:txBody>
-          <a:bodyPr>
-            <a:normAutofit/>
-          </a:bodyPr>
-          <a:lstStyle/>
-          <a:p>
-            <a:pPr>
-              <a:defRPr sz="1600" i="1"/>
-            </a:pPr>
-            <a:r>
-              <a:rPr lang="en-US" dirty="0" b="0"/>
-              <a:t/>
             </a:r>
           </a:p>
         </p:txBody>
@@ -10789,6 +10716,7 @@
           <a:lstStyle/>
           <a:p>
             <a:pPr algn="ctr"/>
+            <a:endParaRPr/>
           </a:p>
         </p:txBody>
       </p:sp>
@@ -10984,7 +10912,7 @@
           <a:noFill/>
         </p:spPr>
         <p:txBody>
-          <a:bodyPr wrap="square" anchor="ctr" lIns="0" rIns="0" tIns="0" bIns="0">
+          <a:bodyPr wrap="square" lIns="0" tIns="0" rIns="0" bIns="0" anchor="ctr">
             <a:spAutoFit/>
           </a:bodyPr>
           <a:lstStyle/>
@@ -11048,7 +10976,7 @@
           <a:lstStyle/>
           <a:p>
             <a:r>
-              <a:rPr lang="en-US" sz="4400" dirty="0" b="0"/>
+              <a:rPr lang="en-US" sz="4400" b="0" dirty="0"/>
               <a:t>Curved Lines</a:t>
             </a:r>
           </a:p>
@@ -11085,10 +11013,7 @@
             <a:pPr>
               <a:defRPr sz="1600" i="1"/>
             </a:pPr>
-            <a:r>
-              <a:rPr lang="en-US" dirty="0" b="0"/>
-              <a:t/>
-            </a:r>
+            <a:endParaRPr/>
           </a:p>
         </p:txBody>
       </p:sp>
@@ -11135,6 +11060,7 @@
           <a:lstStyle/>
           <a:p>
             <a:pPr algn="ctr"/>
+            <a:endParaRPr/>
           </a:p>
         </p:txBody>
       </p:sp>
@@ -13675,7 +13601,7 @@
           <a:noFill/>
         </p:spPr>
         <p:txBody>
-          <a:bodyPr wrap="square" anchor="ctr" lIns="0" rIns="0" tIns="0" bIns="0">
+          <a:bodyPr wrap="square" lIns="0" tIns="0" rIns="0" bIns="0" anchor="ctr">
             <a:spAutoFit/>
           </a:bodyPr>
           <a:lstStyle/>
@@ -13739,7 +13665,7 @@
           <a:lstStyle/>
           <a:p>
             <a:r>
-              <a:rPr lang="en-US" sz="4400" dirty="0" b="0"/>
+              <a:rPr lang="en-US" sz="4400" b="0" dirty="0"/>
               <a:t>Jagged Lines</a:t>
             </a:r>
           </a:p>
@@ -13776,10 +13702,7 @@
             <a:pPr>
               <a:defRPr sz="1600" i="1"/>
             </a:pPr>
-            <a:r>
-              <a:rPr lang="en-US" dirty="0" b="0"/>
-              <a:t/>
-            </a:r>
+            <a:endParaRPr/>
           </a:p>
         </p:txBody>
       </p:sp>
@@ -13826,6 +13749,7 @@
           <a:lstStyle/>
           <a:p>
             <a:pPr algn="ctr"/>
+            <a:endParaRPr/>
           </a:p>
         </p:txBody>
       </p:sp>
@@ -15421,7 +15345,7 @@
           <a:noFill/>
         </p:spPr>
         <p:txBody>
-          <a:bodyPr wrap="square" anchor="ctr" lIns="0" rIns="0" tIns="0" bIns="0">
+          <a:bodyPr wrap="square" lIns="0" tIns="0" rIns="0" bIns="0" anchor="ctr">
             <a:spAutoFit/>
           </a:bodyPr>
           <a:lstStyle/>
@@ -15485,7 +15409,7 @@
           <a:lstStyle/>
           <a:p>
             <a:r>
-              <a:rPr lang="en-US" sz="4400" dirty="0" b="0"/>
+              <a:rPr lang="en-US" sz="4400" b="0" dirty="0"/>
               <a:t>Shape</a:t>
             </a:r>
           </a:p>
@@ -15520,25 +15444,25 @@
           <a:lstStyle/>
           <a:p>
             <a:r>
-              <a:rPr lang="en-US" dirty="0" b="0"/>
+              <a:rPr lang="en-US" b="0" dirty="0"/>
               <a:t>An area defined by its outline: height and width</a:t>
             </a:r>
           </a:p>
           <a:p>
             <a:r>
-              <a:rPr lang="en-US" dirty="0" b="0"/>
+              <a:rPr lang="en-US" b="0" dirty="0"/>
               <a:t>Geometric: circle, square, triangle</a:t>
             </a:r>
           </a:p>
           <a:p>
             <a:r>
-              <a:rPr lang="en-US" dirty="0" b="0"/>
+              <a:rPr lang="en-US" b="0" dirty="0"/>
               <a:t>Organic: everything nature makes</a:t>
             </a:r>
           </a:p>
           <a:p>
             <a:r>
-              <a:rPr lang="en-US" dirty="0" b="0"/>
+              <a:rPr lang="en-US" b="0" dirty="0"/>
               <a:t>You compose with shapes long before you compose with details</a:t>
             </a:r>
           </a:p>
@@ -15590,7 +15514,7 @@
           <a:lstStyle/>
           <a:p>
             <a:r>
-              <a:rPr lang="en-US" sz="4400" dirty="0" b="0"/>
+              <a:rPr lang="en-US" sz="4400" b="0" dirty="0"/>
               <a:t>Triangular Composition</a:t>
             </a:r>
           </a:p>
@@ -15627,10 +15551,7 @@
             <a:pPr>
               <a:defRPr sz="1600" i="1"/>
             </a:pPr>
-            <a:r>
-              <a:rPr lang="en-US" dirty="0" b="0"/>
-              <a:t/>
-            </a:r>
+            <a:endParaRPr/>
           </a:p>
         </p:txBody>
       </p:sp>
@@ -15677,6 +15598,7 @@
           <a:lstStyle/>
           <a:p>
             <a:pPr algn="ctr"/>
+            <a:endParaRPr/>
           </a:p>
         </p:txBody>
       </p:sp>
@@ -15829,6 +15751,7 @@
           <a:lstStyle/>
           <a:p>
             <a:pPr algn="ctr"/>
+            <a:endParaRPr/>
           </a:p>
         </p:txBody>
       </p:sp>
@@ -15873,6 +15796,7 @@
           <a:lstStyle/>
           <a:p>
             <a:pPr algn="ctr"/>
+            <a:endParaRPr/>
           </a:p>
         </p:txBody>
       </p:sp>
@@ -15917,6 +15841,7 @@
           <a:lstStyle/>
           <a:p>
             <a:pPr algn="ctr"/>
+            <a:endParaRPr/>
           </a:p>
         </p:txBody>
       </p:sp>
@@ -15937,7 +15862,7 @@
           <a:noFill/>
         </p:spPr>
         <p:txBody>
-          <a:bodyPr wrap="square" anchor="ctr" lIns="0" rIns="0" tIns="0" bIns="0">
+          <a:bodyPr wrap="square" lIns="0" tIns="0" rIns="0" bIns="0" anchor="ctr">
             <a:spAutoFit/>
           </a:bodyPr>
           <a:lstStyle/>
@@ -16001,7 +15926,7 @@
           <a:lstStyle/>
           <a:p>
             <a:r>
-              <a:rPr lang="en-US" sz="4400" dirty="0" b="0"/>
+              <a:rPr lang="en-US" sz="4400" b="0" dirty="0"/>
               <a:t>Circular and Arch Composition</a:t>
             </a:r>
           </a:p>
@@ -16038,10 +15963,7 @@
             <a:pPr>
               <a:defRPr sz="1600" i="1"/>
             </a:pPr>
-            <a:r>
-              <a:rPr lang="en-US" dirty="0" b="0"/>
-              <a:t/>
-            </a:r>
+            <a:endParaRPr/>
           </a:p>
         </p:txBody>
       </p:sp>
@@ -16088,6 +16010,7 @@
           <a:lstStyle/>
           <a:p>
             <a:pPr algn="ctr"/>
+            <a:endParaRPr/>
           </a:p>
         </p:txBody>
       </p:sp>
@@ -16133,6 +16056,7 @@
           <a:lstStyle/>
           <a:p>
             <a:pPr algn="ctr"/>
+            <a:endParaRPr/>
           </a:p>
         </p:txBody>
       </p:sp>
@@ -16177,6 +16101,7 @@
           <a:lstStyle/>
           <a:p>
             <a:pPr algn="ctr"/>
+            <a:endParaRPr/>
           </a:p>
         </p:txBody>
       </p:sp>
@@ -16221,6 +16146,7 @@
           <a:lstStyle/>
           <a:p>
             <a:pPr algn="ctr"/>
+            <a:endParaRPr/>
           </a:p>
         </p:txBody>
       </p:sp>
@@ -16265,6 +16191,7 @@
           <a:lstStyle/>
           <a:p>
             <a:pPr algn="ctr"/>
+            <a:endParaRPr/>
           </a:p>
         </p:txBody>
       </p:sp>
@@ -17079,6 +17006,7 @@
           <a:lstStyle/>
           <a:p>
             <a:pPr algn="ctr"/>
+            <a:endParaRPr/>
           </a:p>
         </p:txBody>
       </p:sp>
@@ -17125,6 +17053,7 @@
           <a:lstStyle/>
           <a:p>
             <a:pPr algn="ctr"/>
+            <a:endParaRPr/>
           </a:p>
         </p:txBody>
       </p:sp>
@@ -17145,7 +17074,7 @@
           <a:noFill/>
         </p:spPr>
         <p:txBody>
-          <a:bodyPr wrap="square" anchor="ctr" lIns="0" rIns="0" tIns="0" bIns="0">
+          <a:bodyPr wrap="square" lIns="0" tIns="0" rIns="0" bIns="0" anchor="ctr">
             <a:spAutoFit/>
           </a:bodyPr>
           <a:lstStyle/>
@@ -17209,7 +17138,7 @@
           <a:lstStyle/>
           <a:p>
             <a:r>
-              <a:rPr lang="en-US" sz="4400" dirty="0" b="0"/>
+              <a:rPr lang="en-US" sz="4400" b="0" dirty="0"/>
               <a:t>Shape Language</a:t>
             </a:r>
           </a:p>
@@ -17246,10 +17175,7 @@
             <a:pPr>
               <a:defRPr sz="1600" i="1"/>
             </a:pPr>
-            <a:r>
-              <a:rPr lang="en-US" dirty="0" b="0"/>
-              <a:t/>
-            </a:r>
+            <a:endParaRPr/>
           </a:p>
         </p:txBody>
       </p:sp>
@@ -17294,6 +17220,7 @@
           <a:lstStyle/>
           <a:p>
             <a:pPr algn="ctr"/>
+            <a:endParaRPr/>
           </a:p>
         </p:txBody>
       </p:sp>
@@ -17314,7 +17241,7 @@
           <a:noFill/>
         </p:spPr>
         <p:txBody>
-          <a:bodyPr wrap="square" anchor="ctr" lIns="0" rIns="0" tIns="0" bIns="0">
+          <a:bodyPr wrap="square" lIns="0" tIns="0" rIns="0" bIns="0" anchor="ctr">
             <a:spAutoFit/>
           </a:bodyPr>
           <a:lstStyle/>
@@ -17373,6 +17300,7 @@
           <a:lstStyle/>
           <a:p>
             <a:pPr algn="ctr"/>
+            <a:endParaRPr/>
           </a:p>
         </p:txBody>
       </p:sp>
@@ -17393,7 +17321,7 @@
           <a:noFill/>
         </p:spPr>
         <p:txBody>
-          <a:bodyPr wrap="square" anchor="ctr" lIns="0" rIns="0" tIns="0" bIns="0">
+          <a:bodyPr wrap="square" lIns="0" tIns="0" rIns="0" bIns="0" anchor="ctr">
             <a:spAutoFit/>
           </a:bodyPr>
           <a:lstStyle/>
@@ -17452,6 +17380,7 @@
           <a:lstStyle/>
           <a:p>
             <a:pPr algn="ctr"/>
+            <a:endParaRPr/>
           </a:p>
         </p:txBody>
       </p:sp>
@@ -17472,7 +17401,7 @@
           <a:noFill/>
         </p:spPr>
         <p:txBody>
-          <a:bodyPr wrap="square" anchor="ctr" lIns="0" rIns="0" tIns="0" bIns="0">
+          <a:bodyPr wrap="square" lIns="0" tIns="0" rIns="0" bIns="0" anchor="ctr">
             <a:spAutoFit/>
           </a:bodyPr>
           <a:lstStyle/>
@@ -17507,7 +17436,7 @@
           <a:noFill/>
         </p:spPr>
         <p:txBody>
-          <a:bodyPr wrap="square" anchor="ctr" lIns="0" rIns="0" tIns="0" bIns="0">
+          <a:bodyPr wrap="square" lIns="0" tIns="0" rIns="0" bIns="0" anchor="ctr">
             <a:spAutoFit/>
           </a:bodyPr>
           <a:lstStyle/>
@@ -17571,7 +17500,7 @@
           <a:lstStyle/>
           <a:p>
             <a:r>
-              <a:rPr lang="en-US" sz="4400" dirty="0" b="0"/>
+              <a:rPr lang="en-US" sz="4400" b="0" dirty="0"/>
               <a:t>You Are the Magician</a:t>
             </a:r>
           </a:p>
@@ -17606,19 +17535,19 @@
           <a:lstStyle/>
           <a:p>
             <a:r>
-              <a:rPr lang="en-US" dirty="0" b="0"/>
+              <a:rPr lang="en-US" b="0" dirty="0"/>
               <a:t>A magician does not hide the trick by being fast</a:t>
             </a:r>
           </a:p>
           <a:p>
             <a:r>
-              <a:rPr lang="en-US" dirty="0" b="0"/>
+              <a:rPr lang="en-US" b="0" dirty="0"/>
               <a:t>They hide it by controlling where you look</a:t>
             </a:r>
           </a:p>
           <a:p>
             <a:r>
-              <a:rPr lang="en-US" dirty="0" b="0"/>
+              <a:rPr lang="en-US" b="0" dirty="0"/>
               <a:t>That is the entire job description</a:t>
             </a:r>
           </a:p>
@@ -17670,7 +17599,7 @@
           <a:lstStyle/>
           <a:p>
             <a:r>
-              <a:rPr lang="en-US" sz="4400" dirty="0" b="0"/>
+              <a:rPr lang="en-US" sz="4400" b="0" dirty="0"/>
               <a:t>You Have About One Second</a:t>
             </a:r>
           </a:p>
@@ -17705,25 +17634,25 @@
           <a:lstStyle/>
           <a:p>
             <a:r>
-              <a:rPr lang="en-US" dirty="0" b="0"/>
+              <a:rPr lang="en-US" b="0" dirty="0"/>
               <a:t>A panel in an animatic may hold for twelve frames</a:t>
             </a:r>
           </a:p>
           <a:p>
             <a:r>
-              <a:rPr lang="en-US" dirty="0" b="0"/>
+              <a:rPr lang="en-US" b="0" dirty="0"/>
               <a:t>The audience cannot study your frame</a:t>
             </a:r>
           </a:p>
           <a:p>
             <a:r>
-              <a:rPr lang="en-US" dirty="0" b="0"/>
+              <a:rPr lang="en-US" b="0" dirty="0"/>
               <a:t>Whatever they get, they get immediately or not at all</a:t>
             </a:r>
           </a:p>
           <a:p>
             <a:r>
-              <a:rPr lang="en-US" dirty="0" b="0"/>
+              <a:rPr lang="en-US" b="0" dirty="0"/>
               <a:t>This is the constraint that makes composition non-negotiable</a:t>
             </a:r>
           </a:p>
@@ -17775,7 +17704,7 @@
           <a:lstStyle/>
           <a:p>
             <a:r>
-              <a:rPr lang="en-US" sz="4400" dirty="0" b="0"/>
+              <a:rPr lang="en-US" sz="4400" b="0" dirty="0"/>
               <a:t>Where the Eye Goes First</a:t>
             </a:r>
           </a:p>
@@ -17810,31 +17739,31 @@
           <a:lstStyle/>
           <a:p>
             <a:r>
-              <a:rPr lang="en-US" dirty="0" b="0"/>
+              <a:rPr lang="en-US" b="0" dirty="0"/>
               <a:t>1.  Strongest value contrast</a:t>
             </a:r>
           </a:p>
           <a:p>
             <a:r>
-              <a:rPr lang="en-US" dirty="0" b="0"/>
+              <a:rPr lang="en-US" b="0" dirty="0"/>
               <a:t>2.  Movement</a:t>
             </a:r>
           </a:p>
           <a:p>
             <a:r>
-              <a:rPr lang="en-US" dirty="0" b="0"/>
+              <a:rPr lang="en-US" b="0" dirty="0"/>
               <a:t>3.  Faces, and especially eyes</a:t>
             </a:r>
           </a:p>
           <a:p>
             <a:r>
-              <a:rPr lang="en-US" dirty="0" b="0"/>
+              <a:rPr lang="en-US" b="0" dirty="0"/>
               <a:t>4.  Detail and texture</a:t>
             </a:r>
           </a:p>
           <a:p>
             <a:r>
-              <a:rPr lang="en-US" dirty="0" b="0"/>
+              <a:rPr lang="en-US" b="0" dirty="0"/>
               <a:t>5.  Everything else</a:t>
             </a:r>
           </a:p>
@@ -17886,7 +17815,7 @@
           <a:lstStyle/>
           <a:p>
             <a:r>
-              <a:rPr lang="en-US" sz="4400" dirty="0" b="0"/>
+              <a:rPr lang="en-US" sz="4400" b="0" dirty="0"/>
               <a:t>Reading Order</a:t>
             </a:r>
           </a:p>
@@ -17921,25 +17850,25 @@
           <a:lstStyle/>
           <a:p>
             <a:r>
-              <a:rPr lang="en-US" dirty="0" b="0"/>
+              <a:rPr lang="en-US" b="0" dirty="0"/>
               <a:t>Left to right, for most Western audiences</a:t>
             </a:r>
           </a:p>
           <a:p>
             <a:r>
-              <a:rPr lang="en-US" dirty="0" b="0"/>
+              <a:rPr lang="en-US" b="0" dirty="0"/>
               <a:t>Foreground before background</a:t>
             </a:r>
           </a:p>
           <a:p>
             <a:r>
-              <a:rPr lang="en-US" dirty="0" b="0"/>
+              <a:rPr lang="en-US" b="0" dirty="0"/>
               <a:t>Light before dark</a:t>
             </a:r>
           </a:p>
           <a:p>
             <a:r>
-              <a:rPr lang="en-US" dirty="0" b="0"/>
+              <a:rPr lang="en-US" b="0" dirty="0"/>
               <a:t>You can fight all of this, but only on purpose</a:t>
             </a:r>
           </a:p>
@@ -17991,7 +17920,7 @@
           <a:lstStyle/>
           <a:p>
             <a:r>
-              <a:rPr lang="en-US" sz="4400" dirty="0" b="0"/>
+              <a:rPr lang="en-US" sz="4400" b="0" dirty="0"/>
               <a:t>The Squint Test</a:t>
             </a:r>
           </a:p>
@@ -18026,25 +17955,25 @@
           <a:lstStyle/>
           <a:p>
             <a:r>
-              <a:rPr lang="en-US" dirty="0" b="0"/>
+              <a:rPr lang="en-US" b="0" dirty="0"/>
               <a:t>Squint at your panel until the detail disappears</a:t>
             </a:r>
           </a:p>
           <a:p>
             <a:r>
-              <a:rPr lang="en-US" dirty="0" b="0"/>
+              <a:rPr lang="en-US" b="0" dirty="0"/>
               <a:t>What is left is what the audience actually receives</a:t>
             </a:r>
           </a:p>
           <a:p>
             <a:r>
-              <a:rPr lang="en-US" dirty="0" b="0"/>
+              <a:rPr lang="en-US" b="0" dirty="0"/>
               <a:t>If the subject vanishes when you squint, the panel has failed</a:t>
             </a:r>
           </a:p>
           <a:p>
             <a:r>
-              <a:rPr lang="en-US" dirty="0" b="0"/>
+              <a:rPr lang="en-US" b="0" dirty="0"/>
               <a:t>Do this constantly, on your own work, all semester</a:t>
             </a:r>
           </a:p>
@@ -18096,7 +18025,7 @@
           <a:lstStyle/>
           <a:p>
             <a:r>
-              <a:rPr lang="en-US" sz="4400" dirty="0" b="0"/>
+              <a:rPr lang="en-US" sz="4400" b="0" dirty="0"/>
               <a:t>Figure and Ground</a:t>
             </a:r>
           </a:p>
@@ -18131,25 +18060,25 @@
           <a:lstStyle/>
           <a:p>
             <a:r>
-              <a:rPr lang="en-US" dirty="0" b="0"/>
+              <a:rPr lang="en-US" b="0" dirty="0"/>
               <a:t>The subject must separate from what is behind it</a:t>
             </a:r>
           </a:p>
           <a:p>
             <a:r>
-              <a:rPr lang="en-US" dirty="0" b="0"/>
+              <a:rPr lang="en-US" b="0" dirty="0"/>
               <a:t>Dark figure on light ground, or light on dark</a:t>
             </a:r>
           </a:p>
           <a:p>
             <a:r>
-              <a:rPr lang="en-US" dirty="0" b="0"/>
+              <a:rPr lang="en-US" b="0" dirty="0"/>
               <a:t>The failure case: mid-value figure on mid-value ground</a:t>
             </a:r>
           </a:p>
           <a:p>
             <a:r>
-              <a:rPr lang="en-US" dirty="0" b="0"/>
+              <a:rPr lang="en-US" b="0" dirty="0"/>
               <a:t>This is the number one reason student panels do not read</a:t>
             </a:r>
           </a:p>
@@ -18201,7 +18130,7 @@
           <a:lstStyle/>
           <a:p>
             <a:r>
-              <a:rPr lang="en-US" sz="4400" dirty="0" b="0"/>
+              <a:rPr lang="en-US" sz="4400" b="0" dirty="0"/>
               <a:t>Three Values Is Enough</a:t>
             </a:r>
           </a:p>
@@ -18236,25 +18165,25 @@
           <a:lstStyle/>
           <a:p>
             <a:r>
-              <a:rPr lang="en-US" dirty="0" b="0"/>
+              <a:rPr lang="en-US" b="0" dirty="0"/>
               <a:t>Black, mid-gray, white</a:t>
             </a:r>
           </a:p>
           <a:p>
             <a:r>
-              <a:rPr lang="en-US" dirty="0" b="0"/>
+              <a:rPr lang="en-US" b="0" dirty="0"/>
               <a:t>That is a complete storyboard rendering system</a:t>
             </a:r>
           </a:p>
           <a:p>
             <a:r>
-              <a:rPr lang="en-US" dirty="0" b="0"/>
+              <a:rPr lang="en-US" b="0" dirty="0"/>
               <a:t>More values usually means procrastination, not clarity</a:t>
             </a:r>
           </a:p>
           <a:p>
             <a:r>
-              <a:rPr lang="en-US" dirty="0" b="0"/>
+              <a:rPr lang="en-US" b="0" dirty="0"/>
               <a:t>Decide which of the three each area is, and commit</a:t>
             </a:r>
           </a:p>
@@ -18306,7 +18235,7 @@
           <a:lstStyle/>
           <a:p>
             <a:r>
-              <a:rPr lang="en-US" sz="4400" dirty="0" b="0"/>
+              <a:rPr lang="en-US" sz="4400" b="0" dirty="0"/>
               <a:t>Silhouette</a:t>
             </a:r>
           </a:p>
@@ -18341,25 +18270,25 @@
           <a:lstStyle/>
           <a:p>
             <a:r>
-              <a:rPr lang="en-US" dirty="0" b="0"/>
+              <a:rPr lang="en-US" b="0" dirty="0"/>
               <a:t>Fill the subject solid black</a:t>
             </a:r>
           </a:p>
           <a:p>
             <a:r>
-              <a:rPr lang="en-US" dirty="0" b="0"/>
+              <a:rPr lang="en-US" b="0" dirty="0"/>
               <a:t>Can a stranger name the action?</a:t>
             </a:r>
           </a:p>
           <a:p>
             <a:r>
-              <a:rPr lang="en-US" dirty="0" b="0"/>
+              <a:rPr lang="en-US" b="0" dirty="0"/>
               <a:t>If not, the pose has failed: regardless of drawing quality</a:t>
             </a:r>
           </a:p>
           <a:p>
             <a:r>
-              <a:rPr lang="en-US" dirty="0" b="0"/>
+              <a:rPr lang="en-US" b="0" dirty="0"/>
               <a:t>This is the standard this course grades against</a:t>
             </a:r>
           </a:p>
@@ -18411,7 +18340,7 @@
           <a:lstStyle/>
           <a:p>
             <a:r>
-              <a:rPr lang="en-US" sz="4400" dirty="0" b="0"/>
+              <a:rPr lang="en-US" sz="4400" b="0" dirty="0"/>
               <a:t>Value as Depth</a:t>
             </a:r>
           </a:p>
@@ -18446,25 +18375,25 @@
           <a:lstStyle/>
           <a:p>
             <a:r>
-              <a:rPr lang="en-US" dirty="0" b="0"/>
+              <a:rPr lang="en-US" b="0" dirty="0"/>
               <a:t>Near: darker, higher contrast, more detail</a:t>
             </a:r>
           </a:p>
           <a:p>
             <a:r>
-              <a:rPr lang="en-US" dirty="0" b="0"/>
+              <a:rPr lang="en-US" b="0" dirty="0"/>
               <a:t>Far: lighter, lower contrast, less detail</a:t>
             </a:r>
           </a:p>
           <a:p>
             <a:r>
-              <a:rPr lang="en-US" dirty="0" b="0"/>
+              <a:rPr lang="en-US" b="0" dirty="0"/>
               <a:t>This is atmospheric perspective, and it costs you nothing</a:t>
             </a:r>
           </a:p>
           <a:p>
             <a:r>
-              <a:rPr lang="en-US" dirty="0" b="0"/>
+              <a:rPr lang="en-US" b="0" dirty="0"/>
               <a:t>It works even when your linear perspective is wrong</a:t>
             </a:r>
           </a:p>
@@ -18516,7 +18445,7 @@
           <a:lstStyle/>
           <a:p>
             <a:r>
-              <a:rPr lang="en-US" sz="4400" dirty="0" b="0"/>
+              <a:rPr lang="en-US" sz="4400" b="0" dirty="0"/>
               <a:t>Contrast</a:t>
             </a:r>
           </a:p>
@@ -18551,25 +18480,25 @@
           <a:lstStyle/>
           <a:p>
             <a:r>
-              <a:rPr lang="en-US" dirty="0" b="0"/>
+              <a:rPr lang="en-US" b="0" dirty="0"/>
               <a:t>The range between your lightest and darkest</a:t>
             </a:r>
           </a:p>
           <a:p>
             <a:r>
-              <a:rPr lang="en-US" dirty="0" b="0"/>
+              <a:rPr lang="en-US" b="0" dirty="0"/>
               <a:t>High contrast: dramatic, tense, aggressive</a:t>
             </a:r>
           </a:p>
           <a:p>
             <a:r>
-              <a:rPr lang="en-US" dirty="0" b="0"/>
+              <a:rPr lang="en-US" b="0" dirty="0"/>
               <a:t>Low contrast: soft, flat, dreamy, or simply dull</a:t>
             </a:r>
           </a:p>
           <a:p>
             <a:r>
-              <a:rPr lang="en-US" dirty="0" b="0"/>
+              <a:rPr lang="en-US" b="0" dirty="0"/>
               <a:t>Contrast is also how you point at things</a:t>
             </a:r>
           </a:p>
@@ -18621,7 +18550,7 @@
           <a:lstStyle/>
           <a:p>
             <a:r>
-              <a:rPr lang="en-US" sz="4400" dirty="0" b="0"/>
+              <a:rPr lang="en-US" sz="4400" b="0" dirty="0"/>
               <a:t>Rule of Thirds</a:t>
             </a:r>
           </a:p>
@@ -18658,10 +18587,7 @@
             <a:pPr>
               <a:defRPr sz="1600" i="1"/>
             </a:pPr>
-            <a:r>
-              <a:rPr lang="en-US" dirty="0" b="0"/>
-              <a:t/>
-            </a:r>
+            <a:endParaRPr/>
           </a:p>
         </p:txBody>
       </p:sp>
@@ -18708,6 +18634,7 @@
           <a:lstStyle/>
           <a:p>
             <a:pPr algn="ctr"/>
+            <a:endParaRPr/>
           </a:p>
         </p:txBody>
       </p:sp>
@@ -18896,6 +18823,7 @@
           <a:lstStyle/>
           <a:p>
             <a:pPr algn="ctr"/>
+            <a:endParaRPr/>
           </a:p>
         </p:txBody>
       </p:sp>
@@ -18942,6 +18870,7 @@
           <a:lstStyle/>
           <a:p>
             <a:pPr algn="ctr"/>
+            <a:endParaRPr/>
           </a:p>
         </p:txBody>
       </p:sp>
@@ -18962,7 +18891,7 @@
           <a:noFill/>
         </p:spPr>
         <p:txBody>
-          <a:bodyPr wrap="square" anchor="ctr" lIns="0" rIns="0" tIns="0" bIns="0">
+          <a:bodyPr wrap="square" lIns="0" tIns="0" rIns="0" bIns="0" anchor="ctr">
             <a:spAutoFit/>
           </a:bodyPr>
           <a:lstStyle/>
@@ -19026,7 +18955,7 @@
           <a:lstStyle/>
           <a:p>
             <a:r>
-              <a:rPr lang="en-US" sz="4400" dirty="0" b="0"/>
+              <a:rPr lang="en-US" sz="4400" b="0" dirty="0"/>
               <a:t>Misdirection Is the Job</a:t>
             </a:r>
           </a:p>
@@ -19061,25 +18990,25 @@
           <a:lstStyle/>
           <a:p>
             <a:r>
-              <a:rPr lang="en-US" dirty="0" b="0"/>
+              <a:rPr lang="en-US" b="0" dirty="0"/>
               <a:t>The audience will look wherever you send them</a:t>
             </a:r>
           </a:p>
           <a:p>
             <a:r>
-              <a:rPr lang="en-US" dirty="0" b="0"/>
+              <a:rPr lang="en-US" b="0" dirty="0"/>
               <a:t>If you do not send them somewhere, they choose, and they choose badly</a:t>
             </a:r>
           </a:p>
           <a:p>
             <a:r>
-              <a:rPr lang="en-US" dirty="0" b="0"/>
+              <a:rPr lang="en-US" b="0" dirty="0"/>
               <a:t>Design is how you send them</a:t>
             </a:r>
           </a:p>
           <a:p>
             <a:r>
-              <a:rPr lang="en-US" dirty="0" b="0"/>
+              <a:rPr lang="en-US" b="0" dirty="0"/>
               <a:t>Every frame is a decision about attention</a:t>
             </a:r>
           </a:p>
@@ -19131,7 +19060,7 @@
           <a:lstStyle/>
           <a:p>
             <a:r>
-              <a:rPr lang="en-US" sz="4400" dirty="0" b="0"/>
+              <a:rPr lang="en-US" sz="4400" b="0" dirty="0"/>
               <a:t>When to Center</a:t>
             </a:r>
           </a:p>
@@ -19168,10 +19097,7 @@
             <a:pPr>
               <a:defRPr sz="1600" i="1"/>
             </a:pPr>
-            <a:r>
-              <a:rPr lang="en-US" dirty="0" b="0"/>
-              <a:t/>
-            </a:r>
+            <a:endParaRPr/>
           </a:p>
         </p:txBody>
       </p:sp>
@@ -19218,6 +19144,7 @@
           <a:lstStyle/>
           <a:p>
             <a:pPr algn="ctr"/>
+            <a:endParaRPr/>
           </a:p>
         </p:txBody>
       </p:sp>
@@ -19262,6 +19189,7 @@
           <a:lstStyle/>
           <a:p>
             <a:pPr algn="ctr"/>
+            <a:endParaRPr/>
           </a:p>
         </p:txBody>
       </p:sp>
@@ -19308,6 +19236,7 @@
           <a:lstStyle/>
           <a:p>
             <a:pPr algn="ctr"/>
+            <a:endParaRPr/>
           </a:p>
         </p:txBody>
       </p:sp>
@@ -19328,7 +19257,7 @@
           <a:noFill/>
         </p:spPr>
         <p:txBody>
-          <a:bodyPr wrap="square" anchor="ctr" lIns="0" rIns="0" tIns="0" bIns="0">
+          <a:bodyPr wrap="square" lIns="0" tIns="0" rIns="0" bIns="0" anchor="ctr">
             <a:spAutoFit/>
           </a:bodyPr>
           <a:lstStyle/>
@@ -19389,6 +19318,7 @@
           <a:lstStyle/>
           <a:p>
             <a:pPr algn="ctr"/>
+            <a:endParaRPr/>
           </a:p>
         </p:txBody>
       </p:sp>
@@ -19433,6 +19363,7 @@
           <a:lstStyle/>
           <a:p>
             <a:pPr algn="ctr"/>
+            <a:endParaRPr/>
           </a:p>
         </p:txBody>
       </p:sp>
@@ -19479,6 +19410,7 @@
           <a:lstStyle/>
           <a:p>
             <a:pPr algn="ctr"/>
+            <a:endParaRPr/>
           </a:p>
         </p:txBody>
       </p:sp>
@@ -19499,7 +19431,7 @@
           <a:noFill/>
         </p:spPr>
         <p:txBody>
-          <a:bodyPr wrap="square" anchor="ctr" lIns="0" rIns="0" tIns="0" bIns="0">
+          <a:bodyPr wrap="square" lIns="0" tIns="0" rIns="0" bIns="0" anchor="ctr">
             <a:spAutoFit/>
           </a:bodyPr>
           <a:lstStyle/>
@@ -19563,7 +19495,7 @@
           <a:lstStyle/>
           <a:p>
             <a:r>
-              <a:rPr lang="en-US" sz="4400" dirty="0" b="0"/>
+              <a:rPr lang="en-US" sz="4400" b="0" dirty="0"/>
               <a:t>Symmetrical Balance</a:t>
             </a:r>
           </a:p>
@@ -19600,10 +19532,7 @@
             <a:pPr>
               <a:defRPr sz="1600" i="1"/>
             </a:pPr>
-            <a:r>
-              <a:rPr lang="en-US" dirty="0" b="0"/>
-              <a:t/>
-            </a:r>
+            <a:endParaRPr/>
           </a:p>
         </p:txBody>
       </p:sp>
@@ -19650,6 +19579,7 @@
           <a:lstStyle/>
           <a:p>
             <a:pPr algn="ctr"/>
+            <a:endParaRPr/>
           </a:p>
         </p:txBody>
       </p:sp>
@@ -19730,6 +19660,7 @@
           <a:lstStyle/>
           <a:p>
             <a:pPr algn="ctr"/>
+            <a:endParaRPr/>
           </a:p>
         </p:txBody>
       </p:sp>
@@ -19776,6 +19707,7 @@
           <a:lstStyle/>
           <a:p>
             <a:pPr algn="ctr"/>
+            <a:endParaRPr/>
           </a:p>
         </p:txBody>
       </p:sp>
@@ -19820,6 +19752,7 @@
           <a:lstStyle/>
           <a:p>
             <a:pPr algn="ctr"/>
+            <a:endParaRPr/>
           </a:p>
         </p:txBody>
       </p:sp>
@@ -19866,6 +19799,7 @@
           <a:lstStyle/>
           <a:p>
             <a:pPr algn="ctr"/>
+            <a:endParaRPr/>
           </a:p>
         </p:txBody>
       </p:sp>
@@ -19886,7 +19820,7 @@
           <a:noFill/>
         </p:spPr>
         <p:txBody>
-          <a:bodyPr wrap="square" anchor="ctr" lIns="0" rIns="0" tIns="0" bIns="0">
+          <a:bodyPr wrap="square" lIns="0" tIns="0" rIns="0" bIns="0" anchor="ctr">
             <a:spAutoFit/>
           </a:bodyPr>
           <a:lstStyle/>
@@ -19950,7 +19884,7 @@
           <a:lstStyle/>
           <a:p>
             <a:r>
-              <a:rPr lang="en-US" sz="4400" dirty="0" b="0"/>
+              <a:rPr lang="en-US" sz="4400" b="0" dirty="0"/>
               <a:t>Asymmetrical Balance</a:t>
             </a:r>
           </a:p>
@@ -19987,10 +19921,7 @@
             <a:pPr>
               <a:defRPr sz="1600" i="1"/>
             </a:pPr>
-            <a:r>
-              <a:rPr lang="en-US" dirty="0" b="0"/>
-              <a:t/>
-            </a:r>
+            <a:endParaRPr/>
           </a:p>
         </p:txBody>
       </p:sp>
@@ -20037,6 +19968,7 @@
           <a:lstStyle/>
           <a:p>
             <a:pPr algn="ctr"/>
+            <a:endParaRPr/>
           </a:p>
         </p:txBody>
       </p:sp>
@@ -20081,6 +20013,7 @@
           <a:lstStyle/>
           <a:p>
             <a:pPr algn="ctr"/>
+            <a:endParaRPr/>
           </a:p>
         </p:txBody>
       </p:sp>
@@ -20127,6 +20060,7 @@
           <a:lstStyle/>
           <a:p>
             <a:pPr algn="ctr"/>
+            <a:endParaRPr/>
           </a:p>
         </p:txBody>
       </p:sp>
@@ -20171,6 +20105,7 @@
           <a:lstStyle/>
           <a:p>
             <a:pPr algn="ctr"/>
+            <a:endParaRPr/>
           </a:p>
         </p:txBody>
       </p:sp>
@@ -20217,6 +20152,7 @@
           <a:lstStyle/>
           <a:p>
             <a:pPr algn="ctr"/>
+            <a:endParaRPr/>
           </a:p>
         </p:txBody>
       </p:sp>
@@ -20261,6 +20197,7 @@
           <a:lstStyle/>
           <a:p>
             <a:pPr algn="ctr"/>
+            <a:endParaRPr/>
           </a:p>
         </p:txBody>
       </p:sp>
@@ -20307,6 +20244,7 @@
           <a:lstStyle/>
           <a:p>
             <a:pPr algn="ctr"/>
+            <a:endParaRPr/>
           </a:p>
         </p:txBody>
       </p:sp>
@@ -20351,6 +20289,7 @@
           <a:lstStyle/>
           <a:p>
             <a:pPr algn="ctr"/>
+            <a:endParaRPr/>
           </a:p>
         </p:txBody>
       </p:sp>
@@ -20397,6 +20336,7 @@
           <a:lstStyle/>
           <a:p>
             <a:pPr algn="ctr"/>
+            <a:endParaRPr/>
           </a:p>
         </p:txBody>
       </p:sp>
@@ -20417,7 +20357,7 @@
           <a:noFill/>
         </p:spPr>
         <p:txBody>
-          <a:bodyPr wrap="square" anchor="ctr" lIns="0" rIns="0" tIns="0" bIns="0">
+          <a:bodyPr wrap="square" lIns="0" tIns="0" rIns="0" bIns="0" anchor="ctr">
             <a:spAutoFit/>
           </a:bodyPr>
           <a:lstStyle/>
@@ -20481,7 +20421,7 @@
           <a:lstStyle/>
           <a:p>
             <a:r>
-              <a:rPr lang="en-US" sz="4400" dirty="0" b="0"/>
+              <a:rPr lang="en-US" sz="4400" b="0" dirty="0"/>
               <a:t>Dominance</a:t>
             </a:r>
           </a:p>
@@ -20518,10 +20458,7 @@
             <a:pPr>
               <a:defRPr sz="1600" i="1"/>
             </a:pPr>
-            <a:r>
-              <a:rPr lang="en-US" dirty="0" b="0"/>
-              <a:t/>
-            </a:r>
+            <a:endParaRPr/>
           </a:p>
         </p:txBody>
       </p:sp>
@@ -20568,6 +20505,7 @@
           <a:lstStyle/>
           <a:p>
             <a:pPr algn="ctr"/>
+            <a:endParaRPr/>
           </a:p>
         </p:txBody>
       </p:sp>
@@ -20612,6 +20550,7 @@
           <a:lstStyle/>
           <a:p>
             <a:pPr algn="ctr"/>
+            <a:endParaRPr/>
           </a:p>
         </p:txBody>
       </p:sp>
@@ -20632,7 +20571,7 @@
           <a:noFill/>
         </p:spPr>
         <p:txBody>
-          <a:bodyPr wrap="square" anchor="ctr" lIns="0" rIns="0" tIns="0" bIns="0">
+          <a:bodyPr wrap="square" lIns="0" tIns="0" rIns="0" bIns="0" anchor="ctr">
             <a:spAutoFit/>
           </a:bodyPr>
           <a:lstStyle/>
@@ -20691,6 +20630,7 @@
           <a:lstStyle/>
           <a:p>
             <a:pPr algn="ctr"/>
+            <a:endParaRPr/>
           </a:p>
         </p:txBody>
       </p:sp>
@@ -20711,7 +20651,7 @@
           <a:noFill/>
         </p:spPr>
         <p:txBody>
-          <a:bodyPr wrap="square" anchor="ctr" lIns="0" rIns="0" tIns="0" bIns="0">
+          <a:bodyPr wrap="square" lIns="0" tIns="0" rIns="0" bIns="0" anchor="ctr">
             <a:spAutoFit/>
           </a:bodyPr>
           <a:lstStyle/>
@@ -20772,6 +20712,7 @@
           <a:lstStyle/>
           <a:p>
             <a:pPr algn="ctr"/>
+            <a:endParaRPr/>
           </a:p>
         </p:txBody>
       </p:sp>
@@ -20792,7 +20733,7 @@
           <a:noFill/>
         </p:spPr>
         <p:txBody>
-          <a:bodyPr wrap="square" anchor="ctr" lIns="0" rIns="0" tIns="0" bIns="0">
+          <a:bodyPr wrap="square" lIns="0" tIns="0" rIns="0" bIns="0" anchor="ctr">
             <a:spAutoFit/>
           </a:bodyPr>
           <a:lstStyle/>
@@ -20827,7 +20768,7 @@
           <a:noFill/>
         </p:spPr>
         <p:txBody>
-          <a:bodyPr wrap="square" anchor="ctr" lIns="0" rIns="0" tIns="0" bIns="0">
+          <a:bodyPr wrap="square" lIns="0" tIns="0" rIns="0" bIns="0" anchor="ctr">
             <a:spAutoFit/>
           </a:bodyPr>
           <a:lstStyle/>
@@ -20891,7 +20832,7 @@
           <a:lstStyle/>
           <a:p>
             <a:r>
-              <a:rPr lang="en-US" sz="4400" dirty="0" b="0"/>
+              <a:rPr lang="en-US" sz="4400" b="0" dirty="0"/>
               <a:t>Positive and Negative Space</a:t>
             </a:r>
           </a:p>
@@ -20928,10 +20869,7 @@
             <a:pPr>
               <a:defRPr sz="1600" i="1"/>
             </a:pPr>
-            <a:r>
-              <a:rPr lang="en-US" dirty="0" b="0"/>
-              <a:t/>
-            </a:r>
+            <a:endParaRPr/>
           </a:p>
         </p:txBody>
       </p:sp>
@@ -20978,6 +20916,7 @@
           <a:lstStyle/>
           <a:p>
             <a:pPr algn="ctr"/>
+            <a:endParaRPr/>
           </a:p>
         </p:txBody>
       </p:sp>
@@ -21022,6 +20961,7 @@
           <a:lstStyle/>
           <a:p>
             <a:pPr algn="ctr"/>
+            <a:endParaRPr/>
           </a:p>
         </p:txBody>
       </p:sp>
@@ -21066,6 +21006,7 @@
           <a:lstStyle/>
           <a:p>
             <a:pPr algn="ctr"/>
+            <a:endParaRPr/>
           </a:p>
         </p:txBody>
       </p:sp>
@@ -21112,6 +21053,7 @@
           <a:lstStyle/>
           <a:p>
             <a:pPr algn="ctr"/>
+            <a:endParaRPr/>
           </a:p>
         </p:txBody>
       </p:sp>
@@ -21132,7 +21074,7 @@
           <a:noFill/>
         </p:spPr>
         <p:txBody>
-          <a:bodyPr wrap="square" anchor="ctr" lIns="0" rIns="0" tIns="0" bIns="0">
+          <a:bodyPr wrap="square" lIns="0" tIns="0" rIns="0" bIns="0" anchor="ctr">
             <a:spAutoFit/>
           </a:bodyPr>
           <a:lstStyle/>
@@ -21167,7 +21109,7 @@
           <a:noFill/>
         </p:spPr>
         <p:txBody>
-          <a:bodyPr wrap="square" anchor="ctr" lIns="0" rIns="0" tIns="0" bIns="0">
+          <a:bodyPr wrap="square" lIns="0" tIns="0" rIns="0" bIns="0" anchor="ctr">
             <a:spAutoFit/>
           </a:bodyPr>
           <a:lstStyle/>
@@ -21231,7 +21173,7 @@
           <a:lstStyle/>
           <a:p>
             <a:r>
-              <a:rPr lang="en-US" sz="4400" dirty="0" b="0"/>
+              <a:rPr lang="en-US" sz="4400" b="0" dirty="0"/>
               <a:t>Headroom, Lookroom, Leadroom</a:t>
             </a:r>
           </a:p>
@@ -21268,10 +21210,7 @@
             <a:pPr>
               <a:defRPr sz="1600" i="1"/>
             </a:pPr>
-            <a:r>
-              <a:rPr lang="en-US" dirty="0" b="0"/>
-              <a:t/>
-            </a:r>
+            <a:endParaRPr/>
           </a:p>
         </p:txBody>
       </p:sp>
@@ -21318,6 +21257,7 @@
           <a:lstStyle/>
           <a:p>
             <a:pPr algn="ctr"/>
+            <a:endParaRPr/>
           </a:p>
         </p:txBody>
       </p:sp>
@@ -21362,6 +21302,7 @@
           <a:lstStyle/>
           <a:p>
             <a:pPr algn="ctr"/>
+            <a:endParaRPr/>
           </a:p>
         </p:txBody>
       </p:sp>
@@ -21408,6 +21349,7 @@
           <a:lstStyle/>
           <a:p>
             <a:pPr algn="ctr"/>
+            <a:endParaRPr/>
           </a:p>
         </p:txBody>
       </p:sp>
@@ -21463,7 +21405,7 @@
           <a:noFill/>
         </p:spPr>
         <p:txBody>
-          <a:bodyPr wrap="square" anchor="ctr" lIns="0" rIns="0" tIns="0" bIns="0">
+          <a:bodyPr wrap="square" lIns="0" tIns="0" rIns="0" bIns="0" anchor="ctr">
             <a:spAutoFit/>
           </a:bodyPr>
           <a:lstStyle/>
@@ -21533,7 +21475,7 @@
           <a:noFill/>
         </p:spPr>
         <p:txBody>
-          <a:bodyPr wrap="square" anchor="ctr" lIns="0" rIns="0" tIns="0" bIns="0">
+          <a:bodyPr wrap="square" lIns="0" tIns="0" rIns="0" bIns="0" anchor="ctr">
             <a:spAutoFit/>
           </a:bodyPr>
           <a:lstStyle/>
@@ -21603,7 +21545,7 @@
           <a:noFill/>
         </p:spPr>
         <p:txBody>
-          <a:bodyPr wrap="square" anchor="ctr" lIns="0" rIns="0" tIns="0" bIns="0">
+          <a:bodyPr wrap="square" lIns="0" tIns="0" rIns="0" bIns="0" anchor="ctr">
             <a:spAutoFit/>
           </a:bodyPr>
           <a:lstStyle/>
@@ -21638,7 +21580,7 @@
           <a:noFill/>
         </p:spPr>
         <p:txBody>
-          <a:bodyPr wrap="square" anchor="ctr" lIns="0" rIns="0" tIns="0" bIns="0">
+          <a:bodyPr wrap="square" lIns="0" tIns="0" rIns="0" bIns="0" anchor="ctr">
             <a:spAutoFit/>
           </a:bodyPr>
           <a:lstStyle/>
@@ -21702,7 +21644,7 @@
           <a:lstStyle/>
           <a:p>
             <a:r>
-              <a:rPr lang="en-US" sz="4400" dirty="0" b="0"/>
+              <a:rPr lang="en-US" sz="4400" b="0" dirty="0"/>
               <a:t>Frame Within a Frame</a:t>
             </a:r>
           </a:p>
@@ -21737,25 +21679,25 @@
           <a:lstStyle/>
           <a:p>
             <a:r>
-              <a:rPr lang="en-US" dirty="0" b="0"/>
+              <a:rPr lang="en-US" b="0" dirty="0"/>
               <a:t>Doorways, windows, mirrors, arches, gaps</a:t>
             </a:r>
           </a:p>
           <a:p>
             <a:r>
-              <a:rPr lang="en-US" dirty="0" b="0"/>
+              <a:rPr lang="en-US" b="0" dirty="0"/>
               <a:t>Foreground shapes that surround the subject</a:t>
             </a:r>
           </a:p>
           <a:p>
             <a:r>
-              <a:rPr lang="en-US" dirty="0" b="0"/>
+              <a:rPr lang="en-US" b="0" dirty="0"/>
               <a:t>Isolates the subject without any perspective work</a:t>
             </a:r>
           </a:p>
           <a:p>
             <a:r>
-              <a:rPr lang="en-US" dirty="0" b="0"/>
+              <a:rPr lang="en-US" b="0" dirty="0"/>
               <a:t>Cheap to draw. Instantly sophisticated.</a:t>
             </a:r>
           </a:p>
@@ -21807,7 +21749,7 @@
           <a:lstStyle/>
           <a:p>
             <a:r>
-              <a:rPr lang="en-US" sz="4400" dirty="0" b="0"/>
+              <a:rPr lang="en-US" sz="4400" b="0" dirty="0"/>
               <a:t>Leading Lines</a:t>
             </a:r>
           </a:p>
@@ -21842,25 +21784,25 @@
           <a:lstStyle/>
           <a:p>
             <a:r>
-              <a:rPr lang="en-US" dirty="0" b="0"/>
+              <a:rPr lang="en-US" b="0" dirty="0"/>
               <a:t>Roads, rails, fences, shadows, architecture</a:t>
             </a:r>
           </a:p>
           <a:p>
             <a:r>
-              <a:rPr lang="en-US" dirty="0" b="0"/>
+              <a:rPr lang="en-US" b="0" dirty="0"/>
               <a:t>Arms, gazes, weapons, outstretched hands</a:t>
             </a:r>
           </a:p>
           <a:p>
             <a:r>
-              <a:rPr lang="en-US" dirty="0" b="0"/>
+              <a:rPr lang="en-US" b="0" dirty="0"/>
               <a:t>The eye follows a line to whatever is at the end of it</a:t>
             </a:r>
           </a:p>
           <a:p>
             <a:r>
-              <a:rPr lang="en-US" dirty="0" b="0"/>
+              <a:rPr lang="en-US" b="0" dirty="0"/>
               <a:t>The fastest way to point without pointing</a:t>
             </a:r>
           </a:p>
@@ -21912,7 +21854,7 @@
           <a:lstStyle/>
           <a:p>
             <a:r>
-              <a:rPr lang="en-US" sz="4400" dirty="0" b="0"/>
+              <a:rPr lang="en-US" sz="4400" b="0" dirty="0"/>
               <a:t>Eyelines</a:t>
             </a:r>
           </a:p>
@@ -21947,25 +21889,25 @@
           <a:lstStyle/>
           <a:p>
             <a:r>
-              <a:rPr lang="en-US" dirty="0" b="0"/>
+              <a:rPr lang="en-US" b="0" dirty="0"/>
               <a:t>The audience looks where the character looks</a:t>
             </a:r>
           </a:p>
           <a:p>
             <a:r>
-              <a:rPr lang="en-US" dirty="0" b="0"/>
+              <a:rPr lang="en-US" b="0" dirty="0"/>
               <a:t>The strongest leading line in any frame is a gaze</a:t>
             </a:r>
           </a:p>
           <a:p>
             <a:r>
-              <a:rPr lang="en-US" dirty="0" b="0"/>
+              <a:rPr lang="en-US" b="0" dirty="0"/>
               <a:t>Look, see, react: three panels, complete storytelling</a:t>
             </a:r>
           </a:p>
           <a:p>
             <a:r>
-              <a:rPr lang="en-US" dirty="0" b="0"/>
+              <a:rPr lang="en-US" b="0" dirty="0"/>
               <a:t>An eyeline is a composition tool and a continuity contract</a:t>
             </a:r>
           </a:p>
@@ -22017,7 +21959,7 @@
           <a:lstStyle/>
           <a:p>
             <a:r>
-              <a:rPr lang="en-US" sz="4400" dirty="0" b="0"/>
+              <a:rPr lang="en-US" sz="4400" b="0" dirty="0"/>
               <a:t>Gestalt</a:t>
             </a:r>
           </a:p>
@@ -22052,25 +21994,25 @@
           <a:lstStyle/>
           <a:p>
             <a:r>
-              <a:rPr lang="en-US" dirty="0" b="0"/>
+              <a:rPr lang="en-US" b="0" dirty="0"/>
               <a:t>The whole is greater than the sum of its parts</a:t>
             </a:r>
           </a:p>
           <a:p>
             <a:r>
-              <a:rPr lang="en-US" dirty="0" b="0"/>
+              <a:rPr lang="en-US" b="0" dirty="0"/>
               <a:t>The brain groups things automatically</a:t>
             </a:r>
           </a:p>
           <a:p>
             <a:r>
-              <a:rPr lang="en-US" dirty="0" b="0"/>
+              <a:rPr lang="en-US" b="0" dirty="0"/>
               <a:t>By proximity, by similarity, by continuation</a:t>
             </a:r>
           </a:p>
           <a:p>
             <a:r>
-              <a:rPr lang="en-US" dirty="0" b="0"/>
+              <a:rPr lang="en-US" b="0" dirty="0"/>
               <a:t>You are composing for a brain that is trying to organize</a:t>
             </a:r>
           </a:p>
@@ -22122,7 +22064,7 @@
           <a:lstStyle/>
           <a:p>
             <a:r>
-              <a:rPr lang="en-US" sz="4400" dirty="0" b="0"/>
+              <a:rPr lang="en-US" sz="4400" b="0" dirty="0"/>
               <a:t>Nobody Should See the Curtain</a:t>
             </a:r>
           </a:p>
@@ -22157,19 +22099,19 @@
           <a:lstStyle/>
           <a:p>
             <a:r>
-              <a:rPr lang="en-US" dirty="0" b="0"/>
+              <a:rPr lang="en-US" b="0" dirty="0"/>
               <a:t>Good composition is invisible</a:t>
             </a:r>
           </a:p>
           <a:p>
             <a:r>
-              <a:rPr lang="en-US" dirty="0" b="0"/>
+              <a:rPr lang="en-US" b="0" dirty="0"/>
               <a:t>Bad composition is the only kind anyone notices</a:t>
             </a:r>
           </a:p>
           <a:p>
             <a:r>
-              <a:rPr lang="en-US" dirty="0" b="0"/>
+              <a:rPr lang="en-US" b="0" dirty="0"/>
               <a:t>"It looks weird" usually means "the eye went to the wrong place"</a:t>
             </a:r>
           </a:p>
@@ -22221,7 +22163,7 @@
           <a:lstStyle/>
           <a:p>
             <a:r>
-              <a:rPr lang="en-US" sz="4400" dirty="0" b="0"/>
+              <a:rPr lang="en-US" sz="4400" b="0" dirty="0"/>
               <a:t>Closure: Why Crude Boards Work</a:t>
             </a:r>
           </a:p>
@@ -22256,25 +22198,25 @@
           <a:lstStyle/>
           <a:p>
             <a:r>
-              <a:rPr lang="en-US" dirty="0" b="0"/>
+              <a:rPr lang="en-US" b="0" dirty="0"/>
               <a:t>The brain fills in missing information automatically</a:t>
             </a:r>
           </a:p>
           <a:p>
             <a:r>
-              <a:rPr lang="en-US" dirty="0" b="0"/>
+              <a:rPr lang="en-US" b="0" dirty="0"/>
               <a:t>You do not have to draw everything. You have to draw enough.</a:t>
             </a:r>
           </a:p>
           <a:p>
             <a:r>
-              <a:rPr lang="en-US" dirty="0" b="0"/>
+              <a:rPr lang="en-US" b="0" dirty="0"/>
               <a:t>Suggestion is faster than depiction, and often stronger</a:t>
             </a:r>
           </a:p>
           <a:p>
             <a:r>
-              <a:rPr lang="en-US" dirty="0" b="0"/>
+              <a:rPr lang="en-US" b="0" dirty="0"/>
               <a:t>This is permission to draw less</a:t>
             </a:r>
           </a:p>
@@ -22326,7 +22268,7 @@
           <a:lstStyle/>
           <a:p>
             <a:r>
-              <a:rPr lang="en-US" sz="4400" dirty="0" b="0"/>
+              <a:rPr lang="en-US" sz="4400" b="0" dirty="0"/>
               <a:t>Foreground, Midground, Background</a:t>
             </a:r>
           </a:p>
@@ -22363,10 +22305,7 @@
             <a:pPr>
               <a:defRPr sz="1600" i="1"/>
             </a:pPr>
-            <a:r>
-              <a:rPr lang="en-US" dirty="0" b="0"/>
-              <a:t/>
-            </a:r>
+            <a:endParaRPr/>
           </a:p>
         </p:txBody>
       </p:sp>
@@ -22413,6 +22352,7 @@
           <a:lstStyle/>
           <a:p>
             <a:pPr algn="ctr"/>
+            <a:endParaRPr/>
           </a:p>
         </p:txBody>
       </p:sp>
@@ -22457,6 +22397,7 @@
           <a:lstStyle/>
           <a:p>
             <a:pPr algn="ctr"/>
+            <a:endParaRPr/>
           </a:p>
         </p:txBody>
       </p:sp>
@@ -22501,6 +22442,7 @@
           <a:lstStyle/>
           <a:p>
             <a:pPr algn="ctr"/>
+            <a:endParaRPr/>
           </a:p>
         </p:txBody>
       </p:sp>
@@ -22545,6 +22487,7 @@
           <a:lstStyle/>
           <a:p>
             <a:pPr algn="ctr"/>
+            <a:endParaRPr/>
           </a:p>
         </p:txBody>
       </p:sp>
@@ -22591,6 +22534,7 @@
           <a:lstStyle/>
           <a:p>
             <a:pPr algn="ctr"/>
+            <a:endParaRPr/>
           </a:p>
         </p:txBody>
       </p:sp>
@@ -22635,6 +22579,7 @@
           <a:lstStyle/>
           <a:p>
             <a:pPr algn="ctr"/>
+            <a:endParaRPr/>
           </a:p>
         </p:txBody>
       </p:sp>
@@ -22655,7 +22600,7 @@
           <a:noFill/>
         </p:spPr>
         <p:txBody>
-          <a:bodyPr wrap="square" anchor="ctr" lIns="0" rIns="0" tIns="0" bIns="0">
+          <a:bodyPr wrap="square" lIns="0" tIns="0" rIns="0" bIns="0" anchor="ctr">
             <a:spAutoFit/>
           </a:bodyPr>
           <a:lstStyle/>
@@ -22690,7 +22635,7 @@
           <a:noFill/>
         </p:spPr>
         <p:txBody>
-          <a:bodyPr wrap="square" anchor="ctr" lIns="0" rIns="0" tIns="0" bIns="0">
+          <a:bodyPr wrap="square" lIns="0" tIns="0" rIns="0" bIns="0" anchor="ctr">
             <a:spAutoFit/>
           </a:bodyPr>
           <a:lstStyle/>
@@ -22754,7 +22699,7 @@
           <a:lstStyle/>
           <a:p>
             <a:r>
-              <a:rPr lang="en-US" sz="4400" dirty="0" b="0"/>
+              <a:rPr lang="en-US" sz="4400" b="0" dirty="0"/>
               <a:t>Now the Rules Expand</a:t>
             </a:r>
           </a:p>
@@ -22789,25 +22734,25 @@
           <a:lstStyle/>
           <a:p>
             <a:r>
-              <a:rPr lang="en-US" dirty="0" b="0"/>
+              <a:rPr lang="en-US" b="0" dirty="0"/>
               <a:t>Everything so far was about one frame</a:t>
             </a:r>
           </a:p>
           <a:p>
             <a:r>
-              <a:rPr lang="en-US" dirty="0" b="0"/>
+              <a:rPr lang="en-US" b="0" dirty="0"/>
               <a:t>You do not make frames. You make sequences.</a:t>
             </a:r>
           </a:p>
           <a:p>
             <a:r>
-              <a:rPr lang="en-US" dirty="0" b="0"/>
+              <a:rPr lang="en-US" b="0" dirty="0"/>
               <a:t>Each principle now gets a second meaning: across time</a:t>
             </a:r>
           </a:p>
           <a:p>
             <a:r>
-              <a:rPr lang="en-US" dirty="0" b="0"/>
+              <a:rPr lang="en-US" b="0" dirty="0"/>
               <a:t>This is where design for motion separates from graphic design</a:t>
             </a:r>
           </a:p>
@@ -22859,7 +22804,7 @@
           <a:lstStyle/>
           <a:p>
             <a:r>
-              <a:rPr lang="en-US" sz="4400" dirty="0" b="0"/>
+              <a:rPr lang="en-US" sz="4400" b="0" dirty="0"/>
               <a:t>Rhythm, Meaning One: In Space</a:t>
             </a:r>
           </a:p>
@@ -22894,25 +22839,25 @@
           <a:lstStyle/>
           <a:p>
             <a:r>
-              <a:rPr lang="en-US" dirty="0" b="0"/>
+              <a:rPr lang="en-US" b="0" dirty="0"/>
               <a:t>Repetition of elements within a frame</a:t>
             </a:r>
           </a:p>
           <a:p>
             <a:r>
-              <a:rPr lang="en-US" dirty="0" b="0"/>
+              <a:rPr lang="en-US" b="0" dirty="0"/>
               <a:t>Regular: even intervals, similar sizes</a:t>
             </a:r>
           </a:p>
           <a:p>
             <a:r>
-              <a:rPr lang="en-US" dirty="0" b="0"/>
+              <a:rPr lang="en-US" b="0" dirty="0"/>
               <a:t>Flowing: organic, curving, natural</a:t>
             </a:r>
           </a:p>
           <a:p>
             <a:r>
-              <a:rPr lang="en-US" dirty="0" b="0"/>
+              <a:rPr lang="en-US" b="0" dirty="0"/>
               <a:t>Progressive: a sequence that changes step by step</a:t>
             </a:r>
           </a:p>
@@ -22964,7 +22909,7 @@
           <a:lstStyle/>
           <a:p>
             <a:r>
-              <a:rPr lang="en-US" sz="4400" dirty="0" b="0"/>
+              <a:rPr lang="en-US" sz="4400" b="0" dirty="0"/>
               <a:t>Rhythm, Meaning Two: In Time</a:t>
             </a:r>
           </a:p>
@@ -22999,25 +22944,25 @@
           <a:lstStyle/>
           <a:p>
             <a:r>
-              <a:rPr lang="en-US" dirty="0" b="0"/>
+              <a:rPr lang="en-US" b="0" dirty="0"/>
               <a:t>The pattern of your cuts</a:t>
             </a:r>
           </a:p>
           <a:p>
             <a:r>
-              <a:rPr lang="en-US" dirty="0" b="0"/>
+              <a:rPr lang="en-US" b="0" dirty="0"/>
               <a:t>How long each shot holds</a:t>
             </a:r>
           </a:p>
           <a:p>
             <a:r>
-              <a:rPr lang="en-US" dirty="0" b="0"/>
+              <a:rPr lang="en-US" b="0" dirty="0"/>
               <a:t>Fast, slow, regular, syncopated, interrupted</a:t>
             </a:r>
           </a:p>
           <a:p>
             <a:r>
-              <a:rPr lang="en-US" dirty="0" b="0"/>
+              <a:rPr lang="en-US" b="0" dirty="0"/>
               <a:t>This one is closer to music than to design</a:t>
             </a:r>
           </a:p>
@@ -23069,7 +23014,7 @@
           <a:lstStyle/>
           <a:p>
             <a:r>
-              <a:rPr lang="en-US" sz="4400" dirty="0" b="0"/>
+              <a:rPr lang="en-US" sz="4400" b="0" dirty="0"/>
               <a:t>Combining Both Rhythms</a:t>
             </a:r>
           </a:p>
@@ -23104,25 +23049,25 @@
           <a:lstStyle/>
           <a:p>
             <a:r>
-              <a:rPr lang="en-US" dirty="0" b="0"/>
+              <a:rPr lang="en-US" b="0" dirty="0"/>
               <a:t>Spatial rhythm inside the frame</a:t>
             </a:r>
           </a:p>
           <a:p>
             <a:r>
-              <a:rPr lang="en-US" dirty="0" b="0"/>
+              <a:rPr lang="en-US" b="0" dirty="0"/>
               <a:t>Temporal rhythm across the cuts</a:t>
             </a:r>
           </a:p>
           <a:p>
             <a:r>
-              <a:rPr lang="en-US" dirty="0" b="0"/>
+              <a:rPr lang="en-US" b="0" dirty="0"/>
               <a:t>Align them and the sequence feels inevitable</a:t>
             </a:r>
           </a:p>
           <a:p>
             <a:r>
-              <a:rPr lang="en-US" dirty="0" b="0"/>
+              <a:rPr lang="en-US" b="0" dirty="0"/>
               <a:t>Break one against the other and you create tension</a:t>
             </a:r>
           </a:p>
@@ -23174,7 +23119,7 @@
           <a:lstStyle/>
           <a:p>
             <a:r>
-              <a:rPr lang="en-US" sz="4400" dirty="0" b="0"/>
+              <a:rPr lang="en-US" sz="4400" b="0" dirty="0"/>
               <a:t>Ballistics: The Flow of Information</a:t>
             </a:r>
           </a:p>
@@ -23209,25 +23154,25 @@
           <a:lstStyle/>
           <a:p>
             <a:r>
-              <a:rPr lang="en-US" dirty="0" b="0"/>
+              <a:rPr lang="en-US" b="0" dirty="0"/>
               <a:t>Information has momentum across a cut</a:t>
             </a:r>
           </a:p>
           <a:p>
             <a:r>
-              <a:rPr lang="en-US" dirty="0" b="0"/>
+              <a:rPr lang="en-US" b="0" dirty="0"/>
               <a:t>What the audience just learned shapes what they see next</a:t>
             </a:r>
           </a:p>
           <a:p>
             <a:r>
-              <a:rPr lang="en-US" dirty="0" b="0"/>
+              <a:rPr lang="en-US" b="0" dirty="0"/>
               <a:t>Where the eye lands in shot A is where it starts in shot B</a:t>
             </a:r>
           </a:p>
           <a:p>
             <a:r>
-              <a:rPr lang="en-US" dirty="0" b="0"/>
+              <a:rPr lang="en-US" b="0" dirty="0"/>
               <a:t>You are not composing frames. You are composing a trajectory.</a:t>
             </a:r>
           </a:p>
@@ -23279,7 +23224,7 @@
           <a:lstStyle/>
           <a:p>
             <a:r>
-              <a:rPr lang="en-US" sz="4400" dirty="0" b="0"/>
+              <a:rPr lang="en-US" sz="4400" b="0" dirty="0"/>
               <a:t>Composing Across the Cut</a:t>
             </a:r>
           </a:p>
@@ -23316,10 +23261,7 @@
             <a:pPr>
               <a:defRPr sz="1600" i="1"/>
             </a:pPr>
-            <a:r>
-              <a:rPr lang="en-US" dirty="0" b="0"/>
-              <a:t/>
-            </a:r>
+            <a:endParaRPr/>
           </a:p>
         </p:txBody>
       </p:sp>
@@ -23366,6 +23308,7 @@
           <a:lstStyle/>
           <a:p>
             <a:pPr algn="ctr"/>
+            <a:endParaRPr/>
           </a:p>
         </p:txBody>
       </p:sp>
@@ -23386,7 +23329,7 @@
           <a:noFill/>
         </p:spPr>
         <p:txBody>
-          <a:bodyPr wrap="square" anchor="ctr" lIns="0" rIns="0" tIns="0" bIns="0">
+          <a:bodyPr wrap="square" lIns="0" tIns="0" rIns="0" bIns="0" anchor="ctr">
             <a:spAutoFit/>
           </a:bodyPr>
           <a:lstStyle/>
@@ -23445,6 +23388,7 @@
           <a:lstStyle/>
           <a:p>
             <a:pPr algn="ctr"/>
+            <a:endParaRPr/>
           </a:p>
         </p:txBody>
       </p:sp>
@@ -23491,6 +23435,7 @@
           <a:lstStyle/>
           <a:p>
             <a:pPr algn="ctr"/>
+            <a:endParaRPr/>
           </a:p>
         </p:txBody>
       </p:sp>
@@ -23537,6 +23482,7 @@
           <a:lstStyle/>
           <a:p>
             <a:pPr algn="ctr"/>
+            <a:endParaRPr/>
           </a:p>
         </p:txBody>
       </p:sp>
@@ -23557,7 +23503,7 @@
           <a:noFill/>
         </p:spPr>
         <p:txBody>
-          <a:bodyPr wrap="square" anchor="ctr" lIns="0" rIns="0" tIns="0" bIns="0">
+          <a:bodyPr wrap="square" lIns="0" tIns="0" rIns="0" bIns="0" anchor="ctr">
             <a:spAutoFit/>
           </a:bodyPr>
           <a:lstStyle/>
@@ -23616,6 +23562,7 @@
           <a:lstStyle/>
           <a:p>
             <a:pPr algn="ctr"/>
+            <a:endParaRPr/>
           </a:p>
         </p:txBody>
       </p:sp>
@@ -23660,6 +23607,7 @@
           <a:lstStyle/>
           <a:p>
             <a:pPr algn="ctr"/>
+            <a:endParaRPr/>
           </a:p>
         </p:txBody>
       </p:sp>
@@ -23704,6 +23652,7 @@
           <a:lstStyle/>
           <a:p>
             <a:pPr algn="ctr"/>
+            <a:endParaRPr/>
           </a:p>
         </p:txBody>
       </p:sp>
@@ -23724,7 +23673,7 @@
           <a:noFill/>
         </p:spPr>
         <p:txBody>
-          <a:bodyPr wrap="square" anchor="ctr" lIns="0" rIns="0" tIns="0" bIns="0">
+          <a:bodyPr wrap="square" lIns="0" tIns="0" rIns="0" bIns="0" anchor="ctr">
             <a:spAutoFit/>
           </a:bodyPr>
           <a:lstStyle/>
@@ -23788,7 +23737,7 @@
           <a:lstStyle/>
           <a:p>
             <a:r>
-              <a:rPr lang="en-US" sz="4400" dirty="0" b="0"/>
+              <a:rPr lang="en-US" sz="4400" b="0" dirty="0"/>
               <a:t>Continuity of Position</a:t>
             </a:r>
           </a:p>
@@ -23825,10 +23774,7 @@
             <a:pPr>
               <a:defRPr sz="1600" i="1"/>
             </a:pPr>
-            <a:r>
-              <a:rPr lang="en-US" dirty="0" b="0"/>
-              <a:t/>
-            </a:r>
+            <a:endParaRPr/>
           </a:p>
         </p:txBody>
       </p:sp>
@@ -23875,6 +23821,7 @@
           <a:lstStyle/>
           <a:p>
             <a:pPr algn="ctr"/>
+            <a:endParaRPr/>
           </a:p>
         </p:txBody>
       </p:sp>
@@ -23895,7 +23842,7 @@
           <a:noFill/>
         </p:spPr>
         <p:txBody>
-          <a:bodyPr wrap="square" anchor="ctr" lIns="0" rIns="0" tIns="0" bIns="0">
+          <a:bodyPr wrap="square" lIns="0" tIns="0" rIns="0" bIns="0" anchor="ctr">
             <a:spAutoFit/>
           </a:bodyPr>
           <a:lstStyle/>
@@ -23954,6 +23901,7 @@
           <a:lstStyle/>
           <a:p>
             <a:pPr algn="ctr"/>
+            <a:endParaRPr/>
           </a:p>
         </p:txBody>
       </p:sp>
@@ -24000,6 +23948,7 @@
           <a:lstStyle/>
           <a:p>
             <a:pPr algn="ctr"/>
+            <a:endParaRPr/>
           </a:p>
         </p:txBody>
       </p:sp>
@@ -24020,7 +23969,7 @@
           <a:noFill/>
         </p:spPr>
         <p:txBody>
-          <a:bodyPr wrap="square" anchor="ctr" lIns="0" rIns="0" tIns="0" bIns="0">
+          <a:bodyPr wrap="square" lIns="0" tIns="0" rIns="0" bIns="0" anchor="ctr">
             <a:spAutoFit/>
           </a:bodyPr>
           <a:lstStyle/>
@@ -24081,6 +24030,7 @@
           <a:lstStyle/>
           <a:p>
             <a:pPr algn="ctr"/>
+            <a:endParaRPr/>
           </a:p>
         </p:txBody>
       </p:sp>
@@ -24137,7 +24087,7 @@
           <a:noFill/>
         </p:spPr>
         <p:txBody>
-          <a:bodyPr wrap="square" anchor="ctr" lIns="0" rIns="0" tIns="0" bIns="0">
+          <a:bodyPr wrap="square" lIns="0" tIns="0" rIns="0" bIns="0" anchor="ctr">
             <a:spAutoFit/>
           </a:bodyPr>
           <a:lstStyle/>
@@ -24201,7 +24151,7 @@
           <a:lstStyle/>
           <a:p>
             <a:r>
-              <a:rPr lang="en-US" sz="4400" dirty="0" b="0"/>
+              <a:rPr lang="en-US" sz="4400" b="0" dirty="0"/>
               <a:t>The Graphic Match</a:t>
             </a:r>
           </a:p>
@@ -24236,25 +24186,25 @@
           <a:lstStyle/>
           <a:p>
             <a:r>
-              <a:rPr lang="en-US" dirty="0" b="0"/>
+              <a:rPr lang="en-US" b="0" dirty="0"/>
               <a:t>A shape in one shot echoed by a shape in the next</a:t>
             </a:r>
           </a:p>
           <a:p>
             <a:r>
-              <a:rPr lang="en-US" dirty="0" b="0"/>
+              <a:rPr lang="en-US" b="0" dirty="0"/>
               <a:t>The classic: the bone becomes a spacecraft in 2001</a:t>
             </a:r>
           </a:p>
           <a:p>
             <a:r>
-              <a:rPr lang="en-US" dirty="0" b="0"/>
+              <a:rPr lang="en-US" b="0" dirty="0"/>
               <a:t>Compositional and editorial at the same time</a:t>
             </a:r>
           </a:p>
           <a:p>
             <a:r>
-              <a:rPr lang="en-US" dirty="0" b="0"/>
+              <a:rPr lang="en-US" b="0" dirty="0"/>
               <a:t>Ties two moments together across any distance in time</a:t>
             </a:r>
           </a:p>
@@ -24306,7 +24256,7 @@
           <a:lstStyle/>
           <a:p>
             <a:r>
-              <a:rPr lang="en-US" sz="4400" dirty="0" b="0"/>
+              <a:rPr lang="en-US" sz="4400" b="0" dirty="0"/>
               <a:t>What Design Actually Is Here</a:t>
             </a:r>
           </a:p>
@@ -24341,25 +24291,25 @@
           <a:lstStyle/>
           <a:p>
             <a:r>
-              <a:rPr lang="en-US" dirty="0" b="0"/>
+              <a:rPr lang="en-US" b="0" dirty="0"/>
               <a:t>Not decoration</a:t>
             </a:r>
           </a:p>
           <a:p>
             <a:r>
-              <a:rPr lang="en-US" dirty="0" b="0"/>
+              <a:rPr lang="en-US" b="0" dirty="0"/>
               <a:t>Not making it pretty</a:t>
             </a:r>
           </a:p>
           <a:p>
             <a:r>
-              <a:rPr lang="en-US" dirty="0" b="0"/>
+              <a:rPr lang="en-US" b="0" dirty="0"/>
               <a:t>A set of tools for controlling where attention goes and how it moves</a:t>
             </a:r>
           </a:p>
           <a:p>
             <a:r>
-              <a:rPr lang="en-US" dirty="0" b="0"/>
+              <a:rPr lang="en-US" b="0" dirty="0"/>
               <a:t>You already respond to all of it: today you learn to use it on purpose</a:t>
             </a:r>
           </a:p>
@@ -24411,7 +24361,7 @@
           <a:lstStyle/>
           <a:p>
             <a:r>
-              <a:rPr lang="en-US" sz="4400" dirty="0" b="0"/>
+              <a:rPr lang="en-US" sz="4400" b="0" dirty="0"/>
               <a:t>Motif: Design That Means Something</a:t>
             </a:r>
           </a:p>
@@ -24446,25 +24396,25 @@
           <a:lstStyle/>
           <a:p>
             <a:r>
-              <a:rPr lang="en-US" dirty="0" b="0"/>
+              <a:rPr lang="en-US" b="0" dirty="0"/>
               <a:t>A shape, object, or composition that recurs with meaning</a:t>
             </a:r>
           </a:p>
           <a:p>
             <a:r>
-              <a:rPr lang="en-US" dirty="0" b="0"/>
+              <a:rPr lang="en-US" b="0" dirty="0"/>
               <a:t>E.T.: the bicycle, and then the bicycle against the moon</a:t>
             </a:r>
           </a:p>
           <a:p>
             <a:r>
-              <a:rPr lang="en-US" dirty="0" b="0"/>
+              <a:rPr lang="en-US" b="0" dirty="0"/>
               <a:t>The audience learns your visual vocabulary as they watch</a:t>
             </a:r>
           </a:p>
           <a:p>
             <a:r>
-              <a:rPr lang="en-US" dirty="0" b="0"/>
+              <a:rPr lang="en-US" b="0" dirty="0"/>
               <a:t>Then you use it, and they feel it without knowing why</a:t>
             </a:r>
           </a:p>
@@ -24516,7 +24466,7 @@
           <a:lstStyle/>
           <a:p>
             <a:r>
-              <a:rPr lang="en-US" sz="4400" dirty="0" b="0"/>
+              <a:rPr lang="en-US" sz="4400" b="0" dirty="0"/>
               <a:t>The Visual Echo</a:t>
             </a:r>
           </a:p>
@@ -24551,25 +24501,25 @@
           <a:lstStyle/>
           <a:p>
             <a:r>
-              <a:rPr lang="en-US" dirty="0" b="0"/>
+              <a:rPr lang="en-US" b="0" dirty="0"/>
               <a:t>Repeat a composition and change its meaning</a:t>
             </a:r>
           </a:p>
           <a:p>
             <a:r>
-              <a:rPr lang="en-US" dirty="0" b="0"/>
+              <a:rPr lang="en-US" b="0" dirty="0"/>
               <a:t>Same frame at the start and at the end</a:t>
             </a:r>
           </a:p>
           <a:p>
             <a:r>
-              <a:rPr lang="en-US" dirty="0" b="0"/>
+              <a:rPr lang="en-US" b="0" dirty="0"/>
               <a:t>What changed is the character, not the shot</a:t>
             </a:r>
           </a:p>
           <a:p>
             <a:r>
-              <a:rPr lang="en-US" dirty="0" b="0"/>
+              <a:rPr lang="en-US" b="0" dirty="0"/>
               <a:t>The most satisfying tool you own, and it is free</a:t>
             </a:r>
           </a:p>
@@ -24621,7 +24571,7 @@
           <a:lstStyle/>
           <a:p>
             <a:r>
-              <a:rPr lang="en-US" sz="4400" dirty="0" b="0"/>
+              <a:rPr lang="en-US" sz="4400" b="0" dirty="0"/>
               <a:t>The Checklist</a:t>
             </a:r>
           </a:p>
@@ -24656,37 +24606,37 @@
           <a:lstStyle/>
           <a:p>
             <a:r>
-              <a:rPr lang="en-US" dirty="0" b="0"/>
+              <a:rPr lang="en-US" b="0" dirty="0"/>
               <a:t>Does it read at thumbnail size?</a:t>
             </a:r>
           </a:p>
           <a:p>
             <a:r>
-              <a:rPr lang="en-US" dirty="0" b="0"/>
+              <a:rPr lang="en-US" b="0" dirty="0"/>
               <a:t>Does the figure separate from the ground?</a:t>
             </a:r>
           </a:p>
           <a:p>
             <a:r>
-              <a:rPr lang="en-US" dirty="0" b="0"/>
+              <a:rPr lang="en-US" b="0" dirty="0"/>
               <a:t>Is there exactly ONE dominant element?</a:t>
             </a:r>
           </a:p>
           <a:p>
             <a:r>
-              <a:rPr lang="en-US" dirty="0" b="0"/>
+              <a:rPr lang="en-US" b="0" dirty="0"/>
               <a:t>Headroom, lookroom, leadroom correct?</a:t>
             </a:r>
           </a:p>
           <a:p>
             <a:r>
-              <a:rPr lang="en-US" dirty="0" b="0"/>
+              <a:rPr lang="en-US" b="0" dirty="0"/>
               <a:t>Does it contrast with the panel before it?</a:t>
             </a:r>
           </a:p>
           <a:p>
             <a:r>
-              <a:rPr lang="en-US" dirty="0" b="0"/>
+              <a:rPr lang="en-US" b="0" dirty="0"/>
               <a:t>Where does the eye enter, and where does it leave?</a:t>
             </a:r>
           </a:p>
@@ -24738,7 +24688,7 @@
           <a:lstStyle/>
           <a:p>
             <a:r>
-              <a:rPr lang="en-US" sz="4400" dirty="0" b="0"/>
+              <a:rPr lang="en-US" sz="4400" b="0" dirty="0"/>
               <a:t>Design for Motion Is Not Graphic Design</a:t>
             </a:r>
           </a:p>
@@ -24773,25 +24723,25 @@
           <a:lstStyle/>
           <a:p>
             <a:r>
-              <a:rPr lang="en-US" dirty="0" b="0"/>
+              <a:rPr lang="en-US" b="0" dirty="0"/>
               <a:t>A poster has one frame and unlimited time</a:t>
             </a:r>
           </a:p>
           <a:p>
             <a:r>
-              <a:rPr lang="en-US" dirty="0" b="0"/>
+              <a:rPr lang="en-US" b="0" dirty="0"/>
               <a:t>You have many frames and about one second each</a:t>
             </a:r>
           </a:p>
           <a:p>
             <a:r>
-              <a:rPr lang="en-US" dirty="0" b="0"/>
+              <a:rPr lang="en-US" b="0" dirty="0"/>
               <a:t>Your composition has to survive being replaced</a:t>
             </a:r>
           </a:p>
           <a:p>
             <a:r>
-              <a:rPr lang="en-US" dirty="0" b="0"/>
+              <a:rPr lang="en-US" b="0" dirty="0"/>
               <a:t>Every rule you learn today gets a second meaning in motion</a:t>
             </a:r>
           </a:p>
@@ -24843,7 +24793,7 @@
           <a:lstStyle/>
           <a:p>
             <a:r>
-              <a:rPr lang="en-US" sz="4400" dirty="0" b="0"/>
+              <a:rPr lang="en-US" sz="4400" b="0" dirty="0"/>
               <a:t>The Raw Materials</a:t>
             </a:r>
           </a:p>
@@ -24878,19 +24828,19 @@
           <a:lstStyle/>
           <a:p>
             <a:r>
-              <a:rPr lang="en-US" dirty="0" b="0"/>
+              <a:rPr lang="en-US" b="0" dirty="0"/>
               <a:t>An element is a single piece of a composition</a:t>
             </a:r>
           </a:p>
           <a:p>
             <a:r>
-              <a:rPr lang="en-US" dirty="0" b="0"/>
+              <a:rPr lang="en-US" b="0" dirty="0"/>
               <a:t>Think of them as the particles everything else is built from</a:t>
             </a:r>
           </a:p>
           <a:p>
             <a:r>
-              <a:rPr lang="en-US" dirty="0" b="0"/>
+              <a:rPr lang="en-US" b="0" dirty="0"/>
               <a:t>Six of them do almost all the work</a:t>
             </a:r>
           </a:p>
@@ -24942,7 +24892,7 @@
           <a:lstStyle/>
           <a:p>
             <a:r>
-              <a:rPr lang="en-US" sz="4400" dirty="0" b="0"/>
+              <a:rPr lang="en-US" sz="4400" b="0" dirty="0"/>
               <a:t>The Six Elements</a:t>
             </a:r>
           </a:p>
@@ -24977,37 +24927,37 @@
           <a:lstStyle/>
           <a:p>
             <a:r>
-              <a:rPr lang="en-US" dirty="0" b="0"/>
+              <a:rPr lang="en-US" b="0" dirty="0"/>
               <a:t>LINE: the mark between two points</a:t>
             </a:r>
           </a:p>
           <a:p>
             <a:r>
-              <a:rPr lang="en-US" dirty="0" b="0"/>
+              <a:rPr lang="en-US" b="0" dirty="0"/>
               <a:t>SHAPE: a self-contained area, geometric or organic</a:t>
             </a:r>
           </a:p>
           <a:p>
             <a:r>
-              <a:rPr lang="en-US" dirty="0" b="0"/>
+              <a:rPr lang="en-US" b="0" dirty="0"/>
               <a:t>DIRECTION. Every line has one: horizontal, vertical, or oblique</a:t>
             </a:r>
           </a:p>
           <a:p>
             <a:r>
-              <a:rPr lang="en-US" dirty="0" b="0"/>
+              <a:rPr lang="en-US" b="0" dirty="0"/>
               <a:t>SIZE: the area one shape occupies relative to another</a:t>
             </a:r>
           </a:p>
           <a:p>
             <a:r>
-              <a:rPr lang="en-US" dirty="0" b="0"/>
+              <a:rPr lang="en-US" b="0" dirty="0"/>
               <a:t>TEXTURE: the surface quality: rough, smooth, soft, hard</a:t>
             </a:r>
           </a:p>
           <a:p>
             <a:r>
-              <a:rPr lang="en-US" dirty="0" b="0"/>
+              <a:rPr lang="en-US" b="0" dirty="0"/>
               <a:t>VALUE: the lightness or darkness of a thing</a:t>
             </a:r>
           </a:p>
@@ -25059,7 +25009,7 @@
           <a:lstStyle/>
           <a:p>
             <a:r>
-              <a:rPr lang="en-US" sz="4400" dirty="0" b="0"/>
+              <a:rPr lang="en-US" sz="4400" b="0" dirty="0"/>
               <a:t>Value Does Most of the Work</a:t>
             </a:r>
           </a:p>
@@ -25094,25 +25044,25 @@
           <a:lstStyle/>
           <a:p>
             <a:r>
-              <a:rPr lang="en-US" dirty="0" b="0"/>
+              <a:rPr lang="en-US" b="0" dirty="0"/>
               <a:t>Value is lightness and darkness. Nothing else.</a:t>
             </a:r>
           </a:p>
           <a:p>
             <a:r>
-              <a:rPr lang="en-US" dirty="0" b="0"/>
+              <a:rPr lang="en-US" b="0" dirty="0"/>
               <a:t>It is the first thing the eye resolves</a:t>
             </a:r>
           </a:p>
           <a:p>
             <a:r>
-              <a:rPr lang="en-US" dirty="0" b="0"/>
+              <a:rPr lang="en-US" b="0" dirty="0"/>
               <a:t>It works at any size, at any speed, in any medium</a:t>
             </a:r>
           </a:p>
           <a:p>
             <a:r>
-              <a:rPr lang="en-US" dirty="0" b="0"/>
+              <a:rPr lang="en-US" b="0" dirty="0"/>
               <a:t>If the values are right, a crude drawing reads. If they are wrong, a beautiful one does not.</a:t>
             </a:r>
           </a:p>
